--- a/01_data_analysis_objectives_kpis/data_analysis_objectives_kpis.pptx
+++ b/01_data_analysis_objectives_kpis/data_analysis_objectives_kpis.pptx
@@ -9,15 +9,15 @@
   </p:notesMasterIdLst>
   <p:sldIdLst>
     <p:sldId id="261" r:id="rId2"/>
-    <p:sldId id="259" r:id="rId3"/>
+    <p:sldId id="264" r:id="rId3"/>
     <p:sldId id="260" r:id="rId4"/>
-    <p:sldId id="264" r:id="rId5"/>
+    <p:sldId id="262" r:id="rId5"/>
     <p:sldId id="265" r:id="rId6"/>
-    <p:sldId id="262" r:id="rId7"/>
-    <p:sldId id="266" r:id="rId8"/>
-    <p:sldId id="268" r:id="rId9"/>
-    <p:sldId id="267" r:id="rId10"/>
-    <p:sldId id="269" r:id="rId11"/>
+    <p:sldId id="266" r:id="rId7"/>
+    <p:sldId id="268" r:id="rId8"/>
+    <p:sldId id="267" r:id="rId9"/>
+    <p:sldId id="269" r:id="rId10"/>
+    <p:sldId id="271" r:id="rId11"/>
     <p:sldId id="270" r:id="rId12"/>
   </p:sldIdLst>
   <p:sldSz cx="12192000" cy="6858000"/>
@@ -207,7 +207,7 @@
           <a:p>
             <a:fld id="{629EF45C-B4A1-4048-BF7F-D1617E8131EB}" type="datetimeFigureOut">
               <a:rPr lang="LID4096" smtClean="0"/>
-              <a:t>02/23/2026</a:t>
+              <a:t>02/24/2026</a:t>
             </a:fld>
             <a:endParaRPr lang="LID4096"/>
           </a:p>
@@ -567,7 +567,7 @@
         <p:cNvPr id="1" name="">
           <a:extLst>
             <a:ext uri="{FF2B5EF4-FFF2-40B4-BE49-F238E27FC236}">
-              <a16:creationId xmlns:a16="http://schemas.microsoft.com/office/drawing/2014/main" id="{CF384F69-9143-1CBC-50CF-BC9CF93CFDBA}"/>
+              <a16:creationId xmlns:a16="http://schemas.microsoft.com/office/drawing/2014/main" id="{2EC8A83A-101A-3D79-DE0B-37092F9C3C78}"/>
             </a:ext>
           </a:extLst>
         </p:cNvPr>
@@ -587,7 +587,7 @@
           <p:cNvPr id="2" name="Slide Image Placeholder 1">
             <a:extLst>
               <a:ext uri="{FF2B5EF4-FFF2-40B4-BE49-F238E27FC236}">
-                <a16:creationId xmlns:a16="http://schemas.microsoft.com/office/drawing/2014/main" id="{EA6383A6-C73A-DD9C-44A7-CA8483ABBF5F}"/>
+                <a16:creationId xmlns:a16="http://schemas.microsoft.com/office/drawing/2014/main" id="{1D0954FE-18F4-71D9-6C7E-B73DD96334F0}"/>
               </a:ext>
             </a:extLst>
           </p:cNvPr>
@@ -605,7 +605,7 @@
           <p:cNvPr id="3" name="Notes Placeholder 2">
             <a:extLst>
               <a:ext uri="{FF2B5EF4-FFF2-40B4-BE49-F238E27FC236}">
-                <a16:creationId xmlns:a16="http://schemas.microsoft.com/office/drawing/2014/main" id="{2179761F-38CD-55FE-765B-FEA5A9C5E8E3}"/>
+                <a16:creationId xmlns:a16="http://schemas.microsoft.com/office/drawing/2014/main" id="{592C3DBE-B06D-FEFE-27CA-4B54F9EBB65F}"/>
               </a:ext>
             </a:extLst>
           </p:cNvPr>
@@ -621,45 +621,8 @@
           <a:bodyPr/>
           <a:lstStyle/>
           <a:p>
-            <a:endParaRPr lang="en-US" dirty="0"/>
-          </a:p>
-          <a:p>
-            <a:r>
-              <a:rPr lang="en-US" dirty="0"/>
-              <a:t>The 4 Types of Data Analysis Questions</a:t>
-            </a:r>
-          </a:p>
-          <a:p>
-            <a:endParaRPr lang="en-US" dirty="0"/>
-          </a:p>
-          <a:p>
-            <a:r>
-              <a:rPr lang="en-US" dirty="0"/>
-              <a:t>Descriptive	"What happened?"	Dashboards, reporting, data aggregation</a:t>
-            </a:r>
-          </a:p>
-          <a:p>
-            <a:r>
-              <a:rPr lang="en-US" dirty="0"/>
-              <a:t>Diagnostic	"Why did it happen?"	Root cause analysis</a:t>
-            </a:r>
-          </a:p>
-          <a:p>
-            <a:r>
-              <a:rPr lang="en-US" dirty="0"/>
-              <a:t>Predictive	"What is likely to happen?"	Forecasting</a:t>
-            </a:r>
-          </a:p>
-          <a:p>
-            <a:r>
-              <a:rPr lang="en-US" dirty="0"/>
-              <a:t>Prescriptive	"What should we do?"	Recommends specific actions to achieve a desired outcome</a:t>
-            </a:r>
             <a:endParaRPr lang="LID4096" dirty="0"/>
           </a:p>
-          <a:p>
-            <a:endParaRPr lang="LID4096" dirty="0"/>
-          </a:p>
         </p:txBody>
       </p:sp>
       <p:sp>
@@ -667,7 +630,7 @@
           <p:cNvPr id="4" name="Slide Number Placeholder 3">
             <a:extLst>
               <a:ext uri="{FF2B5EF4-FFF2-40B4-BE49-F238E27FC236}">
-                <a16:creationId xmlns:a16="http://schemas.microsoft.com/office/drawing/2014/main" id="{124F78A2-FDD2-DDCB-ADEE-7C34076174F5}"/>
+                <a16:creationId xmlns:a16="http://schemas.microsoft.com/office/drawing/2014/main" id="{14A859B8-602E-F263-845A-86DA1D8E167F}"/>
               </a:ext>
             </a:extLst>
           </p:cNvPr>
@@ -694,7 +657,7 @@
     </p:spTree>
     <p:extLst>
       <p:ext uri="{BB962C8B-B14F-4D97-AF65-F5344CB8AC3E}">
-        <p14:creationId xmlns:p14="http://schemas.microsoft.com/office/powerpoint/2010/main" val="3758402045"/>
+        <p14:creationId xmlns:p14="http://schemas.microsoft.com/office/powerpoint/2010/main" val="2227777323"/>
       </p:ext>
     </p:extLst>
   </p:cSld>
@@ -704,7 +667,7 @@
 </p:notes>
 </file>
 
-<file path=ppt/notesSlides/notesSlide2.xml><?xml version="1.0" encoding="utf-8"?>
+<file path=ppt/notesSlides/notesSlide11.xml><?xml version="1.0" encoding="utf-8"?>
 <p:notes xmlns:a="http://schemas.openxmlformats.org/drawingml/2006/main" xmlns:r="http://schemas.openxmlformats.org/officeDocument/2006/relationships" xmlns:p="http://schemas.openxmlformats.org/presentationml/2006/main">
   <p:cSld>
     <p:spTree>
@@ -769,6 +732,114 @@
           <a:p>
             <a:fld id="{60C2D7CD-EEF3-4145-A484-A9D67FF727B1}" type="slidenum">
               <a:rPr lang="LID4096" smtClean="0"/>
+              <a:t>11</a:t>
+            </a:fld>
+            <a:endParaRPr lang="LID4096"/>
+          </a:p>
+        </p:txBody>
+      </p:sp>
+    </p:spTree>
+    <p:extLst>
+      <p:ext uri="{BB962C8B-B14F-4D97-AF65-F5344CB8AC3E}">
+        <p14:creationId xmlns:p14="http://schemas.microsoft.com/office/powerpoint/2010/main" val="1218723015"/>
+      </p:ext>
+    </p:extLst>
+  </p:cSld>
+  <p:clrMapOvr>
+    <a:masterClrMapping/>
+  </p:clrMapOvr>
+</p:notes>
+</file>
+
+<file path=ppt/notesSlides/notesSlide2.xml><?xml version="1.0" encoding="utf-8"?>
+<p:notes xmlns:a="http://schemas.openxmlformats.org/drawingml/2006/main" xmlns:r="http://schemas.openxmlformats.org/officeDocument/2006/relationships" xmlns:p="http://schemas.openxmlformats.org/presentationml/2006/main">
+  <p:cSld>
+    <p:spTree>
+      <p:nvGrpSpPr>
+        <p:cNvPr id="1" name="">
+          <a:extLst>
+            <a:ext uri="{FF2B5EF4-FFF2-40B4-BE49-F238E27FC236}">
+              <a16:creationId xmlns:a16="http://schemas.microsoft.com/office/drawing/2014/main" id="{99B0741A-758B-58F3-9547-075B3114E2C4}"/>
+            </a:ext>
+          </a:extLst>
+        </p:cNvPr>
+        <p:cNvGrpSpPr/>
+        <p:nvPr/>
+      </p:nvGrpSpPr>
+      <p:grpSpPr>
+        <a:xfrm>
+          <a:off x="0" y="0"/>
+          <a:ext cx="0" cy="0"/>
+          <a:chOff x="0" y="0"/>
+          <a:chExt cx="0" cy="0"/>
+        </a:xfrm>
+      </p:grpSpPr>
+      <p:sp>
+        <p:nvSpPr>
+          <p:cNvPr id="2" name="Slide Image Placeholder 1">
+            <a:extLst>
+              <a:ext uri="{FF2B5EF4-FFF2-40B4-BE49-F238E27FC236}">
+                <a16:creationId xmlns:a16="http://schemas.microsoft.com/office/drawing/2014/main" id="{5D3DA989-6CC3-9A30-67EF-C7AE6795286C}"/>
+              </a:ext>
+            </a:extLst>
+          </p:cNvPr>
+          <p:cNvSpPr>
+            <a:spLocks noGrp="1" noRot="1" noChangeAspect="1"/>
+          </p:cNvSpPr>
+          <p:nvPr>
+            <p:ph type="sldImg"/>
+          </p:nvPr>
+        </p:nvSpPr>
+        <p:spPr/>
+      </p:sp>
+      <p:sp>
+        <p:nvSpPr>
+          <p:cNvPr id="3" name="Notes Placeholder 2">
+            <a:extLst>
+              <a:ext uri="{FF2B5EF4-FFF2-40B4-BE49-F238E27FC236}">
+                <a16:creationId xmlns:a16="http://schemas.microsoft.com/office/drawing/2014/main" id="{5854EED0-94D8-B606-57B5-3AB1ECD84DB0}"/>
+              </a:ext>
+            </a:extLst>
+          </p:cNvPr>
+          <p:cNvSpPr>
+            <a:spLocks noGrp="1"/>
+          </p:cNvSpPr>
+          <p:nvPr>
+            <p:ph type="body" idx="1"/>
+          </p:nvPr>
+        </p:nvSpPr>
+        <p:spPr/>
+        <p:txBody>
+          <a:bodyPr/>
+          <a:lstStyle/>
+          <a:p>
+            <a:endParaRPr lang="en-US" dirty="0"/>
+          </a:p>
+        </p:txBody>
+      </p:sp>
+      <p:sp>
+        <p:nvSpPr>
+          <p:cNvPr id="4" name="Slide Number Placeholder 3">
+            <a:extLst>
+              <a:ext uri="{FF2B5EF4-FFF2-40B4-BE49-F238E27FC236}">
+                <a16:creationId xmlns:a16="http://schemas.microsoft.com/office/drawing/2014/main" id="{2F218964-E0E9-3EB6-75FC-8AC710386C40}"/>
+              </a:ext>
+            </a:extLst>
+          </p:cNvPr>
+          <p:cNvSpPr>
+            <a:spLocks noGrp="1"/>
+          </p:cNvSpPr>
+          <p:nvPr>
+            <p:ph type="sldNum" sz="quarter" idx="5"/>
+          </p:nvPr>
+        </p:nvSpPr>
+        <p:spPr/>
+        <p:txBody>
+          <a:bodyPr/>
+          <a:lstStyle/>
+          <a:p>
+            <a:fld id="{60C2D7CD-EEF3-4145-A484-A9D67FF727B1}" type="slidenum">
+              <a:rPr lang="LID4096" smtClean="0"/>
               <a:t>2</a:t>
             </a:fld>
             <a:endParaRPr lang="LID4096"/>
@@ -778,7 +849,7 @@
     </p:spTree>
     <p:extLst>
       <p:ext uri="{BB962C8B-B14F-4D97-AF65-F5344CB8AC3E}">
-        <p14:creationId xmlns:p14="http://schemas.microsoft.com/office/powerpoint/2010/main" val="886407043"/>
+        <p14:creationId xmlns:p14="http://schemas.microsoft.com/office/powerpoint/2010/main" val="1759720132"/>
       </p:ext>
     </p:extLst>
   </p:cSld>
@@ -880,7 +951,7 @@
         <p:cNvPr id="1" name="">
           <a:extLst>
             <a:ext uri="{FF2B5EF4-FFF2-40B4-BE49-F238E27FC236}">
-              <a16:creationId xmlns:a16="http://schemas.microsoft.com/office/drawing/2014/main" id="{99B0741A-758B-58F3-9547-075B3114E2C4}"/>
+              <a16:creationId xmlns:a16="http://schemas.microsoft.com/office/drawing/2014/main" id="{8CBBF8E1-3F98-2D4A-A187-71A87BABCD02}"/>
             </a:ext>
           </a:extLst>
         </p:cNvPr>
@@ -900,7 +971,7 @@
           <p:cNvPr id="2" name="Slide Image Placeholder 1">
             <a:extLst>
               <a:ext uri="{FF2B5EF4-FFF2-40B4-BE49-F238E27FC236}">
-                <a16:creationId xmlns:a16="http://schemas.microsoft.com/office/drawing/2014/main" id="{5D3DA989-6CC3-9A30-67EF-C7AE6795286C}"/>
+                <a16:creationId xmlns:a16="http://schemas.microsoft.com/office/drawing/2014/main" id="{0FB79535-D580-53FC-AF97-E3C06BE411E2}"/>
               </a:ext>
             </a:extLst>
           </p:cNvPr>
@@ -918,7 +989,7 @@
           <p:cNvPr id="3" name="Notes Placeholder 2">
             <a:extLst>
               <a:ext uri="{FF2B5EF4-FFF2-40B4-BE49-F238E27FC236}">
-                <a16:creationId xmlns:a16="http://schemas.microsoft.com/office/drawing/2014/main" id="{5854EED0-94D8-B606-57B5-3AB1ECD84DB0}"/>
+                <a16:creationId xmlns:a16="http://schemas.microsoft.com/office/drawing/2014/main" id="{41D6D207-9405-7961-89E3-DF8DAFBA29FA}"/>
               </a:ext>
             </a:extLst>
           </p:cNvPr>
@@ -943,7 +1014,7 @@
           <p:cNvPr id="4" name="Slide Number Placeholder 3">
             <a:extLst>
               <a:ext uri="{FF2B5EF4-FFF2-40B4-BE49-F238E27FC236}">
-                <a16:creationId xmlns:a16="http://schemas.microsoft.com/office/drawing/2014/main" id="{2F218964-E0E9-3EB6-75FC-8AC710386C40}"/>
+                <a16:creationId xmlns:a16="http://schemas.microsoft.com/office/drawing/2014/main" id="{BA0CA030-4A91-82F2-0663-BBAB7286E7E4}"/>
               </a:ext>
             </a:extLst>
           </p:cNvPr>
@@ -970,7 +1041,7 @@
     </p:spTree>
     <p:extLst>
       <p:ext uri="{BB962C8B-B14F-4D97-AF65-F5344CB8AC3E}">
-        <p14:creationId xmlns:p14="http://schemas.microsoft.com/office/powerpoint/2010/main" val="1759720132"/>
+        <p14:creationId xmlns:p14="http://schemas.microsoft.com/office/powerpoint/2010/main" val="221946109"/>
       </p:ext>
     </p:extLst>
   </p:cSld>
@@ -1096,114 +1167,6 @@
         <p:cNvPr id="1" name="">
           <a:extLst>
             <a:ext uri="{FF2B5EF4-FFF2-40B4-BE49-F238E27FC236}">
-              <a16:creationId xmlns:a16="http://schemas.microsoft.com/office/drawing/2014/main" id="{8CBBF8E1-3F98-2D4A-A187-71A87BABCD02}"/>
-            </a:ext>
-          </a:extLst>
-        </p:cNvPr>
-        <p:cNvGrpSpPr/>
-        <p:nvPr/>
-      </p:nvGrpSpPr>
-      <p:grpSpPr>
-        <a:xfrm>
-          <a:off x="0" y="0"/>
-          <a:ext cx="0" cy="0"/>
-          <a:chOff x="0" y="0"/>
-          <a:chExt cx="0" cy="0"/>
-        </a:xfrm>
-      </p:grpSpPr>
-      <p:sp>
-        <p:nvSpPr>
-          <p:cNvPr id="2" name="Slide Image Placeholder 1">
-            <a:extLst>
-              <a:ext uri="{FF2B5EF4-FFF2-40B4-BE49-F238E27FC236}">
-                <a16:creationId xmlns:a16="http://schemas.microsoft.com/office/drawing/2014/main" id="{0FB79535-D580-53FC-AF97-E3C06BE411E2}"/>
-              </a:ext>
-            </a:extLst>
-          </p:cNvPr>
-          <p:cNvSpPr>
-            <a:spLocks noGrp="1" noRot="1" noChangeAspect="1"/>
-          </p:cNvSpPr>
-          <p:nvPr>
-            <p:ph type="sldImg"/>
-          </p:nvPr>
-        </p:nvSpPr>
-        <p:spPr/>
-      </p:sp>
-      <p:sp>
-        <p:nvSpPr>
-          <p:cNvPr id="3" name="Notes Placeholder 2">
-            <a:extLst>
-              <a:ext uri="{FF2B5EF4-FFF2-40B4-BE49-F238E27FC236}">
-                <a16:creationId xmlns:a16="http://schemas.microsoft.com/office/drawing/2014/main" id="{41D6D207-9405-7961-89E3-DF8DAFBA29FA}"/>
-              </a:ext>
-            </a:extLst>
-          </p:cNvPr>
-          <p:cNvSpPr>
-            <a:spLocks noGrp="1"/>
-          </p:cNvSpPr>
-          <p:nvPr>
-            <p:ph type="body" idx="1"/>
-          </p:nvPr>
-        </p:nvSpPr>
-        <p:spPr/>
-        <p:txBody>
-          <a:bodyPr/>
-          <a:lstStyle/>
-          <a:p>
-            <a:endParaRPr lang="en-US" dirty="0"/>
-          </a:p>
-        </p:txBody>
-      </p:sp>
-      <p:sp>
-        <p:nvSpPr>
-          <p:cNvPr id="4" name="Slide Number Placeholder 3">
-            <a:extLst>
-              <a:ext uri="{FF2B5EF4-FFF2-40B4-BE49-F238E27FC236}">
-                <a16:creationId xmlns:a16="http://schemas.microsoft.com/office/drawing/2014/main" id="{BA0CA030-4A91-82F2-0663-BBAB7286E7E4}"/>
-              </a:ext>
-            </a:extLst>
-          </p:cNvPr>
-          <p:cNvSpPr>
-            <a:spLocks noGrp="1"/>
-          </p:cNvSpPr>
-          <p:nvPr>
-            <p:ph type="sldNum" sz="quarter" idx="5"/>
-          </p:nvPr>
-        </p:nvSpPr>
-        <p:spPr/>
-        <p:txBody>
-          <a:bodyPr/>
-          <a:lstStyle/>
-          <a:p>
-            <a:fld id="{60C2D7CD-EEF3-4145-A484-A9D67FF727B1}" type="slidenum">
-              <a:rPr lang="LID4096" smtClean="0"/>
-              <a:t>6</a:t>
-            </a:fld>
-            <a:endParaRPr lang="LID4096"/>
-          </a:p>
-        </p:txBody>
-      </p:sp>
-    </p:spTree>
-    <p:extLst>
-      <p:ext uri="{BB962C8B-B14F-4D97-AF65-F5344CB8AC3E}">
-        <p14:creationId xmlns:p14="http://schemas.microsoft.com/office/powerpoint/2010/main" val="221946109"/>
-      </p:ext>
-    </p:extLst>
-  </p:cSld>
-  <p:clrMapOvr>
-    <a:masterClrMapping/>
-  </p:clrMapOvr>
-</p:notes>
-</file>
-
-<file path=ppt/notesSlides/notesSlide7.xml><?xml version="1.0" encoding="utf-8"?>
-<p:notes xmlns:a="http://schemas.openxmlformats.org/drawingml/2006/main" xmlns:r="http://schemas.openxmlformats.org/officeDocument/2006/relationships" xmlns:p="http://schemas.openxmlformats.org/presentationml/2006/main">
-  <p:cSld>
-    <p:spTree>
-      <p:nvGrpSpPr>
-        <p:cNvPr id="1" name="">
-          <a:extLst>
-            <a:ext uri="{FF2B5EF4-FFF2-40B4-BE49-F238E27FC236}">
               <a16:creationId xmlns:a16="http://schemas.microsoft.com/office/drawing/2014/main" id="{60AE1ED1-A938-04A3-02D1-6B28B0DEB31B}"/>
             </a:ext>
           </a:extLst>
@@ -1285,7 +1248,7 @@
           <a:p>
             <a:fld id="{60C2D7CD-EEF3-4145-A484-A9D67FF727B1}" type="slidenum">
               <a:rPr lang="LID4096" smtClean="0"/>
-              <a:t>7</a:t>
+              <a:t>6</a:t>
             </a:fld>
             <a:endParaRPr lang="LID4096"/>
           </a:p>
@@ -1295,6 +1258,90 @@
     <p:extLst>
       <p:ext uri="{BB962C8B-B14F-4D97-AF65-F5344CB8AC3E}">
         <p14:creationId xmlns:p14="http://schemas.microsoft.com/office/powerpoint/2010/main" val="2673592453"/>
+      </p:ext>
+    </p:extLst>
+  </p:cSld>
+  <p:clrMapOvr>
+    <a:masterClrMapping/>
+  </p:clrMapOvr>
+</p:notes>
+</file>
+
+<file path=ppt/notesSlides/notesSlide7.xml><?xml version="1.0" encoding="utf-8"?>
+<p:notes xmlns:a="http://schemas.openxmlformats.org/drawingml/2006/main" xmlns:r="http://schemas.openxmlformats.org/officeDocument/2006/relationships" xmlns:p="http://schemas.openxmlformats.org/presentationml/2006/main">
+  <p:cSld>
+    <p:spTree>
+      <p:nvGrpSpPr>
+        <p:cNvPr id="1" name=""/>
+        <p:cNvGrpSpPr/>
+        <p:nvPr/>
+      </p:nvGrpSpPr>
+      <p:grpSpPr>
+        <a:xfrm>
+          <a:off x="0" y="0"/>
+          <a:ext cx="0" cy="0"/>
+          <a:chOff x="0" y="0"/>
+          <a:chExt cx="0" cy="0"/>
+        </a:xfrm>
+      </p:grpSpPr>
+      <p:sp>
+        <p:nvSpPr>
+          <p:cNvPr id="2" name="Slide Image Placeholder 1"/>
+          <p:cNvSpPr>
+            <a:spLocks noGrp="1" noRot="1" noChangeAspect="1"/>
+          </p:cNvSpPr>
+          <p:nvPr>
+            <p:ph type="sldImg"/>
+          </p:nvPr>
+        </p:nvSpPr>
+        <p:spPr/>
+      </p:sp>
+      <p:sp>
+        <p:nvSpPr>
+          <p:cNvPr id="3" name="Notes Placeholder 2"/>
+          <p:cNvSpPr>
+            <a:spLocks noGrp="1"/>
+          </p:cNvSpPr>
+          <p:nvPr>
+            <p:ph type="body" idx="1"/>
+          </p:nvPr>
+        </p:nvSpPr>
+        <p:spPr/>
+        <p:txBody>
+          <a:bodyPr/>
+          <a:lstStyle/>
+          <a:p>
+            <a:endParaRPr lang="LID4096" dirty="0"/>
+          </a:p>
+        </p:txBody>
+      </p:sp>
+      <p:sp>
+        <p:nvSpPr>
+          <p:cNvPr id="4" name="Slide Number Placeholder 3"/>
+          <p:cNvSpPr>
+            <a:spLocks noGrp="1"/>
+          </p:cNvSpPr>
+          <p:nvPr>
+            <p:ph type="sldNum" sz="quarter" idx="5"/>
+          </p:nvPr>
+        </p:nvSpPr>
+        <p:spPr/>
+        <p:txBody>
+          <a:bodyPr/>
+          <a:lstStyle/>
+          <a:p>
+            <a:fld id="{60C2D7CD-EEF3-4145-A484-A9D67FF727B1}" type="slidenum">
+              <a:rPr lang="LID4096" smtClean="0"/>
+              <a:t>7</a:t>
+            </a:fld>
+            <a:endParaRPr lang="LID4096"/>
+          </a:p>
+        </p:txBody>
+      </p:sp>
+    </p:spTree>
+    <p:extLst>
+      <p:ext uri="{BB962C8B-B14F-4D97-AF65-F5344CB8AC3E}">
+        <p14:creationId xmlns:p14="http://schemas.microsoft.com/office/powerpoint/2010/main" val="1193679822"/>
       </p:ext>
     </p:extLst>
   </p:cSld>
@@ -1348,6 +1395,43 @@
           <a:bodyPr/>
           <a:lstStyle/>
           <a:p>
+            <a:endParaRPr lang="en-US" dirty="0"/>
+          </a:p>
+          <a:p>
+            <a:r>
+              <a:rPr lang="en-US" dirty="0"/>
+              <a:t>The 4 Types of Data Analysis Questions</a:t>
+            </a:r>
+          </a:p>
+          <a:p>
+            <a:endParaRPr lang="en-US" dirty="0"/>
+          </a:p>
+          <a:p>
+            <a:r>
+              <a:rPr lang="en-US" dirty="0"/>
+              <a:t>Descriptive	"What happened?"	Dashboards, reporting, data aggregation</a:t>
+            </a:r>
+          </a:p>
+          <a:p>
+            <a:r>
+              <a:rPr lang="en-US" dirty="0"/>
+              <a:t>Diagnostic	"Why did it happen?"	Root cause analysis</a:t>
+            </a:r>
+          </a:p>
+          <a:p>
+            <a:r>
+              <a:rPr lang="en-US" dirty="0"/>
+              <a:t>Predictive	"What is likely to happen?"	Forecasting</a:t>
+            </a:r>
+          </a:p>
+          <a:p>
+            <a:r>
+              <a:rPr lang="en-US" dirty="0"/>
+              <a:t>Prescriptive	"What should we do?"	Recommends specific actions to achieve a desired outcome</a:t>
+            </a:r>
+            <a:endParaRPr lang="LID4096" dirty="0"/>
+          </a:p>
+          <a:p>
             <a:endParaRPr lang="LID4096" dirty="0"/>
           </a:p>
         </p:txBody>
@@ -1378,7 +1462,7 @@
     </p:spTree>
     <p:extLst>
       <p:ext uri="{BB962C8B-B14F-4D97-AF65-F5344CB8AC3E}">
-        <p14:creationId xmlns:p14="http://schemas.microsoft.com/office/powerpoint/2010/main" val="1193679822"/>
+        <p14:creationId xmlns:p14="http://schemas.microsoft.com/office/powerpoint/2010/main" val="1400127193"/>
       </p:ext>
     </p:extLst>
   </p:cSld>
@@ -1393,7 +1477,13 @@
   <p:cSld>
     <p:spTree>
       <p:nvGrpSpPr>
-        <p:cNvPr id="1" name=""/>
+        <p:cNvPr id="1" name="">
+          <a:extLst>
+            <a:ext uri="{FF2B5EF4-FFF2-40B4-BE49-F238E27FC236}">
+              <a16:creationId xmlns:a16="http://schemas.microsoft.com/office/drawing/2014/main" id="{CF384F69-9143-1CBC-50CF-BC9CF93CFDBA}"/>
+            </a:ext>
+          </a:extLst>
+        </p:cNvPr>
         <p:cNvGrpSpPr/>
         <p:nvPr/>
       </p:nvGrpSpPr>
@@ -1407,7 +1497,13 @@
       </p:grpSpPr>
       <p:sp>
         <p:nvSpPr>
-          <p:cNvPr id="2" name="Slide Image Placeholder 1"/>
+          <p:cNvPr id="2" name="Slide Image Placeholder 1">
+            <a:extLst>
+              <a:ext uri="{FF2B5EF4-FFF2-40B4-BE49-F238E27FC236}">
+                <a16:creationId xmlns:a16="http://schemas.microsoft.com/office/drawing/2014/main" id="{EA6383A6-C73A-DD9C-44A7-CA8483ABBF5F}"/>
+              </a:ext>
+            </a:extLst>
+          </p:cNvPr>
           <p:cNvSpPr>
             <a:spLocks noGrp="1" noRot="1" noChangeAspect="1"/>
           </p:cNvSpPr>
@@ -1419,7 +1515,13 @@
       </p:sp>
       <p:sp>
         <p:nvSpPr>
-          <p:cNvPr id="3" name="Notes Placeholder 2"/>
+          <p:cNvPr id="3" name="Notes Placeholder 2">
+            <a:extLst>
+              <a:ext uri="{FF2B5EF4-FFF2-40B4-BE49-F238E27FC236}">
+                <a16:creationId xmlns:a16="http://schemas.microsoft.com/office/drawing/2014/main" id="{2179761F-38CD-55FE-765B-FEA5A9C5E8E3}"/>
+              </a:ext>
+            </a:extLst>
+          </p:cNvPr>
           <p:cNvSpPr>
             <a:spLocks noGrp="1"/>
           </p:cNvSpPr>
@@ -1475,7 +1577,13 @@
       </p:sp>
       <p:sp>
         <p:nvSpPr>
-          <p:cNvPr id="4" name="Slide Number Placeholder 3"/>
+          <p:cNvPr id="4" name="Slide Number Placeholder 3">
+            <a:extLst>
+              <a:ext uri="{FF2B5EF4-FFF2-40B4-BE49-F238E27FC236}">
+                <a16:creationId xmlns:a16="http://schemas.microsoft.com/office/drawing/2014/main" id="{124F78A2-FDD2-DDCB-ADEE-7C34076174F5}"/>
+              </a:ext>
+            </a:extLst>
+          </p:cNvPr>
           <p:cNvSpPr>
             <a:spLocks noGrp="1"/>
           </p:cNvSpPr>
@@ -1499,7 +1607,7 @@
     </p:spTree>
     <p:extLst>
       <p:ext uri="{BB962C8B-B14F-4D97-AF65-F5344CB8AC3E}">
-        <p14:creationId xmlns:p14="http://schemas.microsoft.com/office/powerpoint/2010/main" val="1400127193"/>
+        <p14:creationId xmlns:p14="http://schemas.microsoft.com/office/powerpoint/2010/main" val="3758402045"/>
       </p:ext>
     </p:extLst>
   </p:cSld>
@@ -1658,7 +1766,7 @@
           <a:p>
             <a:fld id="{6F5A3FF9-0028-4556-8BB5-EE36D45F941B}" type="datetimeFigureOut">
               <a:rPr lang="LID4096" smtClean="0"/>
-              <a:t>02/23/2026</a:t>
+              <a:t>02/24/2026</a:t>
             </a:fld>
             <a:endParaRPr lang="LID4096"/>
           </a:p>
@@ -1858,7 +1966,7 @@
           <a:p>
             <a:fld id="{6F5A3FF9-0028-4556-8BB5-EE36D45F941B}" type="datetimeFigureOut">
               <a:rPr lang="LID4096" smtClean="0"/>
-              <a:t>02/23/2026</a:t>
+              <a:t>02/24/2026</a:t>
             </a:fld>
             <a:endParaRPr lang="LID4096"/>
           </a:p>
@@ -2068,7 +2176,7 @@
           <a:p>
             <a:fld id="{6F5A3FF9-0028-4556-8BB5-EE36D45F941B}" type="datetimeFigureOut">
               <a:rPr lang="LID4096" smtClean="0"/>
-              <a:t>02/23/2026</a:t>
+              <a:t>02/24/2026</a:t>
             </a:fld>
             <a:endParaRPr lang="LID4096"/>
           </a:p>
@@ -2268,7 +2376,7 @@
           <a:p>
             <a:fld id="{6F5A3FF9-0028-4556-8BB5-EE36D45F941B}" type="datetimeFigureOut">
               <a:rPr lang="LID4096" smtClean="0"/>
-              <a:t>02/23/2026</a:t>
+              <a:t>02/24/2026</a:t>
             </a:fld>
             <a:endParaRPr lang="LID4096"/>
           </a:p>
@@ -2544,7 +2652,7 @@
           <a:p>
             <a:fld id="{6F5A3FF9-0028-4556-8BB5-EE36D45F941B}" type="datetimeFigureOut">
               <a:rPr lang="LID4096" smtClean="0"/>
-              <a:t>02/23/2026</a:t>
+              <a:t>02/24/2026</a:t>
             </a:fld>
             <a:endParaRPr lang="LID4096"/>
           </a:p>
@@ -2812,7 +2920,7 @@
           <a:p>
             <a:fld id="{6F5A3FF9-0028-4556-8BB5-EE36D45F941B}" type="datetimeFigureOut">
               <a:rPr lang="LID4096" smtClean="0"/>
-              <a:t>02/23/2026</a:t>
+              <a:t>02/24/2026</a:t>
             </a:fld>
             <a:endParaRPr lang="LID4096"/>
           </a:p>
@@ -3227,7 +3335,7 @@
           <a:p>
             <a:fld id="{6F5A3FF9-0028-4556-8BB5-EE36D45F941B}" type="datetimeFigureOut">
               <a:rPr lang="LID4096" smtClean="0"/>
-              <a:t>02/23/2026</a:t>
+              <a:t>02/24/2026</a:t>
             </a:fld>
             <a:endParaRPr lang="LID4096"/>
           </a:p>
@@ -3369,7 +3477,7 @@
           <a:p>
             <a:fld id="{6F5A3FF9-0028-4556-8BB5-EE36D45F941B}" type="datetimeFigureOut">
               <a:rPr lang="LID4096" smtClean="0"/>
-              <a:t>02/23/2026</a:t>
+              <a:t>02/24/2026</a:t>
             </a:fld>
             <a:endParaRPr lang="LID4096"/>
           </a:p>
@@ -3482,7 +3590,7 @@
           <a:p>
             <a:fld id="{6F5A3FF9-0028-4556-8BB5-EE36D45F941B}" type="datetimeFigureOut">
               <a:rPr lang="LID4096" smtClean="0"/>
-              <a:t>02/23/2026</a:t>
+              <a:t>02/24/2026</a:t>
             </a:fld>
             <a:endParaRPr lang="LID4096"/>
           </a:p>
@@ -3795,7 +3903,7 @@
           <a:p>
             <a:fld id="{6F5A3FF9-0028-4556-8BB5-EE36D45F941B}" type="datetimeFigureOut">
               <a:rPr lang="LID4096" smtClean="0"/>
-              <a:t>02/23/2026</a:t>
+              <a:t>02/24/2026</a:t>
             </a:fld>
             <a:endParaRPr lang="LID4096"/>
           </a:p>
@@ -4084,7 +4192,7 @@
           <a:p>
             <a:fld id="{6F5A3FF9-0028-4556-8BB5-EE36D45F941B}" type="datetimeFigureOut">
               <a:rPr lang="LID4096" smtClean="0"/>
-              <a:t>02/23/2026</a:t>
+              <a:t>02/24/2026</a:t>
             </a:fld>
             <a:endParaRPr lang="LID4096"/>
           </a:p>
@@ -4327,7 +4435,7 @@
           <a:p>
             <a:fld id="{6F5A3FF9-0028-4556-8BB5-EE36D45F941B}" type="datetimeFigureOut">
               <a:rPr lang="LID4096" smtClean="0"/>
-              <a:t>02/23/2026</a:t>
+              <a:t>02/24/2026</a:t>
             </a:fld>
             <a:endParaRPr lang="LID4096"/>
           </a:p>
@@ -4866,7 +4974,7 @@
         <p:cNvPr id="1" name="">
           <a:extLst>
             <a:ext uri="{FF2B5EF4-FFF2-40B4-BE49-F238E27FC236}">
-              <a16:creationId xmlns:a16="http://schemas.microsoft.com/office/drawing/2014/main" id="{A564C6B1-33B9-2DBC-AC58-93D5A7CAC342}"/>
+              <a16:creationId xmlns:a16="http://schemas.microsoft.com/office/drawing/2014/main" id="{F636E91C-F813-D899-3F9C-0A4F29494F6B}"/>
             </a:ext>
           </a:extLst>
         </p:cNvPr>
@@ -4883,702 +4991,20 @@
       </p:grpSpPr>
       <p:sp>
         <p:nvSpPr>
-          <p:cNvPr id="7" name="Rectangle: Rounded Corners 6">
-            <a:extLst>
-              <a:ext uri="{FF2B5EF4-FFF2-40B4-BE49-F238E27FC236}">
-                <a16:creationId xmlns:a16="http://schemas.microsoft.com/office/drawing/2014/main" id="{984F80A2-E69A-EE92-0461-010F2F7DE6F7}"/>
-              </a:ext>
-            </a:extLst>
-          </p:cNvPr>
-          <p:cNvSpPr/>
+          <p:cNvPr id="5" name="TextBox 4">
+            <a:extLst>
+              <a:ext uri="{FF2B5EF4-FFF2-40B4-BE49-F238E27FC236}">
+                <a16:creationId xmlns:a16="http://schemas.microsoft.com/office/drawing/2014/main" id="{1FE5B19C-E249-3902-A2A1-DF36411B256D}"/>
+              </a:ext>
+            </a:extLst>
+          </p:cNvPr>
+          <p:cNvSpPr txBox="1"/>
           <p:nvPr/>
         </p:nvSpPr>
         <p:spPr>
           <a:xfrm>
-            <a:off x="2679778" y="4506364"/>
-            <a:ext cx="2724811" cy="2046835"/>
-          </a:xfrm>
-          <a:prstGeom prst="roundRect">
-            <a:avLst/>
-          </a:prstGeom>
-          <a:solidFill>
-            <a:srgbClr val="FFC000"/>
-          </a:solidFill>
-          <a:ln>
-            <a:noFill/>
-          </a:ln>
-        </p:spPr>
-        <p:style>
-          <a:lnRef idx="2">
-            <a:schemeClr val="accent1">
-              <a:shade val="15000"/>
-            </a:schemeClr>
-          </a:lnRef>
-          <a:fillRef idx="1">
-            <a:schemeClr val="accent1"/>
-          </a:fillRef>
-          <a:effectRef idx="0">
-            <a:schemeClr val="accent1"/>
-          </a:effectRef>
-          <a:fontRef idx="minor">
-            <a:schemeClr val="lt1"/>
-          </a:fontRef>
-        </p:style>
-        <p:txBody>
-          <a:bodyPr rtlCol="0" anchor="ctr"/>
-          <a:lstStyle/>
-          <a:p>
-            <a:pPr algn="ctr"/>
-            <a:r>
-              <a:rPr lang="en-US" sz="2000" b="1" dirty="0" err="1">
-                <a:solidFill>
-                  <a:schemeClr val="tx1"/>
-                </a:solidFill>
-              </a:rPr>
-              <a:t>Prädiktiv</a:t>
-            </a:r>
-            <a:r>
-              <a:rPr lang="en-US" b="1" dirty="0">
-                <a:solidFill>
-                  <a:schemeClr val="tx1"/>
-                </a:solidFill>
-              </a:rPr>
-              <a:t> </a:t>
-            </a:r>
-          </a:p>
-          <a:p>
-            <a:pPr algn="ctr"/>
-            <a:endParaRPr lang="en-US" dirty="0">
-              <a:solidFill>
-                <a:schemeClr val="tx1"/>
-              </a:solidFill>
-            </a:endParaRPr>
-          </a:p>
-          <a:p>
-            <a:pPr algn="ctr"/>
-            <a:r>
-              <a:rPr lang="en-US" sz="1400" dirty="0">
-                <a:solidFill>
-                  <a:schemeClr val="tx1"/>
-                </a:solidFill>
-              </a:rPr>
-              <a:t>Was </a:t>
-            </a:r>
-            <a:r>
-              <a:rPr lang="en-US" sz="1400" dirty="0" err="1">
-                <a:solidFill>
-                  <a:schemeClr val="tx1"/>
-                </a:solidFill>
-              </a:rPr>
-              <a:t>wird</a:t>
-            </a:r>
-            <a:r>
-              <a:rPr lang="en-US" sz="1400" dirty="0">
-                <a:solidFill>
-                  <a:schemeClr val="tx1"/>
-                </a:solidFill>
-              </a:rPr>
-              <a:t> </a:t>
-            </a:r>
-            <a:r>
-              <a:rPr lang="en-US" sz="1400" dirty="0" err="1">
-                <a:solidFill>
-                  <a:schemeClr val="tx1"/>
-                </a:solidFill>
-              </a:rPr>
-              <a:t>wahrscheinlich</a:t>
-            </a:r>
-            <a:r>
-              <a:rPr lang="en-US" sz="1400" dirty="0">
-                <a:solidFill>
-                  <a:schemeClr val="tx1"/>
-                </a:solidFill>
-              </a:rPr>
-              <a:t> </a:t>
-            </a:r>
-            <a:r>
-              <a:rPr lang="en-US" sz="1400" dirty="0" err="1">
-                <a:solidFill>
-                  <a:schemeClr val="tx1"/>
-                </a:solidFill>
-              </a:rPr>
-              <a:t>passieren</a:t>
-            </a:r>
-            <a:r>
-              <a:rPr lang="en-US" sz="1400" dirty="0">
-                <a:solidFill>
-                  <a:schemeClr val="tx1"/>
-                </a:solidFill>
-              </a:rPr>
-              <a:t>?</a:t>
-            </a:r>
-          </a:p>
-          <a:p>
-            <a:pPr algn="ctr"/>
-            <a:r>
-              <a:rPr lang="en-US" sz="1400" dirty="0" err="1">
-                <a:solidFill>
-                  <a:schemeClr val="tx1"/>
-                </a:solidFill>
-              </a:rPr>
-              <a:t>Prognosen</a:t>
-            </a:r>
-            <a:endParaRPr lang="en-US" sz="1400" dirty="0">
-              <a:solidFill>
-                <a:schemeClr val="tx1"/>
-              </a:solidFill>
-            </a:endParaRPr>
-          </a:p>
-          <a:p>
-            <a:pPr algn="ctr"/>
-            <a:r>
-              <a:rPr lang="en-US" sz="1200" dirty="0">
-                <a:solidFill>
-                  <a:schemeClr val="tx1"/>
-                </a:solidFill>
-              </a:rPr>
-              <a:t>What would be the price of </a:t>
-            </a:r>
-            <a:r>
-              <a:rPr lang="en-US" sz="1200" dirty="0" err="1">
-                <a:solidFill>
-                  <a:schemeClr val="tx1"/>
-                </a:solidFill>
-              </a:rPr>
-              <a:t>Simense</a:t>
-            </a:r>
-            <a:r>
-              <a:rPr lang="en-US" sz="1200" dirty="0">
-                <a:solidFill>
-                  <a:schemeClr val="tx1"/>
-                </a:solidFill>
-              </a:rPr>
-              <a:t> tomorrow?</a:t>
-            </a:r>
-            <a:endParaRPr lang="LID4096" sz="1200" dirty="0">
-              <a:solidFill>
-                <a:schemeClr val="tx1"/>
-              </a:solidFill>
-            </a:endParaRPr>
-          </a:p>
-        </p:txBody>
-      </p:sp>
-      <p:sp>
-        <p:nvSpPr>
-          <p:cNvPr id="11" name="Rectangle: Rounded Corners 10">
-            <a:extLst>
-              <a:ext uri="{FF2B5EF4-FFF2-40B4-BE49-F238E27FC236}">
-                <a16:creationId xmlns:a16="http://schemas.microsoft.com/office/drawing/2014/main" id="{7B71A0FD-5076-CC95-7983-54F469C4EBF2}"/>
-              </a:ext>
-            </a:extLst>
-          </p:cNvPr>
-          <p:cNvSpPr/>
-          <p:nvPr/>
-        </p:nvSpPr>
-        <p:spPr>
-          <a:xfrm>
-            <a:off x="6359919" y="4506364"/>
-            <a:ext cx="2724811" cy="2046835"/>
-          </a:xfrm>
-          <a:prstGeom prst="roundRect">
-            <a:avLst/>
-          </a:prstGeom>
-          <a:solidFill>
-            <a:schemeClr val="accent2">
-              <a:lumMod val="60000"/>
-              <a:lumOff val="40000"/>
-            </a:schemeClr>
-          </a:solidFill>
-          <a:ln>
-            <a:noFill/>
-          </a:ln>
-        </p:spPr>
-        <p:style>
-          <a:lnRef idx="2">
-            <a:schemeClr val="accent1">
-              <a:shade val="15000"/>
-            </a:schemeClr>
-          </a:lnRef>
-          <a:fillRef idx="1">
-            <a:schemeClr val="accent1"/>
-          </a:fillRef>
-          <a:effectRef idx="0">
-            <a:schemeClr val="accent1"/>
-          </a:effectRef>
-          <a:fontRef idx="minor">
-            <a:schemeClr val="lt1"/>
-          </a:fontRef>
-        </p:style>
-        <p:txBody>
-          <a:bodyPr rtlCol="0" anchor="ctr"/>
-          <a:lstStyle/>
-          <a:p>
-            <a:pPr algn="ctr"/>
-            <a:r>
-              <a:rPr lang="en-US" sz="2000" b="1" dirty="0">
-                <a:solidFill>
-                  <a:schemeClr val="tx1"/>
-                </a:solidFill>
-              </a:rPr>
-              <a:t>Präskriptiv</a:t>
-            </a:r>
-            <a:r>
-              <a:rPr lang="en-US" b="1" dirty="0">
-                <a:solidFill>
-                  <a:schemeClr val="tx1"/>
-                </a:solidFill>
-              </a:rPr>
-              <a:t> </a:t>
-            </a:r>
-          </a:p>
-          <a:p>
-            <a:pPr algn="ctr"/>
-            <a:endParaRPr lang="en-US" dirty="0">
-              <a:solidFill>
-                <a:schemeClr val="tx1"/>
-              </a:solidFill>
-            </a:endParaRPr>
-          </a:p>
-          <a:p>
-            <a:pPr algn="ctr"/>
-            <a:r>
-              <a:rPr lang="en-US" sz="1400" dirty="0">
-                <a:solidFill>
-                  <a:schemeClr val="tx1"/>
-                </a:solidFill>
-              </a:rPr>
-              <a:t>Was </a:t>
-            </a:r>
-            <a:r>
-              <a:rPr lang="en-US" sz="1400" dirty="0" err="1">
-                <a:solidFill>
-                  <a:schemeClr val="tx1"/>
-                </a:solidFill>
-              </a:rPr>
-              <a:t>sollen</a:t>
-            </a:r>
-            <a:r>
-              <a:rPr lang="en-US" sz="1400" dirty="0">
-                <a:solidFill>
-                  <a:schemeClr val="tx1"/>
-                </a:solidFill>
-              </a:rPr>
-              <a:t> </a:t>
-            </a:r>
-            <a:r>
-              <a:rPr lang="en-US" sz="1400" dirty="0" err="1">
-                <a:solidFill>
-                  <a:schemeClr val="tx1"/>
-                </a:solidFill>
-              </a:rPr>
-              <a:t>wir</a:t>
-            </a:r>
-            <a:r>
-              <a:rPr lang="en-US" sz="1400" dirty="0">
-                <a:solidFill>
-                  <a:schemeClr val="tx1"/>
-                </a:solidFill>
-              </a:rPr>
-              <a:t> tun?</a:t>
-            </a:r>
-          </a:p>
-          <a:p>
-            <a:pPr algn="ctr"/>
-            <a:r>
-              <a:rPr lang="en-US" sz="1400" dirty="0" err="1">
-                <a:solidFill>
-                  <a:schemeClr val="tx1"/>
-                </a:solidFill>
-              </a:rPr>
-              <a:t>Handlungsempfehlungen</a:t>
-            </a:r>
-            <a:endParaRPr lang="en-US" sz="1400" dirty="0">
-              <a:solidFill>
-                <a:schemeClr val="tx1"/>
-              </a:solidFill>
-            </a:endParaRPr>
-          </a:p>
-          <a:p>
-            <a:pPr algn="ctr"/>
-            <a:r>
-              <a:rPr lang="en-US" sz="1200" dirty="0">
-                <a:solidFill>
-                  <a:schemeClr val="tx1"/>
-                </a:solidFill>
-              </a:rPr>
-              <a:t>Should we increase price by 5 % next month?</a:t>
-            </a:r>
-            <a:endParaRPr lang="LID4096" sz="1200" dirty="0">
-              <a:solidFill>
-                <a:schemeClr val="tx1"/>
-              </a:solidFill>
-            </a:endParaRPr>
-          </a:p>
-        </p:txBody>
-      </p:sp>
-      <p:sp>
-        <p:nvSpPr>
-          <p:cNvPr id="12" name="Rectangle: Rounded Corners 11">
-            <a:extLst>
-              <a:ext uri="{FF2B5EF4-FFF2-40B4-BE49-F238E27FC236}">
-                <a16:creationId xmlns:a16="http://schemas.microsoft.com/office/drawing/2014/main" id="{231F4F12-9BCF-8551-6603-E2EE4BD22D04}"/>
-              </a:ext>
-            </a:extLst>
-          </p:cNvPr>
-          <p:cNvSpPr/>
-          <p:nvPr/>
-        </p:nvSpPr>
-        <p:spPr>
-          <a:xfrm>
-            <a:off x="2679779" y="1659467"/>
-            <a:ext cx="2724811" cy="2046835"/>
-          </a:xfrm>
-          <a:prstGeom prst="roundRect">
-            <a:avLst/>
-          </a:prstGeom>
-          <a:solidFill>
-            <a:schemeClr val="accent1">
-              <a:lumMod val="60000"/>
-              <a:lumOff val="40000"/>
-            </a:schemeClr>
-          </a:solidFill>
-          <a:ln>
-            <a:noFill/>
-          </a:ln>
-        </p:spPr>
-        <p:style>
-          <a:lnRef idx="2">
-            <a:schemeClr val="accent1">
-              <a:shade val="15000"/>
-            </a:schemeClr>
-          </a:lnRef>
-          <a:fillRef idx="1">
-            <a:schemeClr val="accent1"/>
-          </a:fillRef>
-          <a:effectRef idx="0">
-            <a:schemeClr val="accent1"/>
-          </a:effectRef>
-          <a:fontRef idx="minor">
-            <a:schemeClr val="lt1"/>
-          </a:fontRef>
-        </p:style>
-        <p:txBody>
-          <a:bodyPr rtlCol="0" anchor="ctr"/>
-          <a:lstStyle/>
-          <a:p>
-            <a:pPr algn="ctr"/>
-            <a:r>
-              <a:rPr lang="en-US" sz="2000" b="1" dirty="0" err="1">
-                <a:solidFill>
-                  <a:schemeClr val="tx1"/>
-                </a:solidFill>
-              </a:rPr>
-              <a:t>Deskriptiv</a:t>
-            </a:r>
-            <a:r>
-              <a:rPr lang="en-US" sz="2000" b="1" dirty="0">
-                <a:solidFill>
-                  <a:schemeClr val="tx1"/>
-                </a:solidFill>
-              </a:rPr>
-              <a:t> </a:t>
-            </a:r>
-          </a:p>
-          <a:p>
-            <a:pPr algn="ctr"/>
-            <a:endParaRPr lang="en-US" dirty="0">
-              <a:solidFill>
-                <a:schemeClr val="tx1"/>
-              </a:solidFill>
-            </a:endParaRPr>
-          </a:p>
-          <a:p>
-            <a:pPr algn="ctr"/>
-            <a:r>
-              <a:rPr lang="en-US" sz="1400" dirty="0">
-                <a:solidFill>
-                  <a:schemeClr val="tx1"/>
-                </a:solidFill>
-              </a:rPr>
-              <a:t>Was </a:t>
-            </a:r>
-            <a:r>
-              <a:rPr lang="en-US" sz="1400" dirty="0" err="1">
-                <a:solidFill>
-                  <a:schemeClr val="tx1"/>
-                </a:solidFill>
-              </a:rPr>
-              <a:t>ist</a:t>
-            </a:r>
-            <a:r>
-              <a:rPr lang="en-US" sz="1400" dirty="0">
-                <a:solidFill>
-                  <a:schemeClr val="tx1"/>
-                </a:solidFill>
-              </a:rPr>
-              <a:t> </a:t>
-            </a:r>
-            <a:r>
-              <a:rPr lang="en-US" sz="1400" dirty="0" err="1">
-                <a:solidFill>
-                  <a:schemeClr val="tx1"/>
-                </a:solidFill>
-              </a:rPr>
-              <a:t>passiert</a:t>
-            </a:r>
-            <a:r>
-              <a:rPr lang="en-US" sz="1400" dirty="0">
-                <a:solidFill>
-                  <a:schemeClr val="tx1"/>
-                </a:solidFill>
-              </a:rPr>
-              <a:t>?</a:t>
-            </a:r>
-          </a:p>
-          <a:p>
-            <a:pPr algn="ctr"/>
-            <a:r>
-              <a:rPr lang="en-US" sz="1400" dirty="0">
-                <a:solidFill>
-                  <a:schemeClr val="tx1"/>
-                </a:solidFill>
-              </a:rPr>
-              <a:t>Dashboard, </a:t>
-            </a:r>
-            <a:r>
-              <a:rPr lang="en-US" sz="1400" dirty="0" err="1">
-                <a:solidFill>
-                  <a:schemeClr val="tx1"/>
-                </a:solidFill>
-              </a:rPr>
-              <a:t>daten</a:t>
-            </a:r>
-            <a:r>
-              <a:rPr lang="en-US" sz="1400" dirty="0">
-                <a:solidFill>
-                  <a:schemeClr val="tx1"/>
-                </a:solidFill>
-              </a:rPr>
-              <a:t> aggregation</a:t>
-            </a:r>
-          </a:p>
-          <a:p>
-            <a:pPr algn="ctr"/>
-            <a:r>
-              <a:rPr lang="en-US" sz="1200" dirty="0">
-                <a:solidFill>
-                  <a:schemeClr val="tx1">
-                    <a:lumMod val="85000"/>
-                    <a:lumOff val="15000"/>
-                  </a:schemeClr>
-                </a:solidFill>
-              </a:rPr>
-              <a:t>What was the average test score last month?</a:t>
-            </a:r>
-            <a:endParaRPr lang="LID4096" sz="1100" dirty="0">
-              <a:solidFill>
-                <a:schemeClr val="tx1">
-                  <a:lumMod val="85000"/>
-                  <a:lumOff val="15000"/>
-                </a:schemeClr>
-              </a:solidFill>
-            </a:endParaRPr>
-          </a:p>
-        </p:txBody>
-      </p:sp>
-      <p:sp>
-        <p:nvSpPr>
-          <p:cNvPr id="13" name="Rectangle: Rounded Corners 12">
-            <a:extLst>
-              <a:ext uri="{FF2B5EF4-FFF2-40B4-BE49-F238E27FC236}">
-                <a16:creationId xmlns:a16="http://schemas.microsoft.com/office/drawing/2014/main" id="{87173726-AE18-EB65-1992-70251583DB2C}"/>
-              </a:ext>
-            </a:extLst>
-          </p:cNvPr>
-          <p:cNvSpPr/>
-          <p:nvPr/>
-        </p:nvSpPr>
-        <p:spPr>
-          <a:xfrm>
-            <a:off x="6359920" y="1659467"/>
-            <a:ext cx="2724811" cy="2046835"/>
-          </a:xfrm>
-          <a:prstGeom prst="roundRect">
-            <a:avLst/>
-          </a:prstGeom>
-          <a:solidFill>
-            <a:schemeClr val="accent4">
-              <a:lumMod val="60000"/>
-              <a:lumOff val="40000"/>
-            </a:schemeClr>
-          </a:solidFill>
-          <a:ln>
-            <a:noFill/>
-          </a:ln>
-        </p:spPr>
-        <p:style>
-          <a:lnRef idx="2">
-            <a:schemeClr val="accent1">
-              <a:shade val="15000"/>
-            </a:schemeClr>
-          </a:lnRef>
-          <a:fillRef idx="1">
-            <a:schemeClr val="accent1"/>
-          </a:fillRef>
-          <a:effectRef idx="0">
-            <a:schemeClr val="accent1"/>
-          </a:effectRef>
-          <a:fontRef idx="minor">
-            <a:schemeClr val="lt1"/>
-          </a:fontRef>
-        </p:style>
-        <p:txBody>
-          <a:bodyPr rtlCol="0" anchor="ctr"/>
-          <a:lstStyle/>
-          <a:p>
-            <a:pPr algn="ctr"/>
-            <a:r>
-              <a:rPr lang="en-US" sz="2000" b="1" dirty="0" err="1">
-                <a:solidFill>
-                  <a:schemeClr val="tx1"/>
-                </a:solidFill>
-              </a:rPr>
-              <a:t>Diagnostisch</a:t>
-            </a:r>
-            <a:r>
-              <a:rPr lang="en-US" b="1" dirty="0">
-                <a:solidFill>
-                  <a:schemeClr val="tx1"/>
-                </a:solidFill>
-              </a:rPr>
-              <a:t> </a:t>
-            </a:r>
-          </a:p>
-          <a:p>
-            <a:pPr algn="ctr"/>
-            <a:endParaRPr lang="en-US" dirty="0">
-              <a:solidFill>
-                <a:schemeClr val="tx1"/>
-              </a:solidFill>
-            </a:endParaRPr>
-          </a:p>
-          <a:p>
-            <a:pPr algn="ctr"/>
-            <a:r>
-              <a:rPr lang="en-US" sz="1400" dirty="0" err="1">
-                <a:solidFill>
-                  <a:schemeClr val="tx1"/>
-                </a:solidFill>
-              </a:rPr>
-              <a:t>Warum</a:t>
-            </a:r>
-            <a:r>
-              <a:rPr lang="en-US" sz="1400" dirty="0">
-                <a:solidFill>
-                  <a:schemeClr val="tx1"/>
-                </a:solidFill>
-              </a:rPr>
-              <a:t> </a:t>
-            </a:r>
-            <a:r>
-              <a:rPr lang="en-US" sz="1400" dirty="0" err="1">
-                <a:solidFill>
-                  <a:schemeClr val="tx1"/>
-                </a:solidFill>
-              </a:rPr>
-              <a:t>ist</a:t>
-            </a:r>
-            <a:r>
-              <a:rPr lang="en-US" sz="1400" dirty="0">
-                <a:solidFill>
-                  <a:schemeClr val="tx1"/>
-                </a:solidFill>
-              </a:rPr>
-              <a:t> es </a:t>
-            </a:r>
-            <a:r>
-              <a:rPr lang="en-US" sz="1400" dirty="0" err="1">
-                <a:solidFill>
-                  <a:schemeClr val="tx1"/>
-                </a:solidFill>
-              </a:rPr>
-              <a:t>passiert</a:t>
-            </a:r>
-            <a:r>
-              <a:rPr lang="en-US" sz="1400" dirty="0">
-                <a:solidFill>
-                  <a:schemeClr val="tx1"/>
-                </a:solidFill>
-              </a:rPr>
-              <a:t>?</a:t>
-            </a:r>
-          </a:p>
-          <a:p>
-            <a:pPr algn="ctr"/>
-            <a:r>
-              <a:rPr lang="en-US" sz="1400" dirty="0" err="1">
-                <a:solidFill>
-                  <a:schemeClr val="tx1"/>
-                </a:solidFill>
-              </a:rPr>
-              <a:t>Ursachen</a:t>
-            </a:r>
-            <a:r>
-              <a:rPr lang="en-US" sz="1400" dirty="0">
-                <a:solidFill>
-                  <a:schemeClr val="tx1"/>
-                </a:solidFill>
-              </a:rPr>
-              <a:t> </a:t>
-            </a:r>
-            <a:r>
-              <a:rPr lang="en-US" sz="1400" dirty="0" err="1">
-                <a:solidFill>
-                  <a:schemeClr val="tx1"/>
-                </a:solidFill>
-              </a:rPr>
-              <a:t>analyse</a:t>
-            </a:r>
-            <a:endParaRPr lang="en-US" sz="1400" dirty="0">
-              <a:solidFill>
-                <a:schemeClr val="tx1"/>
-              </a:solidFill>
-            </a:endParaRPr>
-          </a:p>
-          <a:p>
-            <a:pPr algn="ctr"/>
-            <a:r>
-              <a:rPr lang="en-US" sz="1200" dirty="0">
-                <a:solidFill>
-                  <a:schemeClr val="tx1"/>
-                </a:solidFill>
-              </a:rPr>
-              <a:t>Why did sales drop last week?</a:t>
-            </a:r>
-            <a:endParaRPr lang="LID4096" sz="1400" dirty="0">
-              <a:solidFill>
-                <a:schemeClr val="tx1"/>
-              </a:solidFill>
-            </a:endParaRPr>
-          </a:p>
-        </p:txBody>
-      </p:sp>
-      <p:sp>
-        <p:nvSpPr>
-          <p:cNvPr id="16" name="TextBox 15">
-            <a:extLst>
-              <a:ext uri="{FF2B5EF4-FFF2-40B4-BE49-F238E27FC236}">
-                <a16:creationId xmlns:a16="http://schemas.microsoft.com/office/drawing/2014/main" id="{3E2F213E-ABFB-684F-098E-9FB8F1F6B320}"/>
-              </a:ext>
-            </a:extLst>
-          </p:cNvPr>
-          <p:cNvSpPr txBox="1"/>
-          <p:nvPr/>
-        </p:nvSpPr>
-        <p:spPr>
-          <a:xfrm>
-            <a:off x="543998" y="593523"/>
-            <a:ext cx="5966870" cy="523220"/>
+            <a:off x="914397" y="969309"/>
+            <a:ext cx="10258345" cy="369332"/>
           </a:xfrm>
           <a:prstGeom prst="rect">
             <a:avLst/>
@@ -5592,441 +5018,921 @@
           <a:lstStyle/>
           <a:p>
             <a:r>
-              <a:rPr lang="de-DE" sz="2800" b="1"/>
-              <a:t>Die 4 Arten von Datenanalyse-Fragen</a:t>
-            </a:r>
-            <a:endParaRPr lang="de-DE" sz="2800" b="1" dirty="0"/>
-          </a:p>
-        </p:txBody>
-      </p:sp>
-      <p:sp>
-        <p:nvSpPr>
-          <p:cNvPr id="18" name="TextBox 17">
-            <a:extLst>
-              <a:ext uri="{FF2B5EF4-FFF2-40B4-BE49-F238E27FC236}">
-                <a16:creationId xmlns:a16="http://schemas.microsoft.com/office/drawing/2014/main" id="{FABC9C7A-79F2-8071-3325-28541661B27C}"/>
-              </a:ext>
-            </a:extLst>
-          </p:cNvPr>
-          <p:cNvSpPr txBox="1"/>
-          <p:nvPr/>
-        </p:nvSpPr>
-        <p:spPr>
-          <a:xfrm>
-            <a:off x="10244668" y="47193"/>
-            <a:ext cx="1925335" cy="369332"/>
-          </a:xfrm>
-          <a:prstGeom prst="rect">
-            <a:avLst/>
-          </a:prstGeom>
-          <a:noFill/>
-        </p:spPr>
-        <p:txBody>
-          <a:bodyPr wrap="none" rtlCol="0">
-            <a:spAutoFit/>
-          </a:bodyPr>
-          <a:lstStyle/>
-          <a:p>
-            <a:r>
-              <a:rPr lang="en-US" dirty="0"/>
-              <a:t>Types of questions</a:t>
-            </a:r>
-            <a:endParaRPr lang="LID4096" dirty="0"/>
-          </a:p>
-        </p:txBody>
-      </p:sp>
-      <p:sp>
-        <p:nvSpPr>
-          <p:cNvPr id="3" name="TextBox 2">
-            <a:extLst>
-              <a:ext uri="{FF2B5EF4-FFF2-40B4-BE49-F238E27FC236}">
-                <a16:creationId xmlns:a16="http://schemas.microsoft.com/office/drawing/2014/main" id="{F61FDF87-0196-5D30-43A5-57C441EC1778}"/>
-              </a:ext>
-            </a:extLst>
-          </p:cNvPr>
-          <p:cNvSpPr txBox="1"/>
-          <p:nvPr/>
-        </p:nvSpPr>
-        <p:spPr>
-          <a:xfrm>
-            <a:off x="626924" y="2359719"/>
-            <a:ext cx="1937390" cy="584775"/>
-          </a:xfrm>
-          <a:prstGeom prst="rect">
-            <a:avLst/>
-          </a:prstGeom>
-          <a:noFill/>
-        </p:spPr>
-        <p:txBody>
-          <a:bodyPr wrap="none" rtlCol="0">
-            <a:spAutoFit/>
-          </a:bodyPr>
-          <a:lstStyle/>
-          <a:p>
-            <a:pPr algn="r"/>
-            <a:r>
-              <a:rPr lang="en-US" sz="1600" b="1" dirty="0"/>
-              <a:t>Descriptive Statistics</a:t>
-            </a:r>
-          </a:p>
-          <a:p>
-            <a:pPr algn="r"/>
-            <a:r>
-              <a:rPr lang="en-US" sz="1600" b="1" dirty="0"/>
-              <a:t>Data Visualization</a:t>
-            </a:r>
-            <a:endParaRPr lang="LID4096" sz="1600" b="1" dirty="0"/>
-          </a:p>
-        </p:txBody>
-      </p:sp>
-      <p:sp>
-        <p:nvSpPr>
-          <p:cNvPr id="4" name="TextBox 3">
-            <a:extLst>
-              <a:ext uri="{FF2B5EF4-FFF2-40B4-BE49-F238E27FC236}">
-                <a16:creationId xmlns:a16="http://schemas.microsoft.com/office/drawing/2014/main" id="{60AD942C-8FD8-D60A-3073-1850358CD9AB}"/>
-              </a:ext>
-            </a:extLst>
-          </p:cNvPr>
-          <p:cNvSpPr txBox="1"/>
-          <p:nvPr/>
-        </p:nvSpPr>
-        <p:spPr>
-          <a:xfrm>
-            <a:off x="863031" y="5206616"/>
-            <a:ext cx="1704314" cy="584775"/>
-          </a:xfrm>
-          <a:prstGeom prst="rect">
-            <a:avLst/>
-          </a:prstGeom>
-          <a:noFill/>
-        </p:spPr>
-        <p:txBody>
-          <a:bodyPr wrap="none" rtlCol="0">
-            <a:spAutoFit/>
-          </a:bodyPr>
-          <a:lstStyle/>
-          <a:p>
-            <a:pPr algn="r"/>
-            <a:r>
-              <a:rPr lang="en-US" sz="1600" b="1" dirty="0"/>
-              <a:t>Statistical Models</a:t>
-            </a:r>
-          </a:p>
-          <a:p>
-            <a:pPr algn="r"/>
-            <a:r>
-              <a:rPr lang="en-US" sz="1600" b="1" dirty="0"/>
-              <a:t>Machine Learning</a:t>
-            </a:r>
-            <a:endParaRPr lang="LID4096" sz="1600" b="1" dirty="0"/>
-          </a:p>
-        </p:txBody>
-      </p:sp>
-      <p:sp>
-        <p:nvSpPr>
-          <p:cNvPr id="5" name="TextBox 4">
-            <a:extLst>
-              <a:ext uri="{FF2B5EF4-FFF2-40B4-BE49-F238E27FC236}">
-                <a16:creationId xmlns:a16="http://schemas.microsoft.com/office/drawing/2014/main" id="{9AE0182F-C8DA-D523-76A6-C6F6B484F738}"/>
-              </a:ext>
-            </a:extLst>
-          </p:cNvPr>
-          <p:cNvSpPr txBox="1"/>
-          <p:nvPr/>
-        </p:nvSpPr>
-        <p:spPr>
-          <a:xfrm>
-            <a:off x="9177860" y="2359719"/>
-            <a:ext cx="1480213" cy="584775"/>
-          </a:xfrm>
-          <a:prstGeom prst="rect">
-            <a:avLst/>
-          </a:prstGeom>
-          <a:noFill/>
-        </p:spPr>
-        <p:txBody>
-          <a:bodyPr wrap="none" rtlCol="0">
-            <a:spAutoFit/>
-          </a:bodyPr>
-          <a:lstStyle/>
-          <a:p>
-            <a:r>
-              <a:rPr lang="en-US" sz="1600" b="1" dirty="0"/>
-              <a:t>Correlation</a:t>
-            </a:r>
-          </a:p>
-          <a:p>
-            <a:r>
-              <a:rPr lang="en-US" sz="1600" b="1" dirty="0"/>
-              <a:t>Causal Analysis</a:t>
-            </a:r>
-            <a:endParaRPr lang="LID4096" sz="1600" b="1" dirty="0"/>
-          </a:p>
-        </p:txBody>
-      </p:sp>
-      <p:sp>
-        <p:nvSpPr>
-          <p:cNvPr id="6" name="TextBox 5">
-            <a:extLst>
-              <a:ext uri="{FF2B5EF4-FFF2-40B4-BE49-F238E27FC236}">
-                <a16:creationId xmlns:a16="http://schemas.microsoft.com/office/drawing/2014/main" id="{E2A80A53-B08D-145C-7923-F30376ABA6A6}"/>
-              </a:ext>
-            </a:extLst>
-          </p:cNvPr>
-          <p:cNvSpPr txBox="1"/>
-          <p:nvPr/>
-        </p:nvSpPr>
-        <p:spPr>
-          <a:xfrm>
-            <a:off x="9177863" y="5206616"/>
-            <a:ext cx="1290161" cy="584775"/>
-          </a:xfrm>
-          <a:prstGeom prst="rect">
-            <a:avLst/>
-          </a:prstGeom>
-          <a:noFill/>
-        </p:spPr>
-        <p:txBody>
-          <a:bodyPr wrap="none" rtlCol="0">
-            <a:spAutoFit/>
-          </a:bodyPr>
-          <a:lstStyle/>
-          <a:p>
-            <a:r>
-              <a:rPr lang="en-US" sz="1600" b="1" dirty="0"/>
-              <a:t>Optimization</a:t>
-            </a:r>
-          </a:p>
-          <a:p>
-            <a:r>
-              <a:rPr lang="en-US" sz="1600" b="1" dirty="0"/>
-              <a:t>Simulation</a:t>
-            </a:r>
-            <a:endParaRPr lang="LID4096" sz="1600" b="1" dirty="0"/>
-          </a:p>
-        </p:txBody>
-      </p:sp>
-      <p:sp>
-        <p:nvSpPr>
-          <p:cNvPr id="9" name="Rectangle: Rounded Corners 8">
-            <a:extLst>
-              <a:ext uri="{FF2B5EF4-FFF2-40B4-BE49-F238E27FC236}">
-                <a16:creationId xmlns:a16="http://schemas.microsoft.com/office/drawing/2014/main" id="{0002193A-84CB-700C-5867-C5B2E81AF05A}"/>
-              </a:ext>
-            </a:extLst>
-          </p:cNvPr>
-          <p:cNvSpPr/>
-          <p:nvPr/>
-        </p:nvSpPr>
-        <p:spPr>
-          <a:xfrm>
-            <a:off x="6359920" y="1659467"/>
-            <a:ext cx="4790677" cy="2046835"/>
-          </a:xfrm>
-          <a:prstGeom prst="roundRect">
-            <a:avLst/>
-          </a:prstGeom>
-          <a:noFill/>
-          <a:ln>
-            <a:solidFill>
-              <a:schemeClr val="bg2">
-                <a:lumMod val="50000"/>
-              </a:schemeClr>
-            </a:solidFill>
-          </a:ln>
-        </p:spPr>
-        <p:style>
-          <a:lnRef idx="2">
-            <a:schemeClr val="accent1">
-              <a:shade val="15000"/>
-            </a:schemeClr>
-          </a:lnRef>
-          <a:fillRef idx="1">
-            <a:schemeClr val="accent1"/>
-          </a:fillRef>
-          <a:effectRef idx="0">
-            <a:schemeClr val="accent1"/>
-          </a:effectRef>
-          <a:fontRef idx="minor">
-            <a:schemeClr val="lt1"/>
-          </a:fontRef>
-        </p:style>
-        <p:txBody>
-          <a:bodyPr rtlCol="0" anchor="ctr"/>
-          <a:lstStyle/>
-          <a:p>
-            <a:pPr algn="ctr"/>
-            <a:endParaRPr lang="LID4096"/>
-          </a:p>
-        </p:txBody>
-      </p:sp>
-      <p:sp>
-        <p:nvSpPr>
-          <p:cNvPr id="10" name="Rectangle: Rounded Corners 9">
-            <a:extLst>
-              <a:ext uri="{FF2B5EF4-FFF2-40B4-BE49-F238E27FC236}">
-                <a16:creationId xmlns:a16="http://schemas.microsoft.com/office/drawing/2014/main" id="{3477360A-A6CA-8090-D9B6-2F77EE651BB4}"/>
-              </a:ext>
-            </a:extLst>
-          </p:cNvPr>
-          <p:cNvSpPr/>
-          <p:nvPr/>
-        </p:nvSpPr>
-        <p:spPr>
-          <a:xfrm>
-            <a:off x="6359918" y="4506364"/>
-            <a:ext cx="4790677" cy="2046835"/>
-          </a:xfrm>
-          <a:prstGeom prst="roundRect">
-            <a:avLst/>
-          </a:prstGeom>
-          <a:noFill/>
-          <a:ln>
-            <a:solidFill>
-              <a:schemeClr val="bg2">
-                <a:lumMod val="50000"/>
-              </a:schemeClr>
-            </a:solidFill>
-          </a:ln>
-        </p:spPr>
-        <p:style>
-          <a:lnRef idx="2">
-            <a:schemeClr val="accent1">
-              <a:shade val="15000"/>
-            </a:schemeClr>
-          </a:lnRef>
-          <a:fillRef idx="1">
-            <a:schemeClr val="accent1"/>
-          </a:fillRef>
-          <a:effectRef idx="0">
-            <a:schemeClr val="accent1"/>
-          </a:effectRef>
-          <a:fontRef idx="minor">
-            <a:schemeClr val="lt1"/>
-          </a:fontRef>
-        </p:style>
-        <p:txBody>
-          <a:bodyPr rtlCol="0" anchor="ctr"/>
-          <a:lstStyle/>
-          <a:p>
-            <a:pPr algn="ctr"/>
-            <a:endParaRPr lang="LID4096"/>
-          </a:p>
-        </p:txBody>
-      </p:sp>
-      <p:sp>
-        <p:nvSpPr>
-          <p:cNvPr id="14" name="Rectangle: Rounded Corners 13">
-            <a:extLst>
-              <a:ext uri="{FF2B5EF4-FFF2-40B4-BE49-F238E27FC236}">
-                <a16:creationId xmlns:a16="http://schemas.microsoft.com/office/drawing/2014/main" id="{C9E85107-94D1-05C9-6C9A-0E850790520B}"/>
-              </a:ext>
-            </a:extLst>
-          </p:cNvPr>
-          <p:cNvSpPr/>
-          <p:nvPr/>
-        </p:nvSpPr>
-        <p:spPr>
-          <a:xfrm>
-            <a:off x="613912" y="4506364"/>
-            <a:ext cx="4790677" cy="2046835"/>
-          </a:xfrm>
-          <a:prstGeom prst="roundRect">
-            <a:avLst/>
-          </a:prstGeom>
-          <a:noFill/>
-          <a:ln>
-            <a:solidFill>
-              <a:schemeClr val="bg2">
-                <a:lumMod val="50000"/>
-              </a:schemeClr>
-            </a:solidFill>
-          </a:ln>
-        </p:spPr>
-        <p:style>
-          <a:lnRef idx="2">
-            <a:schemeClr val="accent1">
-              <a:shade val="15000"/>
-            </a:schemeClr>
-          </a:lnRef>
-          <a:fillRef idx="1">
-            <a:schemeClr val="accent1"/>
-          </a:fillRef>
-          <a:effectRef idx="0">
-            <a:schemeClr val="accent1"/>
-          </a:effectRef>
-          <a:fontRef idx="minor">
-            <a:schemeClr val="lt1"/>
-          </a:fontRef>
-        </p:style>
-        <p:txBody>
-          <a:bodyPr rtlCol="0" anchor="ctr"/>
-          <a:lstStyle/>
-          <a:p>
-            <a:pPr algn="ctr"/>
-            <a:endParaRPr lang="LID4096"/>
-          </a:p>
-        </p:txBody>
-      </p:sp>
-      <p:sp>
-        <p:nvSpPr>
-          <p:cNvPr id="15" name="Rectangle: Rounded Corners 14">
-            <a:extLst>
-              <a:ext uri="{FF2B5EF4-FFF2-40B4-BE49-F238E27FC236}">
-                <a16:creationId xmlns:a16="http://schemas.microsoft.com/office/drawing/2014/main" id="{13717B85-EE2E-262B-C0F0-4AAA39343A5B}"/>
-              </a:ext>
-            </a:extLst>
-          </p:cNvPr>
-          <p:cNvSpPr/>
-          <p:nvPr/>
-        </p:nvSpPr>
-        <p:spPr>
-          <a:xfrm>
-            <a:off x="613912" y="1659466"/>
-            <a:ext cx="4790677" cy="2046835"/>
-          </a:xfrm>
-          <a:prstGeom prst="roundRect">
-            <a:avLst/>
-          </a:prstGeom>
-          <a:noFill/>
-          <a:ln>
-            <a:solidFill>
-              <a:schemeClr val="bg2">
-                <a:lumMod val="50000"/>
-              </a:schemeClr>
-            </a:solidFill>
-          </a:ln>
-        </p:spPr>
-        <p:style>
-          <a:lnRef idx="2">
-            <a:schemeClr val="accent1">
-              <a:shade val="15000"/>
-            </a:schemeClr>
-          </a:lnRef>
-          <a:fillRef idx="1">
-            <a:schemeClr val="accent1"/>
-          </a:fillRef>
-          <a:effectRef idx="0">
-            <a:schemeClr val="accent1"/>
-          </a:effectRef>
-          <a:fontRef idx="minor">
-            <a:schemeClr val="lt1"/>
-          </a:fontRef>
-        </p:style>
-        <p:txBody>
-          <a:bodyPr rtlCol="0" anchor="ctr"/>
-          <a:lstStyle/>
-          <a:p>
-            <a:pPr algn="ctr"/>
-            <a:endParaRPr lang="LID4096"/>
-          </a:p>
-        </p:txBody>
-      </p:sp>
+              <a:rPr lang="de-DE" b="1" dirty="0"/>
+              <a:t>KPI</a:t>
+            </a:r>
+            <a:r>
+              <a:rPr lang="de-DE" dirty="0"/>
+              <a:t>s: Messbarer Wert, der anzeigt, wie effektiv </a:t>
+            </a:r>
+            <a:r>
+              <a:rPr lang="de-DE" b="1" dirty="0"/>
+              <a:t>Ziele erreicht werden</a:t>
+            </a:r>
+            <a:r>
+              <a:rPr lang="de-DE" dirty="0"/>
+              <a:t>.</a:t>
+            </a:r>
+          </a:p>
+        </p:txBody>
+      </p:sp>
+      <p:graphicFrame>
+        <p:nvGraphicFramePr>
+          <p:cNvPr id="11" name="Table 10">
+            <a:extLst>
+              <a:ext uri="{FF2B5EF4-FFF2-40B4-BE49-F238E27FC236}">
+                <a16:creationId xmlns:a16="http://schemas.microsoft.com/office/drawing/2014/main" id="{CD034A4A-38B8-068A-6C4B-AC7BBF47EC0B}"/>
+              </a:ext>
+            </a:extLst>
+          </p:cNvPr>
+          <p:cNvGraphicFramePr>
+            <a:graphicFrameLocks noGrp="1"/>
+          </p:cNvGraphicFramePr>
+          <p:nvPr>
+            <p:extLst>
+              <p:ext uri="{D42A27DB-BD31-4B8C-83A1-F6EECF244321}">
+                <p14:modId xmlns:p14="http://schemas.microsoft.com/office/powerpoint/2010/main" val="3889415136"/>
+              </p:ext>
+            </p:extLst>
+          </p:nvPr>
+        </p:nvGraphicFramePr>
+        <p:xfrm>
+          <a:off x="914397" y="1913434"/>
+          <a:ext cx="10981266" cy="3975257"/>
+        </p:xfrm>
+        <a:graphic>
+          <a:graphicData uri="http://schemas.openxmlformats.org/drawingml/2006/table">
+            <a:tbl>
+              <a:tblPr/>
+              <a:tblGrid>
+                <a:gridCol w="2446869">
+                  <a:extLst>
+                    <a:ext uri="{9D8B030D-6E8A-4147-A177-3AD203B41FA5}">
+                      <a16:colId xmlns:a16="http://schemas.microsoft.com/office/drawing/2014/main" val="3500172258"/>
+                    </a:ext>
+                  </a:extLst>
+                </a:gridCol>
+                <a:gridCol w="3200400">
+                  <a:extLst>
+                    <a:ext uri="{9D8B030D-6E8A-4147-A177-3AD203B41FA5}">
+                      <a16:colId xmlns:a16="http://schemas.microsoft.com/office/drawing/2014/main" val="3583597240"/>
+                    </a:ext>
+                  </a:extLst>
+                </a:gridCol>
+                <a:gridCol w="5333997">
+                  <a:extLst>
+                    <a:ext uri="{9D8B030D-6E8A-4147-A177-3AD203B41FA5}">
+                      <a16:colId xmlns:a16="http://schemas.microsoft.com/office/drawing/2014/main" val="263180350"/>
+                    </a:ext>
+                  </a:extLst>
+                </a:gridCol>
+              </a:tblGrid>
+              <a:tr h="437278">
+                <a:tc>
+                  <a:txBody>
+                    <a:bodyPr/>
+                    <a:lstStyle/>
+                    <a:p>
+                      <a:pPr>
+                        <a:buNone/>
+                      </a:pPr>
+                      <a:r>
+                        <a:rPr lang="en-US" sz="1600" b="1" dirty="0" err="1"/>
+                        <a:t>Typ</a:t>
+                      </a:r>
+                      <a:endParaRPr lang="en-US" sz="1600" dirty="0"/>
+                    </a:p>
+                  </a:txBody>
+                  <a:tcPr anchor="ctr">
+                    <a:lnL>
+                      <a:noFill/>
+                    </a:lnL>
+                    <a:lnR>
+                      <a:noFill/>
+                    </a:lnR>
+                    <a:lnT>
+                      <a:noFill/>
+                    </a:lnT>
+                    <a:lnB>
+                      <a:noFill/>
+                    </a:lnB>
+                    <a:solidFill>
+                      <a:schemeClr val="accent1">
+                        <a:lumMod val="40000"/>
+                        <a:lumOff val="60000"/>
+                      </a:schemeClr>
+                    </a:solidFill>
+                  </a:tcPr>
+                </a:tc>
+                <a:tc>
+                  <a:txBody>
+                    <a:bodyPr/>
+                    <a:lstStyle/>
+                    <a:p>
+                      <a:pPr rtl="0">
+                        <a:buNone/>
+                      </a:pPr>
+                      <a:r>
+                        <a:rPr lang="en-US" sz="1600" b="1" dirty="0">
+                          <a:solidFill>
+                            <a:srgbClr val="1F1F1F"/>
+                          </a:solidFill>
+                          <a:effectLst/>
+                          <a:latin typeface="Google Sans Text"/>
+                        </a:rPr>
+                        <a:t>Kein KPI (Problem)</a:t>
+                      </a:r>
+                      <a:endParaRPr lang="en-US" sz="1600" dirty="0">
+                        <a:solidFill>
+                          <a:srgbClr val="1F1F1F"/>
+                        </a:solidFill>
+                        <a:effectLst/>
+                        <a:latin typeface="Google Sans Text"/>
+                      </a:endParaRPr>
+                    </a:p>
+                  </a:txBody>
+                  <a:tcPr anchor="ctr">
+                    <a:lnL>
+                      <a:noFill/>
+                    </a:lnL>
+                    <a:lnR>
+                      <a:noFill/>
+                    </a:lnR>
+                    <a:lnT>
+                      <a:noFill/>
+                    </a:lnT>
+                    <a:lnB>
+                      <a:noFill/>
+                    </a:lnB>
+                    <a:solidFill>
+                      <a:schemeClr val="accent1">
+                        <a:lumMod val="40000"/>
+                        <a:lumOff val="60000"/>
+                      </a:schemeClr>
+                    </a:solidFill>
+                  </a:tcPr>
+                </a:tc>
+                <a:tc>
+                  <a:txBody>
+                    <a:bodyPr/>
+                    <a:lstStyle/>
+                    <a:p>
+                      <a:pPr rtl="0">
+                        <a:buNone/>
+                      </a:pPr>
+                      <a:r>
+                        <a:rPr lang="en-US" sz="1600" b="1" dirty="0">
+                          <a:solidFill>
+                            <a:srgbClr val="1F1F1F"/>
+                          </a:solidFill>
+                          <a:effectLst/>
+                          <a:latin typeface="Google Sans Text"/>
+                        </a:rPr>
+                        <a:t>Guter KPI (</a:t>
+                      </a:r>
+                      <a:r>
+                        <a:rPr lang="en-US" sz="1600" b="1" dirty="0" err="1">
+                          <a:solidFill>
+                            <a:srgbClr val="1F1F1F"/>
+                          </a:solidFill>
+                          <a:effectLst/>
+                          <a:latin typeface="Google Sans Text"/>
+                        </a:rPr>
+                        <a:t>Lösungs</a:t>
+                      </a:r>
+                      <a:r>
+                        <a:rPr lang="en-US" sz="1600" b="1" dirty="0">
+                          <a:solidFill>
+                            <a:srgbClr val="1F1F1F"/>
+                          </a:solidFill>
+                          <a:effectLst/>
+                          <a:latin typeface="Google Sans Text"/>
+                        </a:rPr>
+                        <a:t>- / </a:t>
+                      </a:r>
+                      <a:r>
+                        <a:rPr lang="en-US" sz="1600" b="1" dirty="0" err="1">
+                          <a:solidFill>
+                            <a:srgbClr val="1F1F1F"/>
+                          </a:solidFill>
+                          <a:effectLst/>
+                          <a:latin typeface="Google Sans Text"/>
+                        </a:rPr>
+                        <a:t>Zielorientiert</a:t>
+                      </a:r>
+                      <a:r>
+                        <a:rPr lang="en-US" sz="1600" b="1" dirty="0">
+                          <a:solidFill>
+                            <a:srgbClr val="1F1F1F"/>
+                          </a:solidFill>
+                          <a:effectLst/>
+                          <a:latin typeface="Google Sans Text"/>
+                        </a:rPr>
+                        <a:t>)</a:t>
+                      </a:r>
+                      <a:endParaRPr lang="en-US" sz="1600" dirty="0">
+                        <a:solidFill>
+                          <a:srgbClr val="1F1F1F"/>
+                        </a:solidFill>
+                        <a:effectLst/>
+                        <a:latin typeface="Google Sans Text"/>
+                      </a:endParaRPr>
+                    </a:p>
+                  </a:txBody>
+                  <a:tcPr anchor="ctr">
+                    <a:lnL>
+                      <a:noFill/>
+                    </a:lnL>
+                    <a:lnR>
+                      <a:noFill/>
+                    </a:lnR>
+                    <a:lnT>
+                      <a:noFill/>
+                    </a:lnT>
+                    <a:lnB>
+                      <a:noFill/>
+                    </a:lnB>
+                    <a:solidFill>
+                      <a:schemeClr val="accent1">
+                        <a:lumMod val="40000"/>
+                        <a:lumOff val="60000"/>
+                      </a:schemeClr>
+                    </a:solidFill>
+                  </a:tcPr>
+                </a:tc>
+                <a:extLst>
+                  <a:ext uri="{0D108BD9-81ED-4DB2-BD59-A6C34878D82A}">
+                    <a16:rowId xmlns:a16="http://schemas.microsoft.com/office/drawing/2014/main" val="2927187023"/>
+                  </a:ext>
+                </a:extLst>
+              </a:tr>
+              <a:tr h="755299">
+                <a:tc>
+                  <a:txBody>
+                    <a:bodyPr/>
+                    <a:lstStyle/>
+                    <a:p>
+                      <a:pPr rtl="0">
+                        <a:buNone/>
+                      </a:pPr>
+                      <a:r>
+                        <a:rPr lang="en-US" sz="1600" b="1">
+                          <a:solidFill>
+                            <a:srgbClr val="1F1F1F"/>
+                          </a:solidFill>
+                          <a:effectLst/>
+                          <a:latin typeface="Google Sans Text"/>
+                        </a:rPr>
+                        <a:t>Rohdaten </a:t>
+                      </a:r>
+                      <a:r>
+                        <a:rPr lang="en-US" sz="1600" b="1"/>
+                        <a:t>→ </a:t>
+                      </a:r>
+                      <a:r>
+                        <a:rPr lang="en-US" sz="1600" b="1">
+                          <a:solidFill>
+                            <a:srgbClr val="1F1F1F"/>
+                          </a:solidFill>
+                          <a:effectLst/>
+                          <a:latin typeface="Google Sans Text"/>
+                        </a:rPr>
+                        <a:t>Zielorientierter KPI</a:t>
+                      </a:r>
+                      <a:endParaRPr lang="en-US" sz="1600" dirty="0">
+                        <a:solidFill>
+                          <a:srgbClr val="1F1F1F"/>
+                        </a:solidFill>
+                        <a:effectLst/>
+                        <a:latin typeface="Google Sans Text"/>
+                      </a:endParaRPr>
+                    </a:p>
+                  </a:txBody>
+                  <a:tcPr anchor="ctr">
+                    <a:lnL>
+                      <a:noFill/>
+                    </a:lnL>
+                    <a:lnR>
+                      <a:noFill/>
+                    </a:lnR>
+                    <a:lnT>
+                      <a:noFill/>
+                    </a:lnT>
+                    <a:lnB>
+                      <a:noFill/>
+                    </a:lnB>
+                    <a:noFill/>
+                  </a:tcPr>
+                </a:tc>
+                <a:tc>
+                  <a:txBody>
+                    <a:bodyPr/>
+                    <a:lstStyle/>
+                    <a:p>
+                      <a:pPr rtl="0">
+                        <a:buNone/>
+                      </a:pPr>
+                      <a:r>
+                        <a:rPr lang="de-DE" sz="1600" dirty="0">
+                          <a:solidFill>
+                            <a:srgbClr val="1F1F1F"/>
+                          </a:solidFill>
+                          <a:effectLst/>
+                          <a:latin typeface="Google Sans Text"/>
+                        </a:rPr>
+                        <a:t>Gesamtzahl der versendeten E-Mails (nicht mit Ziel verknüpft)</a:t>
+                      </a:r>
+                    </a:p>
+                  </a:txBody>
+                  <a:tcPr anchor="ctr">
+                    <a:lnL>
+                      <a:noFill/>
+                    </a:lnL>
+                    <a:lnR>
+                      <a:noFill/>
+                    </a:lnR>
+                    <a:lnT>
+                      <a:noFill/>
+                    </a:lnT>
+                    <a:lnB>
+                      <a:noFill/>
+                    </a:lnB>
+                    <a:solidFill>
+                      <a:schemeClr val="bg1">
+                        <a:lumMod val="95000"/>
+                      </a:schemeClr>
+                    </a:solidFill>
+                  </a:tcPr>
+                </a:tc>
+                <a:tc>
+                  <a:txBody>
+                    <a:bodyPr/>
+                    <a:lstStyle/>
+                    <a:p>
+                      <a:pPr rtl="0">
+                        <a:buNone/>
+                      </a:pPr>
+                      <a:r>
+                        <a:rPr lang="de-DE" sz="1600" dirty="0">
+                          <a:solidFill>
+                            <a:srgbClr val="1F1F1F"/>
+                          </a:solidFill>
+                          <a:effectLst/>
+                          <a:latin typeface="Google Sans Text"/>
+                        </a:rPr>
+                        <a:t>Prozentsatz der geöffneten oder angeklickten E-Mails </a:t>
+                      </a:r>
+                      <a:r>
+                        <a:rPr lang="en-US" sz="1600" b="1" dirty="0"/>
+                        <a:t>→ </a:t>
+                      </a:r>
+                      <a:r>
+                        <a:rPr lang="de-DE" sz="1600" dirty="0">
+                          <a:solidFill>
+                            <a:srgbClr val="1F1F1F"/>
+                          </a:solidFill>
+                          <a:effectLst/>
+                          <a:latin typeface="Google Sans Text"/>
+                        </a:rPr>
+                        <a:t>misst die </a:t>
+                      </a:r>
+                      <a:r>
+                        <a:rPr lang="de-DE" sz="1600" b="1" dirty="0">
+                          <a:solidFill>
+                            <a:srgbClr val="1F1F1F"/>
+                          </a:solidFill>
+                          <a:effectLst/>
+                          <a:latin typeface="Google Sans Text"/>
+                        </a:rPr>
+                        <a:t>Effektivität der E-Mail-Kampagne</a:t>
+                      </a:r>
+                      <a:endParaRPr lang="de-DE" sz="1600" dirty="0">
+                        <a:solidFill>
+                          <a:srgbClr val="1F1F1F"/>
+                        </a:solidFill>
+                        <a:effectLst/>
+                        <a:latin typeface="Google Sans Text"/>
+                      </a:endParaRPr>
+                    </a:p>
+                  </a:txBody>
+                  <a:tcPr anchor="ctr">
+                    <a:lnL>
+                      <a:noFill/>
+                    </a:lnL>
+                    <a:lnR>
+                      <a:noFill/>
+                    </a:lnR>
+                    <a:lnT>
+                      <a:noFill/>
+                    </a:lnT>
+                    <a:lnB>
+                      <a:noFill/>
+                    </a:lnB>
+                    <a:solidFill>
+                      <a:schemeClr val="accent6">
+                        <a:lumMod val="20000"/>
+                        <a:lumOff val="80000"/>
+                      </a:schemeClr>
+                    </a:solidFill>
+                  </a:tcPr>
+                </a:tc>
+                <a:extLst>
+                  <a:ext uri="{0D108BD9-81ED-4DB2-BD59-A6C34878D82A}">
+                    <a16:rowId xmlns:a16="http://schemas.microsoft.com/office/drawing/2014/main" val="2542820509"/>
+                  </a:ext>
+                </a:extLst>
+              </a:tr>
+              <a:tr h="1391340">
+                <a:tc>
+                  <a:txBody>
+                    <a:bodyPr/>
+                    <a:lstStyle/>
+                    <a:p>
+                      <a:pPr rtl="0">
+                        <a:buNone/>
+                      </a:pPr>
+                      <a:r>
+                        <a:rPr lang="en-US" sz="1600" b="1" dirty="0">
+                          <a:solidFill>
+                            <a:srgbClr val="1F1F1F"/>
+                          </a:solidFill>
+                          <a:effectLst/>
+                          <a:latin typeface="Google Sans Text"/>
+                        </a:rPr>
+                        <a:t>Vanity Metric </a:t>
+                      </a:r>
+                      <a:r>
+                        <a:rPr lang="en-US" sz="1600" b="1" dirty="0"/>
+                        <a:t>→ </a:t>
+                      </a:r>
+                      <a:r>
+                        <a:rPr lang="en-US" sz="1600" b="1" dirty="0" err="1">
+                          <a:solidFill>
+                            <a:srgbClr val="1F1F1F"/>
+                          </a:solidFill>
+                          <a:effectLst/>
+                          <a:latin typeface="Google Sans Text"/>
+                        </a:rPr>
+                        <a:t>Handlungsrelevanter</a:t>
+                      </a:r>
+                      <a:r>
+                        <a:rPr lang="en-US" sz="1600" b="1" dirty="0">
+                          <a:solidFill>
+                            <a:srgbClr val="1F1F1F"/>
+                          </a:solidFill>
+                          <a:effectLst/>
+                          <a:latin typeface="Google Sans Text"/>
+                        </a:rPr>
+                        <a:t> KPI</a:t>
+                      </a:r>
+                      <a:endParaRPr lang="en-US" sz="1600" dirty="0">
+                        <a:solidFill>
+                          <a:srgbClr val="1F1F1F"/>
+                        </a:solidFill>
+                        <a:effectLst/>
+                        <a:latin typeface="Google Sans Text"/>
+                      </a:endParaRPr>
+                    </a:p>
+                  </a:txBody>
+                  <a:tcPr anchor="ctr">
+                    <a:lnL>
+                      <a:noFill/>
+                    </a:lnL>
+                    <a:lnR>
+                      <a:noFill/>
+                    </a:lnR>
+                    <a:lnT>
+                      <a:noFill/>
+                    </a:lnT>
+                    <a:lnB>
+                      <a:noFill/>
+                    </a:lnB>
+                    <a:noFill/>
+                  </a:tcPr>
+                </a:tc>
+                <a:tc>
+                  <a:txBody>
+                    <a:bodyPr/>
+                    <a:lstStyle/>
+                    <a:p>
+                      <a:pPr rtl="0">
+                        <a:buNone/>
+                      </a:pPr>
+                      <a:r>
+                        <a:rPr lang="en-US" sz="1600" dirty="0" err="1">
+                          <a:solidFill>
+                            <a:srgbClr val="1F1F1F"/>
+                          </a:solidFill>
+                          <a:effectLst/>
+                          <a:latin typeface="Google Sans Text"/>
+                        </a:rPr>
+                        <a:t>Anzahl</a:t>
+                      </a:r>
+                      <a:r>
+                        <a:rPr lang="en-US" sz="1600" dirty="0">
+                          <a:solidFill>
+                            <a:srgbClr val="1F1F1F"/>
+                          </a:solidFill>
+                          <a:effectLst/>
+                          <a:latin typeface="Google Sans Text"/>
+                        </a:rPr>
+                        <a:t> der Social-Media-Follower </a:t>
+                      </a:r>
+                      <a:r>
+                        <a:rPr lang="en-US" sz="1600" dirty="0" err="1">
+                          <a:solidFill>
+                            <a:srgbClr val="1F1F1F"/>
+                          </a:solidFill>
+                          <a:effectLst/>
+                          <a:latin typeface="Google Sans Text"/>
+                        </a:rPr>
+                        <a:t>allein</a:t>
+                      </a:r>
+                      <a:endParaRPr lang="en-US" sz="1600" dirty="0">
+                        <a:solidFill>
+                          <a:srgbClr val="1F1F1F"/>
+                        </a:solidFill>
+                        <a:effectLst/>
+                        <a:latin typeface="Google Sans Text"/>
+                      </a:endParaRPr>
+                    </a:p>
+                  </a:txBody>
+                  <a:tcPr anchor="ctr">
+                    <a:lnL>
+                      <a:noFill/>
+                    </a:lnL>
+                    <a:lnR>
+                      <a:noFill/>
+                    </a:lnR>
+                    <a:lnT>
+                      <a:noFill/>
+                    </a:lnT>
+                    <a:lnB>
+                      <a:noFill/>
+                    </a:lnB>
+                    <a:solidFill>
+                      <a:schemeClr val="bg1">
+                        <a:lumMod val="95000"/>
+                      </a:schemeClr>
+                    </a:solidFill>
+                  </a:tcPr>
+                </a:tc>
+                <a:tc>
+                  <a:txBody>
+                    <a:bodyPr/>
+                    <a:lstStyle/>
+                    <a:p>
+                      <a:pPr rtl="0">
+                        <a:buNone/>
+                      </a:pPr>
+                      <a:r>
+                        <a:rPr lang="en-US" sz="1600" dirty="0" err="1">
+                          <a:solidFill>
+                            <a:srgbClr val="1F1F1F"/>
+                          </a:solidFill>
+                          <a:effectLst/>
+                          <a:latin typeface="Google Sans Text"/>
+                        </a:rPr>
+                        <a:t>Interaktionsrate</a:t>
+                      </a:r>
+                      <a:r>
+                        <a:rPr lang="en-US" sz="1600" dirty="0">
+                          <a:solidFill>
+                            <a:srgbClr val="1F1F1F"/>
+                          </a:solidFill>
+                          <a:effectLst/>
+                          <a:latin typeface="Google Sans Text"/>
+                        </a:rPr>
+                        <a:t> (Likes + Shares + </a:t>
+                      </a:r>
+                      <a:r>
+                        <a:rPr lang="en-US" sz="1600" dirty="0" err="1">
+                          <a:solidFill>
+                            <a:srgbClr val="1F1F1F"/>
+                          </a:solidFill>
+                          <a:effectLst/>
+                          <a:latin typeface="Google Sans Text"/>
+                        </a:rPr>
+                        <a:t>Kommentare</a:t>
+                      </a:r>
+                      <a:r>
+                        <a:rPr lang="en-US" sz="1600" dirty="0">
+                          <a:solidFill>
+                            <a:srgbClr val="1F1F1F"/>
+                          </a:solidFill>
+                          <a:effectLst/>
+                          <a:latin typeface="Google Sans Text"/>
+                        </a:rPr>
+                        <a:t> / Follower </a:t>
+                      </a:r>
+                      <a:r>
+                        <a:rPr lang="en-US" sz="1600" dirty="0" err="1">
+                          <a:solidFill>
+                            <a:srgbClr val="1F1F1F"/>
+                          </a:solidFill>
+                          <a:effectLst/>
+                          <a:latin typeface="Google Sans Text"/>
+                        </a:rPr>
+                        <a:t>insgesamt</a:t>
+                      </a:r>
+                      <a:r>
+                        <a:rPr lang="en-US" sz="1600" dirty="0">
+                          <a:solidFill>
+                            <a:srgbClr val="1F1F1F"/>
+                          </a:solidFill>
+                          <a:effectLst/>
+                          <a:latin typeface="Google Sans Text"/>
+                        </a:rPr>
+                        <a:t>) </a:t>
+                      </a:r>
+                      <a:r>
+                        <a:rPr lang="en-US" sz="1600" b="1" dirty="0"/>
+                        <a:t>→ </a:t>
+                      </a:r>
+                      <a:r>
+                        <a:rPr lang="en-US" sz="1600" dirty="0" err="1">
+                          <a:solidFill>
+                            <a:srgbClr val="1F1F1F"/>
+                          </a:solidFill>
+                          <a:effectLst/>
+                          <a:latin typeface="Google Sans Text"/>
+                        </a:rPr>
+                        <a:t>misst</a:t>
+                      </a:r>
+                      <a:r>
+                        <a:rPr lang="en-US" sz="1600" dirty="0">
+                          <a:solidFill>
+                            <a:srgbClr val="1F1F1F"/>
+                          </a:solidFill>
+                          <a:effectLst/>
+                          <a:latin typeface="Google Sans Text"/>
+                        </a:rPr>
+                        <a:t> </a:t>
+                      </a:r>
+                      <a:r>
+                        <a:rPr lang="en-US" sz="1600" b="1" dirty="0" err="1">
+                          <a:solidFill>
+                            <a:srgbClr val="1F1F1F"/>
+                          </a:solidFill>
+                          <a:effectLst/>
+                          <a:latin typeface="Google Sans Text"/>
+                        </a:rPr>
+                        <a:t>Publikumsinteraktion</a:t>
+                      </a:r>
+                      <a:r>
+                        <a:rPr lang="en-US" sz="1600" b="1" dirty="0">
+                          <a:solidFill>
+                            <a:srgbClr val="1F1F1F"/>
+                          </a:solidFill>
+                          <a:effectLst/>
+                          <a:latin typeface="Google Sans Text"/>
+                        </a:rPr>
+                        <a:t> und Content-</a:t>
+                      </a:r>
+                      <a:r>
+                        <a:rPr lang="en-US" sz="1600" b="1" dirty="0" err="1">
+                          <a:solidFill>
+                            <a:srgbClr val="1F1F1F"/>
+                          </a:solidFill>
+                          <a:effectLst/>
+                          <a:latin typeface="Google Sans Text"/>
+                        </a:rPr>
+                        <a:t>Effektivität</a:t>
+                      </a:r>
+                      <a:endParaRPr lang="en-US" sz="1600" dirty="0">
+                        <a:solidFill>
+                          <a:srgbClr val="1F1F1F"/>
+                        </a:solidFill>
+                        <a:effectLst/>
+                        <a:latin typeface="Google Sans Text"/>
+                      </a:endParaRPr>
+                    </a:p>
+                  </a:txBody>
+                  <a:tcPr anchor="ctr">
+                    <a:lnL>
+                      <a:noFill/>
+                    </a:lnL>
+                    <a:lnR>
+                      <a:noFill/>
+                    </a:lnR>
+                    <a:lnT>
+                      <a:noFill/>
+                    </a:lnT>
+                    <a:lnB>
+                      <a:noFill/>
+                    </a:lnB>
+                    <a:solidFill>
+                      <a:schemeClr val="accent6">
+                        <a:lumMod val="20000"/>
+                        <a:lumOff val="80000"/>
+                      </a:schemeClr>
+                    </a:solidFill>
+                  </a:tcPr>
+                </a:tc>
+                <a:extLst>
+                  <a:ext uri="{0D108BD9-81ED-4DB2-BD59-A6C34878D82A}">
+                    <a16:rowId xmlns:a16="http://schemas.microsoft.com/office/drawing/2014/main" val="2261459102"/>
+                  </a:ext>
+                </a:extLst>
+              </a:tr>
+              <a:tr h="1391340">
+                <a:tc>
+                  <a:txBody>
+                    <a:bodyPr/>
+                    <a:lstStyle/>
+                    <a:p>
+                      <a:pPr marL="0" marR="0" lvl="0" indent="0" algn="l" defTabSz="914400" rtl="0" eaLnBrk="1" fontAlgn="auto" latinLnBrk="0" hangingPunct="1">
+                        <a:lnSpc>
+                          <a:spcPct val="100000"/>
+                        </a:lnSpc>
+                        <a:spcBef>
+                          <a:spcPts val="0"/>
+                        </a:spcBef>
+                        <a:spcAft>
+                          <a:spcPts val="0"/>
+                        </a:spcAft>
+                        <a:buClrTx/>
+                        <a:buSzTx/>
+                        <a:buFontTx/>
+                        <a:buNone/>
+                        <a:tabLst/>
+                        <a:defRPr/>
+                      </a:pPr>
+                      <a:r>
+                        <a:rPr lang="en-US" sz="1600" b="1">
+                          <a:solidFill>
+                            <a:srgbClr val="1F1F1F"/>
+                          </a:solidFill>
+                          <a:effectLst/>
+                          <a:latin typeface="Google Sans Text"/>
+                        </a:rPr>
+                        <a:t>Irrelevante Messung </a:t>
+                      </a:r>
+                      <a:r>
+                        <a:rPr lang="en-US" sz="1600" b="1"/>
+                        <a:t>→</a:t>
+                      </a:r>
+                      <a:r>
+                        <a:rPr lang="en-US" sz="1600" b="1">
+                          <a:solidFill>
+                            <a:srgbClr val="1F1F1F"/>
+                          </a:solidFill>
+                          <a:effectLst/>
+                          <a:latin typeface="Google Sans Text"/>
+                        </a:rPr>
+                        <a:t> Performance-KPI</a:t>
+                      </a:r>
+                      <a:endParaRPr lang="en-US" sz="1600" dirty="0">
+                        <a:solidFill>
+                          <a:srgbClr val="1F1F1F"/>
+                        </a:solidFill>
+                        <a:effectLst/>
+                        <a:latin typeface="Google Sans Text"/>
+                      </a:endParaRPr>
+                    </a:p>
+                  </a:txBody>
+                  <a:tcPr anchor="ctr">
+                    <a:lnL>
+                      <a:noFill/>
+                    </a:lnL>
+                    <a:lnR>
+                      <a:noFill/>
+                    </a:lnR>
+                    <a:lnT>
+                      <a:noFill/>
+                    </a:lnT>
+                    <a:lnB>
+                      <a:noFill/>
+                    </a:lnB>
+                    <a:noFill/>
+                  </a:tcPr>
+                </a:tc>
+                <a:tc>
+                  <a:txBody>
+                    <a:bodyPr/>
+                    <a:lstStyle/>
+                    <a:p>
+                      <a:pPr rtl="0">
+                        <a:buNone/>
+                      </a:pPr>
+                      <a:r>
+                        <a:rPr lang="de-DE" sz="1600" dirty="0">
+                          <a:solidFill>
+                            <a:srgbClr val="1F1F1F"/>
+                          </a:solidFill>
+                          <a:effectLst/>
+                          <a:latin typeface="Google Sans Text"/>
+                        </a:rPr>
+                        <a:t>Bürotemperatur oder Anzahl der Stühle in einem Besprechungsraum</a:t>
+                      </a:r>
+                    </a:p>
+                  </a:txBody>
+                  <a:tcPr anchor="ctr">
+                    <a:lnL>
+                      <a:noFill/>
+                    </a:lnL>
+                    <a:lnR>
+                      <a:noFill/>
+                    </a:lnR>
+                    <a:lnT>
+                      <a:noFill/>
+                    </a:lnT>
+                    <a:lnB>
+                      <a:noFill/>
+                    </a:lnB>
+                    <a:solidFill>
+                      <a:schemeClr val="bg1">
+                        <a:lumMod val="95000"/>
+                      </a:schemeClr>
+                    </a:solidFill>
+                  </a:tcPr>
+                </a:tc>
+                <a:tc>
+                  <a:txBody>
+                    <a:bodyPr/>
+                    <a:lstStyle/>
+                    <a:p>
+                      <a:pPr rtl="0">
+                        <a:buNone/>
+                      </a:pPr>
+                      <a:r>
+                        <a:rPr lang="de-DE" sz="1600" dirty="0">
+                          <a:solidFill>
+                            <a:srgbClr val="1F1F1F"/>
+                          </a:solidFill>
+                          <a:effectLst/>
+                          <a:latin typeface="Google Sans Text"/>
+                        </a:rPr>
+                        <a:t>Durchschnittliche Zeit zur Behebung von Wartungsproblemen oder Score zur Mitarbeiterzufriedenheit </a:t>
+                      </a:r>
+                      <a:r>
+                        <a:rPr lang="en-US" sz="1600" b="1" dirty="0"/>
+                        <a:t>→</a:t>
+                      </a:r>
+                      <a:r>
+                        <a:rPr lang="de-DE" sz="1600" dirty="0">
+                          <a:solidFill>
+                            <a:srgbClr val="1F1F1F"/>
+                          </a:solidFill>
+                          <a:effectLst/>
+                          <a:latin typeface="Google Sans Text"/>
+                        </a:rPr>
+                        <a:t>misst </a:t>
+                      </a:r>
+                      <a:r>
+                        <a:rPr lang="de-DE" sz="1600" b="1" dirty="0">
+                          <a:solidFill>
+                            <a:srgbClr val="1F1F1F"/>
+                          </a:solidFill>
+                          <a:effectLst/>
+                          <a:latin typeface="Google Sans Text"/>
+                        </a:rPr>
+                        <a:t>Arbeitsplatzeffizienz und Wohlbefinden</a:t>
+                      </a:r>
+                      <a:endParaRPr lang="de-DE" sz="1600" dirty="0">
+                        <a:solidFill>
+                          <a:srgbClr val="1F1F1F"/>
+                        </a:solidFill>
+                        <a:effectLst/>
+                        <a:latin typeface="Google Sans Text"/>
+                      </a:endParaRPr>
+                    </a:p>
+                  </a:txBody>
+                  <a:tcPr anchor="ctr">
+                    <a:lnL>
+                      <a:noFill/>
+                    </a:lnL>
+                    <a:lnR>
+                      <a:noFill/>
+                    </a:lnR>
+                    <a:lnT>
+                      <a:noFill/>
+                    </a:lnT>
+                    <a:lnB>
+                      <a:noFill/>
+                    </a:lnB>
+                    <a:solidFill>
+                      <a:schemeClr val="accent6">
+                        <a:lumMod val="20000"/>
+                        <a:lumOff val="80000"/>
+                      </a:schemeClr>
+                    </a:solidFill>
+                  </a:tcPr>
+                </a:tc>
+                <a:extLst>
+                  <a:ext uri="{0D108BD9-81ED-4DB2-BD59-A6C34878D82A}">
+                    <a16:rowId xmlns:a16="http://schemas.microsoft.com/office/drawing/2014/main" val="2680808342"/>
+                  </a:ext>
+                </a:extLst>
+              </a:tr>
+            </a:tbl>
+          </a:graphicData>
+        </a:graphic>
+      </p:graphicFrame>
     </p:spTree>
     <p:extLst>
       <p:ext uri="{BB962C8B-B14F-4D97-AF65-F5344CB8AC3E}">
-        <p14:creationId xmlns:p14="http://schemas.microsoft.com/office/powerpoint/2010/main" val="1970244850"/>
+        <p14:creationId xmlns:p14="http://schemas.microsoft.com/office/powerpoint/2010/main" val="2233616393"/>
       </p:ext>
     </p:extLst>
   </p:cSld>
@@ -6654,1801 +6560,6 @@
   <p:cSld>
     <p:spTree>
       <p:nvGrpSpPr>
-        <p:cNvPr id="1" name=""/>
-        <p:cNvGrpSpPr/>
-        <p:nvPr/>
-      </p:nvGrpSpPr>
-      <p:grpSpPr>
-        <a:xfrm>
-          <a:off x="0" y="0"/>
-          <a:ext cx="0" cy="0"/>
-          <a:chOff x="0" y="0"/>
-          <a:chExt cx="0" cy="0"/>
-        </a:xfrm>
-      </p:grpSpPr>
-      <p:sp>
-        <p:nvSpPr>
-          <p:cNvPr id="35" name="Rectangle: Rounded Corners 34">
-            <a:extLst>
-              <a:ext uri="{FF2B5EF4-FFF2-40B4-BE49-F238E27FC236}">
-                <a16:creationId xmlns:a16="http://schemas.microsoft.com/office/drawing/2014/main" id="{B43AF4DC-A281-4750-7689-04550908EEE8}"/>
-              </a:ext>
-            </a:extLst>
-          </p:cNvPr>
-          <p:cNvSpPr/>
-          <p:nvPr/>
-        </p:nvSpPr>
-        <p:spPr>
-          <a:xfrm>
-            <a:off x="496213" y="1024616"/>
-            <a:ext cx="2067374" cy="4833257"/>
-          </a:xfrm>
-          <a:prstGeom prst="roundRect">
-            <a:avLst/>
-          </a:prstGeom>
-          <a:solidFill>
-            <a:schemeClr val="accent4">
-              <a:lumMod val="60000"/>
-              <a:lumOff val="40000"/>
-            </a:schemeClr>
-          </a:solidFill>
-          <a:ln>
-            <a:noFill/>
-          </a:ln>
-        </p:spPr>
-        <p:style>
-          <a:lnRef idx="2">
-            <a:schemeClr val="accent1">
-              <a:shade val="15000"/>
-            </a:schemeClr>
-          </a:lnRef>
-          <a:fillRef idx="1">
-            <a:schemeClr val="accent1"/>
-          </a:fillRef>
-          <a:effectRef idx="0">
-            <a:schemeClr val="accent1"/>
-          </a:effectRef>
-          <a:fontRef idx="minor">
-            <a:schemeClr val="lt1"/>
-          </a:fontRef>
-        </p:style>
-        <p:txBody>
-          <a:bodyPr rtlCol="0" anchor="ctr"/>
-          <a:lstStyle/>
-          <a:p>
-            <a:pPr algn="ctr"/>
-            <a:endParaRPr lang="LID4096"/>
-          </a:p>
-        </p:txBody>
-      </p:sp>
-      <p:pic>
-        <p:nvPicPr>
-          <p:cNvPr id="7" name="Graphic 6" descr="Question mark">
-            <a:extLst>
-              <a:ext uri="{FF2B5EF4-FFF2-40B4-BE49-F238E27FC236}">
-                <a16:creationId xmlns:a16="http://schemas.microsoft.com/office/drawing/2014/main" id="{3CD82926-BF69-61BA-A2B8-AE13D076995C}"/>
-              </a:ext>
-            </a:extLst>
-          </p:cNvPr>
-          <p:cNvPicPr>
-            <a:picLocks noChangeAspect="1"/>
-          </p:cNvPicPr>
-          <p:nvPr/>
-        </p:nvPicPr>
-        <p:blipFill>
-          <a:blip r:embed="rId3">
-            <a:extLst>
-              <a:ext uri="{96DAC541-7B7A-43D3-8B79-37D633B846F1}">
-                <asvg:svgBlip xmlns:asvg="http://schemas.microsoft.com/office/drawing/2016/SVG/main" r:embed="rId4"/>
-              </a:ext>
-            </a:extLst>
-          </a:blip>
-          <a:stretch>
-            <a:fillRect/>
-          </a:stretch>
-        </p:blipFill>
-        <p:spPr>
-          <a:xfrm>
-            <a:off x="1072700" y="1455763"/>
-            <a:ext cx="914400" cy="914400"/>
-          </a:xfrm>
-          <a:prstGeom prst="rect">
-            <a:avLst/>
-          </a:prstGeom>
-        </p:spPr>
-      </p:pic>
-      <p:sp>
-        <p:nvSpPr>
-          <p:cNvPr id="20" name="TextBox 19">
-            <a:extLst>
-              <a:ext uri="{FF2B5EF4-FFF2-40B4-BE49-F238E27FC236}">
-                <a16:creationId xmlns:a16="http://schemas.microsoft.com/office/drawing/2014/main" id="{8F748B9C-7513-93B1-01D3-D7DFFC032034}"/>
-              </a:ext>
-            </a:extLst>
-          </p:cNvPr>
-          <p:cNvSpPr txBox="1"/>
-          <p:nvPr/>
-        </p:nvSpPr>
-        <p:spPr>
-          <a:xfrm>
-            <a:off x="776675" y="2512330"/>
-            <a:ext cx="1506450" cy="2739211"/>
-          </a:xfrm>
-          <a:prstGeom prst="rect">
-            <a:avLst/>
-          </a:prstGeom>
-          <a:noFill/>
-        </p:spPr>
-        <p:txBody>
-          <a:bodyPr wrap="square" rtlCol="0">
-            <a:spAutoFit/>
-          </a:bodyPr>
-          <a:lstStyle/>
-          <a:p>
-            <a:pPr algn="ctr"/>
-            <a:r>
-              <a:rPr lang="en-US" sz="1600" b="1" dirty="0" err="1"/>
-              <a:t>Fragestellung</a:t>
-            </a:r>
-            <a:endParaRPr lang="en-US" sz="1600" b="1" dirty="0"/>
-          </a:p>
-          <a:p>
-            <a:endParaRPr lang="en-US" sz="1600" dirty="0"/>
-          </a:p>
-          <a:p>
-            <a:pPr algn="ctr"/>
-            <a:r>
-              <a:rPr lang="de-DE" sz="1400" dirty="0"/>
-              <a:t>Festlegung des Problems</a:t>
-            </a:r>
-          </a:p>
-          <a:p>
-            <a:pPr algn="ctr"/>
-            <a:endParaRPr lang="de-DE" sz="1400" dirty="0"/>
-          </a:p>
-          <a:p>
-            <a:pPr algn="ctr"/>
-            <a:r>
-              <a:rPr lang="en-US" sz="1400" dirty="0" err="1"/>
-              <a:t>Bestimmung</a:t>
-            </a:r>
-            <a:r>
-              <a:rPr lang="en-US" sz="1400" dirty="0"/>
-              <a:t> der </a:t>
-            </a:r>
-            <a:r>
-              <a:rPr lang="en-US" sz="1400" dirty="0" err="1"/>
-              <a:t>relevanten</a:t>
-            </a:r>
-            <a:r>
-              <a:rPr lang="en-US" sz="1400" dirty="0"/>
-              <a:t> </a:t>
-            </a:r>
-            <a:r>
-              <a:rPr lang="en-US" sz="1400" dirty="0" err="1"/>
-              <a:t>Kennzahlen</a:t>
-            </a:r>
-            <a:endParaRPr lang="en-US" sz="1400" dirty="0"/>
-          </a:p>
-          <a:p>
-            <a:pPr algn="ctr"/>
-            <a:endParaRPr lang="en-US" sz="1400" dirty="0"/>
-          </a:p>
-          <a:p>
-            <a:pPr algn="ctr"/>
-            <a:r>
-              <a:rPr lang="en-US" sz="1400" dirty="0"/>
-              <a:t>Was </a:t>
-            </a:r>
-            <a:r>
-              <a:rPr lang="en-US" sz="1400" dirty="0" err="1"/>
-              <a:t>treibt</a:t>
-            </a:r>
-            <a:r>
-              <a:rPr lang="en-US" sz="1400" dirty="0"/>
-              <a:t> die Kunden </a:t>
-            </a:r>
-            <a:r>
-              <a:rPr lang="en-US" sz="1400" dirty="0" err="1"/>
-              <a:t>zufriedenheit</a:t>
-            </a:r>
-            <a:r>
-              <a:rPr lang="en-US" sz="1400" dirty="0"/>
-              <a:t>?</a:t>
-            </a:r>
-            <a:endParaRPr lang="LID4096" sz="1400" dirty="0"/>
-          </a:p>
-        </p:txBody>
-      </p:sp>
-      <p:sp>
-        <p:nvSpPr>
-          <p:cNvPr id="36" name="Rectangle: Rounded Corners 35">
-            <a:extLst>
-              <a:ext uri="{FF2B5EF4-FFF2-40B4-BE49-F238E27FC236}">
-                <a16:creationId xmlns:a16="http://schemas.microsoft.com/office/drawing/2014/main" id="{62E64AC7-D27B-6A45-ACD8-B06D8517723B}"/>
-              </a:ext>
-            </a:extLst>
-          </p:cNvPr>
-          <p:cNvSpPr/>
-          <p:nvPr/>
-        </p:nvSpPr>
-        <p:spPr>
-          <a:xfrm>
-            <a:off x="2771466" y="1024616"/>
-            <a:ext cx="2067374" cy="4833257"/>
-          </a:xfrm>
-          <a:prstGeom prst="roundRect">
-            <a:avLst/>
-          </a:prstGeom>
-          <a:solidFill>
-            <a:schemeClr val="accent1">
-              <a:lumMod val="40000"/>
-              <a:lumOff val="60000"/>
-            </a:schemeClr>
-          </a:solidFill>
-          <a:ln>
-            <a:noFill/>
-          </a:ln>
-        </p:spPr>
-        <p:style>
-          <a:lnRef idx="2">
-            <a:schemeClr val="accent1">
-              <a:shade val="15000"/>
-            </a:schemeClr>
-          </a:lnRef>
-          <a:fillRef idx="1">
-            <a:schemeClr val="accent1"/>
-          </a:fillRef>
-          <a:effectRef idx="0">
-            <a:schemeClr val="accent1"/>
-          </a:effectRef>
-          <a:fontRef idx="minor">
-            <a:schemeClr val="lt1"/>
-          </a:fontRef>
-        </p:style>
-        <p:txBody>
-          <a:bodyPr rtlCol="0" anchor="ctr"/>
-          <a:lstStyle/>
-          <a:p>
-            <a:pPr algn="ctr"/>
-            <a:endParaRPr lang="LID4096"/>
-          </a:p>
-        </p:txBody>
-      </p:sp>
-      <p:grpSp>
-        <p:nvGrpSpPr>
-          <p:cNvPr id="30" name="Group 29">
-            <a:extLst>
-              <a:ext uri="{FF2B5EF4-FFF2-40B4-BE49-F238E27FC236}">
-                <a16:creationId xmlns:a16="http://schemas.microsoft.com/office/drawing/2014/main" id="{50F39061-D5C5-812E-6950-4B8E8B63B5CD}"/>
-              </a:ext>
-            </a:extLst>
-          </p:cNvPr>
-          <p:cNvGrpSpPr/>
-          <p:nvPr/>
-        </p:nvGrpSpPr>
-        <p:grpSpPr>
-          <a:xfrm>
-            <a:off x="2802728" y="1455763"/>
-            <a:ext cx="2004850" cy="3118670"/>
-            <a:chOff x="2521648" y="1455763"/>
-            <a:chExt cx="2004850" cy="3118670"/>
-          </a:xfrm>
-        </p:grpSpPr>
-        <p:pic>
-          <p:nvPicPr>
-            <p:cNvPr id="9" name="Graphic 8" descr="Database">
-              <a:extLst>
-                <a:ext uri="{FF2B5EF4-FFF2-40B4-BE49-F238E27FC236}">
-                  <a16:creationId xmlns:a16="http://schemas.microsoft.com/office/drawing/2014/main" id="{476B54AC-BFD5-F800-D135-AD5B57514D10}"/>
-                </a:ext>
-              </a:extLst>
-            </p:cNvPr>
-            <p:cNvPicPr>
-              <a:picLocks noChangeAspect="1"/>
-            </p:cNvPicPr>
-            <p:nvPr/>
-          </p:nvPicPr>
-          <p:blipFill>
-            <a:blip r:embed="rId5">
-              <a:extLst>
-                <a:ext uri="{96DAC541-7B7A-43D3-8B79-37D633B846F1}">
-                  <asvg:svgBlip xmlns:asvg="http://schemas.microsoft.com/office/drawing/2016/SVG/main" r:embed="rId6"/>
-                </a:ext>
-              </a:extLst>
-            </a:blip>
-            <a:stretch>
-              <a:fillRect/>
-            </a:stretch>
-          </p:blipFill>
-          <p:spPr>
-            <a:xfrm>
-              <a:off x="3066873" y="1455763"/>
-              <a:ext cx="914400" cy="914400"/>
-            </a:xfrm>
-            <a:prstGeom prst="rect">
-              <a:avLst/>
-            </a:prstGeom>
-          </p:spPr>
-        </p:pic>
-        <p:sp>
-          <p:nvSpPr>
-            <p:cNvPr id="21" name="TextBox 20">
-              <a:extLst>
-                <a:ext uri="{FF2B5EF4-FFF2-40B4-BE49-F238E27FC236}">
-                  <a16:creationId xmlns:a16="http://schemas.microsoft.com/office/drawing/2014/main" id="{D8DFA633-3341-86B8-27F8-C87ACA044166}"/>
-                </a:ext>
-              </a:extLst>
-            </p:cNvPr>
-            <p:cNvSpPr txBox="1"/>
-            <p:nvPr/>
-          </p:nvSpPr>
-          <p:spPr>
-            <a:xfrm>
-              <a:off x="2521648" y="2512330"/>
-              <a:ext cx="2004850" cy="2062103"/>
-            </a:xfrm>
-            <a:prstGeom prst="rect">
-              <a:avLst/>
-            </a:prstGeom>
-            <a:noFill/>
-          </p:spPr>
-          <p:txBody>
-            <a:bodyPr wrap="square" rtlCol="0">
-              <a:spAutoFit/>
-            </a:bodyPr>
-            <a:lstStyle/>
-            <a:p>
-              <a:pPr algn="ctr"/>
-              <a:r>
-                <a:rPr lang="de-DE" sz="1600" b="1" dirty="0"/>
-                <a:t>Erhebung</a:t>
-              </a:r>
-            </a:p>
-            <a:p>
-              <a:pPr algn="ctr"/>
-              <a:endParaRPr lang="de-DE" sz="1400" dirty="0"/>
-            </a:p>
-            <a:p>
-              <a:pPr algn="ctr"/>
-              <a:r>
-                <a:rPr lang="de-DE" sz="1400" dirty="0"/>
-                <a:t>Sammlung von Daten</a:t>
-              </a:r>
-            </a:p>
-            <a:p>
-              <a:pPr algn="ctr"/>
-              <a:r>
-                <a:rPr lang="de-DE" sz="1400" dirty="0"/>
-                <a:t>Datenbanken, APIs, Web </a:t>
-              </a:r>
-              <a:r>
-                <a:rPr lang="de-DE" sz="1400" dirty="0" err="1"/>
-                <a:t>Scraping</a:t>
-              </a:r>
-              <a:endParaRPr lang="de-DE" sz="1400" dirty="0"/>
-            </a:p>
-            <a:p>
-              <a:pPr algn="ctr"/>
-              <a:endParaRPr lang="de-DE" sz="1400" dirty="0"/>
-            </a:p>
-            <a:p>
-              <a:pPr algn="ctr"/>
-              <a:r>
-                <a:rPr lang="en-US" sz="1400" dirty="0" err="1"/>
-                <a:t>Produktbewertungen</a:t>
-              </a:r>
-              <a:endParaRPr lang="en-US" sz="1400" dirty="0"/>
-            </a:p>
-            <a:p>
-              <a:pPr algn="ctr"/>
-              <a:r>
-                <a:rPr lang="en-US" sz="1400" dirty="0" err="1"/>
-                <a:t>Lieferzeiten</a:t>
-              </a:r>
-              <a:endParaRPr lang="en-US" sz="1400" dirty="0"/>
-            </a:p>
-            <a:p>
-              <a:pPr algn="ctr"/>
-              <a:r>
-                <a:rPr lang="en-US" sz="1400" dirty="0" err="1"/>
-                <a:t>Preise</a:t>
-              </a:r>
-              <a:r>
-                <a:rPr lang="en-US" sz="1400" dirty="0"/>
-                <a:t> &amp; </a:t>
-              </a:r>
-              <a:r>
-                <a:rPr lang="en-US" sz="1400" dirty="0" err="1"/>
-                <a:t>Rabatte</a:t>
-              </a:r>
-              <a:endParaRPr lang="en-US" sz="1400" dirty="0"/>
-            </a:p>
-          </p:txBody>
-        </p:sp>
-      </p:grpSp>
-      <p:sp>
-        <p:nvSpPr>
-          <p:cNvPr id="37" name="Rectangle: Rounded Corners 36">
-            <a:extLst>
-              <a:ext uri="{FF2B5EF4-FFF2-40B4-BE49-F238E27FC236}">
-                <a16:creationId xmlns:a16="http://schemas.microsoft.com/office/drawing/2014/main" id="{71494EC8-C6E2-9439-105B-EAC73E3DA858}"/>
-              </a:ext>
-            </a:extLst>
-          </p:cNvPr>
-          <p:cNvSpPr/>
-          <p:nvPr/>
-        </p:nvSpPr>
-        <p:spPr>
-          <a:xfrm>
-            <a:off x="5046719" y="1024616"/>
-            <a:ext cx="2067374" cy="4833257"/>
-          </a:xfrm>
-          <a:prstGeom prst="roundRect">
-            <a:avLst/>
-          </a:prstGeom>
-          <a:solidFill>
-            <a:schemeClr val="accent2">
-              <a:lumMod val="60000"/>
-              <a:lumOff val="40000"/>
-            </a:schemeClr>
-          </a:solidFill>
-          <a:ln>
-            <a:noFill/>
-          </a:ln>
-        </p:spPr>
-        <p:style>
-          <a:lnRef idx="2">
-            <a:schemeClr val="accent1">
-              <a:shade val="15000"/>
-            </a:schemeClr>
-          </a:lnRef>
-          <a:fillRef idx="1">
-            <a:schemeClr val="accent1"/>
-          </a:fillRef>
-          <a:effectRef idx="0">
-            <a:schemeClr val="accent1"/>
-          </a:effectRef>
-          <a:fontRef idx="minor">
-            <a:schemeClr val="lt1"/>
-          </a:fontRef>
-        </p:style>
-        <p:txBody>
-          <a:bodyPr rtlCol="0" anchor="ctr"/>
-          <a:lstStyle/>
-          <a:p>
-            <a:pPr algn="ctr"/>
-            <a:endParaRPr lang="LID4096"/>
-          </a:p>
-        </p:txBody>
-      </p:sp>
-      <p:pic>
-        <p:nvPicPr>
-          <p:cNvPr id="19" name="Graphic 18" descr="Checklist">
-            <a:extLst>
-              <a:ext uri="{FF2B5EF4-FFF2-40B4-BE49-F238E27FC236}">
-                <a16:creationId xmlns:a16="http://schemas.microsoft.com/office/drawing/2014/main" id="{5674ACFB-94AF-E452-F96B-AA1A76DC1C9B}"/>
-              </a:ext>
-            </a:extLst>
-          </p:cNvPr>
-          <p:cNvPicPr>
-            <a:picLocks noChangeAspect="1"/>
-          </p:cNvPicPr>
-          <p:nvPr/>
-        </p:nvPicPr>
-        <p:blipFill>
-          <a:blip r:embed="rId7">
-            <a:extLst>
-              <a:ext uri="{96DAC541-7B7A-43D3-8B79-37D633B846F1}">
-                <asvg:svgBlip xmlns:asvg="http://schemas.microsoft.com/office/drawing/2016/SVG/main" r:embed="rId8"/>
-              </a:ext>
-            </a:extLst>
-          </a:blip>
-          <a:stretch>
-            <a:fillRect/>
-          </a:stretch>
-        </p:blipFill>
-        <p:spPr>
-          <a:xfrm>
-            <a:off x="5623206" y="1455763"/>
-            <a:ext cx="914400" cy="914400"/>
-          </a:xfrm>
-          <a:prstGeom prst="rect">
-            <a:avLst/>
-          </a:prstGeom>
-        </p:spPr>
-      </p:pic>
-      <p:sp>
-        <p:nvSpPr>
-          <p:cNvPr id="22" name="TextBox 21">
-            <a:extLst>
-              <a:ext uri="{FF2B5EF4-FFF2-40B4-BE49-F238E27FC236}">
-                <a16:creationId xmlns:a16="http://schemas.microsoft.com/office/drawing/2014/main" id="{0E7AF935-C9DA-A1C8-F302-67A8ABEAB3C3}"/>
-              </a:ext>
-            </a:extLst>
-          </p:cNvPr>
-          <p:cNvSpPr txBox="1"/>
-          <p:nvPr/>
-        </p:nvSpPr>
-        <p:spPr>
-          <a:xfrm>
-            <a:off x="5077981" y="2512330"/>
-            <a:ext cx="2004850" cy="2492990"/>
-          </a:xfrm>
-          <a:prstGeom prst="rect">
-            <a:avLst/>
-          </a:prstGeom>
-          <a:noFill/>
-        </p:spPr>
-        <p:txBody>
-          <a:bodyPr wrap="square" rtlCol="0">
-            <a:spAutoFit/>
-          </a:bodyPr>
-          <a:lstStyle/>
-          <a:p>
-            <a:pPr algn="ctr"/>
-            <a:r>
-              <a:rPr lang="de-DE" sz="1600" b="1" dirty="0"/>
-              <a:t>Vorbereitung</a:t>
-            </a:r>
-          </a:p>
-          <a:p>
-            <a:pPr algn="ctr"/>
-            <a:endParaRPr lang="de-DE" sz="1400" dirty="0"/>
-          </a:p>
-          <a:p>
-            <a:pPr algn="ctr"/>
-            <a:r>
-              <a:rPr lang="de-DE" sz="1400" dirty="0"/>
-              <a:t>Bereinigung Fehlende Werte oder unvollständiger Daten</a:t>
-            </a:r>
-          </a:p>
-          <a:p>
-            <a:pPr algn="ctr"/>
-            <a:endParaRPr lang="de-DE" sz="1400" dirty="0"/>
-          </a:p>
-          <a:p>
-            <a:pPr algn="ctr"/>
-            <a:r>
-              <a:rPr lang="de-DE" sz="1400" dirty="0"/>
-              <a:t>Transformation und </a:t>
-            </a:r>
-            <a:r>
-              <a:rPr lang="de-DE" sz="1400" dirty="0" err="1"/>
-              <a:t>strukturierung</a:t>
-            </a:r>
-            <a:r>
-              <a:rPr lang="de-DE" sz="1400" dirty="0"/>
-              <a:t> der Rohdaten</a:t>
-            </a:r>
-          </a:p>
-          <a:p>
-            <a:pPr algn="ctr"/>
-            <a:endParaRPr lang="de-DE" sz="1400" dirty="0"/>
-          </a:p>
-          <a:p>
-            <a:pPr algn="ctr"/>
-            <a:r>
-              <a:rPr lang="de-DE" sz="1400" dirty="0" err="1"/>
-              <a:t>Z.b.</a:t>
-            </a:r>
-            <a:r>
-              <a:rPr lang="de-DE" sz="1400" dirty="0"/>
-              <a:t> EUR, USD</a:t>
-            </a:r>
-          </a:p>
-        </p:txBody>
-      </p:sp>
-      <p:sp>
-        <p:nvSpPr>
-          <p:cNvPr id="38" name="Rectangle: Rounded Corners 37">
-            <a:extLst>
-              <a:ext uri="{FF2B5EF4-FFF2-40B4-BE49-F238E27FC236}">
-                <a16:creationId xmlns:a16="http://schemas.microsoft.com/office/drawing/2014/main" id="{C98568F5-E42F-8BB3-A490-D5BE0EF78F44}"/>
-              </a:ext>
-            </a:extLst>
-          </p:cNvPr>
-          <p:cNvSpPr/>
-          <p:nvPr/>
-        </p:nvSpPr>
-        <p:spPr>
-          <a:xfrm>
-            <a:off x="7321972" y="1012371"/>
-            <a:ext cx="2067374" cy="4833257"/>
-          </a:xfrm>
-          <a:prstGeom prst="roundRect">
-            <a:avLst/>
-          </a:prstGeom>
-          <a:solidFill>
-            <a:srgbClr val="9999FF"/>
-          </a:solidFill>
-          <a:ln>
-            <a:noFill/>
-          </a:ln>
-        </p:spPr>
-        <p:style>
-          <a:lnRef idx="2">
-            <a:schemeClr val="accent1">
-              <a:shade val="15000"/>
-            </a:schemeClr>
-          </a:lnRef>
-          <a:fillRef idx="1">
-            <a:schemeClr val="accent1"/>
-          </a:fillRef>
-          <a:effectRef idx="0">
-            <a:schemeClr val="accent1"/>
-          </a:effectRef>
-          <a:fontRef idx="minor">
-            <a:schemeClr val="lt1"/>
-          </a:fontRef>
-        </p:style>
-        <p:txBody>
-          <a:bodyPr rtlCol="0" anchor="ctr"/>
-          <a:lstStyle/>
-          <a:p>
-            <a:pPr algn="ctr"/>
-            <a:endParaRPr lang="LID4096"/>
-          </a:p>
-        </p:txBody>
-      </p:sp>
-      <p:pic>
-        <p:nvPicPr>
-          <p:cNvPr id="13" name="Graphic 12" descr="Research">
-            <a:extLst>
-              <a:ext uri="{FF2B5EF4-FFF2-40B4-BE49-F238E27FC236}">
-                <a16:creationId xmlns:a16="http://schemas.microsoft.com/office/drawing/2014/main" id="{A19EC08F-EE9E-EEC3-70FF-6AA50E2E5122}"/>
-              </a:ext>
-            </a:extLst>
-          </p:cNvPr>
-          <p:cNvPicPr>
-            <a:picLocks noChangeAspect="1"/>
-          </p:cNvPicPr>
-          <p:nvPr/>
-        </p:nvPicPr>
-        <p:blipFill>
-          <a:blip r:embed="rId9">
-            <a:extLst>
-              <a:ext uri="{96DAC541-7B7A-43D3-8B79-37D633B846F1}">
-                <asvg:svgBlip xmlns:asvg="http://schemas.microsoft.com/office/drawing/2016/SVG/main" r:embed="rId10"/>
-              </a:ext>
-            </a:extLst>
-          </a:blip>
-          <a:stretch>
-            <a:fillRect/>
-          </a:stretch>
-        </p:blipFill>
-        <p:spPr>
-          <a:xfrm>
-            <a:off x="7898459" y="1455763"/>
-            <a:ext cx="914400" cy="914400"/>
-          </a:xfrm>
-          <a:prstGeom prst="rect">
-            <a:avLst/>
-          </a:prstGeom>
-        </p:spPr>
-      </p:pic>
-      <p:sp>
-        <p:nvSpPr>
-          <p:cNvPr id="23" name="TextBox 22">
-            <a:extLst>
-              <a:ext uri="{FF2B5EF4-FFF2-40B4-BE49-F238E27FC236}">
-                <a16:creationId xmlns:a16="http://schemas.microsoft.com/office/drawing/2014/main" id="{287E938B-C533-53F6-0B07-680FA385DE68}"/>
-              </a:ext>
-            </a:extLst>
-          </p:cNvPr>
-          <p:cNvSpPr txBox="1"/>
-          <p:nvPr/>
-        </p:nvSpPr>
-        <p:spPr>
-          <a:xfrm>
-            <a:off x="7353234" y="2512330"/>
-            <a:ext cx="2004850" cy="2492990"/>
-          </a:xfrm>
-          <a:prstGeom prst="rect">
-            <a:avLst/>
-          </a:prstGeom>
-          <a:noFill/>
-        </p:spPr>
-        <p:txBody>
-          <a:bodyPr wrap="square" rtlCol="0">
-            <a:spAutoFit/>
-          </a:bodyPr>
-          <a:lstStyle/>
-          <a:p>
-            <a:pPr algn="ctr"/>
-            <a:r>
-              <a:rPr lang="de-DE" sz="1600" b="1" dirty="0"/>
-              <a:t>Analyse</a:t>
-            </a:r>
-          </a:p>
-          <a:p>
-            <a:pPr algn="ctr"/>
-            <a:endParaRPr lang="de-DE" sz="1400" dirty="0"/>
-          </a:p>
-          <a:p>
-            <a:pPr algn="ctr"/>
-            <a:r>
-              <a:rPr lang="en-US" sz="1400" dirty="0" err="1"/>
-              <a:t>Statistische</a:t>
-            </a:r>
-            <a:r>
-              <a:rPr lang="en-US" sz="1400" dirty="0"/>
-              <a:t> </a:t>
-            </a:r>
-            <a:r>
-              <a:rPr lang="en-US" sz="1400" dirty="0" err="1"/>
-              <a:t>Auswertung</a:t>
-            </a:r>
-            <a:r>
-              <a:rPr lang="en-US" sz="1400" dirty="0"/>
-              <a:t> </a:t>
-            </a:r>
-          </a:p>
-          <a:p>
-            <a:pPr algn="ctr"/>
-            <a:endParaRPr lang="de-DE" sz="1400" dirty="0"/>
-          </a:p>
-          <a:p>
-            <a:pPr algn="ctr"/>
-            <a:r>
-              <a:rPr lang="de-DE" sz="1400" dirty="0"/>
-              <a:t>Korrelationen</a:t>
-            </a:r>
-          </a:p>
-          <a:p>
-            <a:pPr algn="ctr"/>
-            <a:endParaRPr lang="de-DE" sz="1400" dirty="0"/>
-          </a:p>
-          <a:p>
-            <a:pPr algn="ctr"/>
-            <a:r>
-              <a:rPr lang="de-DE" sz="1400" dirty="0"/>
-              <a:t>Mustererkennung</a:t>
-            </a:r>
-          </a:p>
-          <a:p>
-            <a:pPr algn="ctr"/>
-            <a:endParaRPr lang="de-DE" sz="1400" dirty="0"/>
-          </a:p>
-          <a:p>
-            <a:pPr algn="ctr"/>
-            <a:r>
-              <a:rPr lang="de-DE" sz="1400" dirty="0"/>
-              <a:t>Anwendung von Modellen zur</a:t>
-            </a:r>
-          </a:p>
-          <a:p>
-            <a:pPr algn="ctr"/>
-            <a:r>
-              <a:rPr lang="de-DE" sz="1400" dirty="0"/>
-              <a:t>Erkenntnisgewinnung</a:t>
-            </a:r>
-            <a:endParaRPr lang="LID4096" sz="1400" dirty="0"/>
-          </a:p>
-        </p:txBody>
-      </p:sp>
-      <p:sp>
-        <p:nvSpPr>
-          <p:cNvPr id="39" name="Rectangle: Rounded Corners 38">
-            <a:extLst>
-              <a:ext uri="{FF2B5EF4-FFF2-40B4-BE49-F238E27FC236}">
-                <a16:creationId xmlns:a16="http://schemas.microsoft.com/office/drawing/2014/main" id="{BC62606D-036F-F460-EAC8-BF67CF336768}"/>
-              </a:ext>
-            </a:extLst>
-          </p:cNvPr>
-          <p:cNvSpPr/>
-          <p:nvPr/>
-        </p:nvSpPr>
-        <p:spPr>
-          <a:xfrm>
-            <a:off x="9597223" y="1024616"/>
-            <a:ext cx="2067374" cy="4833257"/>
-          </a:xfrm>
-          <a:prstGeom prst="roundRect">
-            <a:avLst/>
-          </a:prstGeom>
-          <a:solidFill>
-            <a:schemeClr val="accent6">
-              <a:lumMod val="60000"/>
-              <a:lumOff val="40000"/>
-            </a:schemeClr>
-          </a:solidFill>
-          <a:ln>
-            <a:noFill/>
-          </a:ln>
-        </p:spPr>
-        <p:style>
-          <a:lnRef idx="2">
-            <a:schemeClr val="accent1">
-              <a:shade val="15000"/>
-            </a:schemeClr>
-          </a:lnRef>
-          <a:fillRef idx="1">
-            <a:schemeClr val="accent1"/>
-          </a:fillRef>
-          <a:effectRef idx="0">
-            <a:schemeClr val="accent1"/>
-          </a:effectRef>
-          <a:fontRef idx="minor">
-            <a:schemeClr val="lt1"/>
-          </a:fontRef>
-        </p:style>
-        <p:txBody>
-          <a:bodyPr rtlCol="0" anchor="ctr"/>
-          <a:lstStyle/>
-          <a:p>
-            <a:pPr algn="ctr"/>
-            <a:endParaRPr lang="LID4096"/>
-          </a:p>
-        </p:txBody>
-      </p:sp>
-      <p:pic>
-        <p:nvPicPr>
-          <p:cNvPr id="15" name="Graphic 14" descr="Share">
-            <a:extLst>
-              <a:ext uri="{FF2B5EF4-FFF2-40B4-BE49-F238E27FC236}">
-                <a16:creationId xmlns:a16="http://schemas.microsoft.com/office/drawing/2014/main" id="{FF895700-3132-0648-A450-8F1704B8964F}"/>
-              </a:ext>
-            </a:extLst>
-          </p:cNvPr>
-          <p:cNvPicPr>
-            <a:picLocks noChangeAspect="1"/>
-          </p:cNvPicPr>
-          <p:nvPr/>
-        </p:nvPicPr>
-        <p:blipFill>
-          <a:blip r:embed="rId11">
-            <a:extLst>
-              <a:ext uri="{96DAC541-7B7A-43D3-8B79-37D633B846F1}">
-                <asvg:svgBlip xmlns:asvg="http://schemas.microsoft.com/office/drawing/2016/SVG/main" r:embed="rId12"/>
-              </a:ext>
-            </a:extLst>
-          </a:blip>
-          <a:stretch>
-            <a:fillRect/>
-          </a:stretch>
-        </p:blipFill>
-        <p:spPr>
-          <a:xfrm>
-            <a:off x="10173710" y="1455763"/>
-            <a:ext cx="914400" cy="914400"/>
-          </a:xfrm>
-          <a:prstGeom prst="rect">
-            <a:avLst/>
-          </a:prstGeom>
-        </p:spPr>
-      </p:pic>
-      <p:sp>
-        <p:nvSpPr>
-          <p:cNvPr id="24" name="TextBox 23">
-            <a:extLst>
-              <a:ext uri="{FF2B5EF4-FFF2-40B4-BE49-F238E27FC236}">
-                <a16:creationId xmlns:a16="http://schemas.microsoft.com/office/drawing/2014/main" id="{E007D182-B808-E93F-8C23-74CEF8A12818}"/>
-              </a:ext>
-            </a:extLst>
-          </p:cNvPr>
-          <p:cNvSpPr txBox="1"/>
-          <p:nvPr/>
-        </p:nvSpPr>
-        <p:spPr>
-          <a:xfrm>
-            <a:off x="9628485" y="2512330"/>
-            <a:ext cx="2004850" cy="2277547"/>
-          </a:xfrm>
-          <a:prstGeom prst="rect">
-            <a:avLst/>
-          </a:prstGeom>
-          <a:noFill/>
-        </p:spPr>
-        <p:txBody>
-          <a:bodyPr wrap="square" rtlCol="0">
-            <a:spAutoFit/>
-          </a:bodyPr>
-          <a:lstStyle/>
-          <a:p>
-            <a:pPr algn="ctr"/>
-            <a:r>
-              <a:rPr lang="de-DE" sz="1600" b="1" dirty="0"/>
-              <a:t>Teilen</a:t>
-            </a:r>
-          </a:p>
-          <a:p>
-            <a:pPr algn="ctr"/>
-            <a:endParaRPr lang="de-DE" sz="1400" dirty="0"/>
-          </a:p>
-          <a:p>
-            <a:pPr algn="ctr"/>
-            <a:r>
-              <a:rPr lang="de-DE" sz="1400" dirty="0"/>
-              <a:t>Berichte</a:t>
-            </a:r>
-          </a:p>
-          <a:p>
-            <a:pPr algn="ctr"/>
-            <a:endParaRPr lang="de-DE" sz="1400" dirty="0"/>
-          </a:p>
-          <a:p>
-            <a:pPr algn="ctr"/>
-            <a:r>
-              <a:rPr lang="de-DE" sz="1400" dirty="0"/>
-              <a:t>Präsentationen</a:t>
-            </a:r>
-          </a:p>
-          <a:p>
-            <a:pPr algn="ctr"/>
-            <a:endParaRPr lang="de-DE" sz="1400" dirty="0"/>
-          </a:p>
-          <a:p>
-            <a:pPr algn="ctr"/>
-            <a:r>
-              <a:rPr lang="en-US" sz="1400" dirty="0"/>
-              <a:t>Storytelling </a:t>
-            </a:r>
-            <a:r>
-              <a:rPr lang="en-US" sz="1400" dirty="0" err="1"/>
-              <a:t>mit</a:t>
-            </a:r>
-            <a:r>
-              <a:rPr lang="en-US" sz="1400" dirty="0"/>
-              <a:t> Daten</a:t>
-            </a:r>
-          </a:p>
-          <a:p>
-            <a:pPr algn="ctr"/>
-            <a:endParaRPr lang="en-US" sz="1400" dirty="0"/>
-          </a:p>
-          <a:p>
-            <a:pPr algn="ctr"/>
-            <a:r>
-              <a:rPr lang="en-US" sz="1400" dirty="0"/>
-              <a:t>Klare </a:t>
-            </a:r>
-            <a:r>
-              <a:rPr lang="en-US" sz="1400" dirty="0" err="1"/>
-              <a:t>Empfehlungen</a:t>
-            </a:r>
-            <a:r>
-              <a:rPr lang="en-US" sz="1400" dirty="0"/>
-              <a:t> </a:t>
-            </a:r>
-            <a:r>
-              <a:rPr lang="en-US" sz="1400" dirty="0" err="1"/>
-              <a:t>geben</a:t>
-            </a:r>
-            <a:endParaRPr lang="LID4096" sz="1400" dirty="0"/>
-          </a:p>
-        </p:txBody>
-      </p:sp>
-    </p:spTree>
-    <p:extLst>
-      <p:ext uri="{BB962C8B-B14F-4D97-AF65-F5344CB8AC3E}">
-        <p14:creationId xmlns:p14="http://schemas.microsoft.com/office/powerpoint/2010/main" val="2387338393"/>
-      </p:ext>
-    </p:extLst>
-  </p:cSld>
-  <p:clrMapOvr>
-    <a:masterClrMapping/>
-  </p:clrMapOvr>
-</p:sld>
-</file>
-
-<file path=ppt/slides/slide3.xml><?xml version="1.0" encoding="utf-8"?>
-<p:sld xmlns:a="http://schemas.openxmlformats.org/drawingml/2006/main" xmlns:r="http://schemas.openxmlformats.org/officeDocument/2006/relationships" xmlns:p="http://schemas.openxmlformats.org/presentationml/2006/main">
-  <p:cSld>
-    <p:spTree>
-      <p:nvGrpSpPr>
-        <p:cNvPr id="1" name=""/>
-        <p:cNvGrpSpPr/>
-        <p:nvPr/>
-      </p:nvGrpSpPr>
-      <p:grpSpPr>
-        <a:xfrm>
-          <a:off x="0" y="0"/>
-          <a:ext cx="0" cy="0"/>
-          <a:chOff x="0" y="0"/>
-          <a:chExt cx="0" cy="0"/>
-        </a:xfrm>
-      </p:grpSpPr>
-      <p:sp>
-        <p:nvSpPr>
-          <p:cNvPr id="18" name="TextBox 17">
-            <a:extLst>
-              <a:ext uri="{FF2B5EF4-FFF2-40B4-BE49-F238E27FC236}">
-                <a16:creationId xmlns:a16="http://schemas.microsoft.com/office/drawing/2014/main" id="{524F6DF1-AF8B-B5EC-EC2F-2A121854376C}"/>
-              </a:ext>
-            </a:extLst>
-          </p:cNvPr>
-          <p:cNvSpPr txBox="1"/>
-          <p:nvPr/>
-        </p:nvSpPr>
-        <p:spPr>
-          <a:xfrm>
-            <a:off x="358375" y="1490503"/>
-            <a:ext cx="6096680" cy="4247317"/>
-          </a:xfrm>
-          <a:prstGeom prst="rect">
-            <a:avLst/>
-          </a:prstGeom>
-          <a:noFill/>
-        </p:spPr>
-        <p:txBody>
-          <a:bodyPr wrap="square">
-            <a:spAutoFit/>
-          </a:bodyPr>
-          <a:lstStyle/>
-          <a:p>
-            <a:pPr>
-              <a:buNone/>
-            </a:pPr>
-            <a:r>
-              <a:rPr lang="de-DE" sz="1400" b="1" dirty="0">
-                <a:solidFill>
-                  <a:schemeClr val="accent5">
-                    <a:lumMod val="75000"/>
-                  </a:schemeClr>
-                </a:solidFill>
-              </a:rPr>
-              <a:t>Setup, Daten &amp; Datentypen</a:t>
-            </a:r>
-            <a:endParaRPr lang="de-DE" sz="1400" dirty="0">
-              <a:solidFill>
-                <a:schemeClr val="accent5">
-                  <a:lumMod val="75000"/>
-                </a:schemeClr>
-              </a:solidFill>
-            </a:endParaRPr>
-          </a:p>
-          <a:p>
-            <a:pPr marL="285750" indent="-285750">
-              <a:buFont typeface="Arial" panose="020B0604020202020204" pitchFamily="34" charset="0"/>
-              <a:buChar char="•"/>
-            </a:pPr>
-            <a:r>
-              <a:rPr lang="de-DE" sz="1400" dirty="0"/>
-              <a:t>Python, </a:t>
-            </a:r>
-            <a:r>
-              <a:rPr lang="de-DE" sz="1400" dirty="0" err="1"/>
-              <a:t>Jupyter</a:t>
-            </a:r>
-            <a:r>
-              <a:rPr lang="de-DE" sz="1400" dirty="0"/>
-              <a:t> Notebook, Bibliotheken installieren, </a:t>
-            </a:r>
-            <a:r>
-              <a:rPr lang="de-DE" sz="1400" dirty="0" err="1"/>
-              <a:t>VSCode</a:t>
-            </a:r>
-            <a:endParaRPr lang="de-DE" sz="1400" dirty="0"/>
-          </a:p>
-          <a:p>
-            <a:pPr marL="285750" indent="-285750">
-              <a:buFont typeface="Arial" panose="020B0604020202020204" pitchFamily="34" charset="0"/>
-              <a:buChar char="•"/>
-            </a:pPr>
-            <a:r>
-              <a:rPr lang="en-US" sz="1400" dirty="0" err="1"/>
-              <a:t>Arbeiten</a:t>
-            </a:r>
-            <a:r>
-              <a:rPr lang="en-US" sz="1400" dirty="0"/>
-              <a:t> </a:t>
-            </a:r>
-            <a:r>
-              <a:rPr lang="en-US" sz="1400" dirty="0" err="1"/>
-              <a:t>mit</a:t>
-            </a:r>
-            <a:r>
-              <a:rPr lang="en-US" sz="1400" dirty="0"/>
-              <a:t> </a:t>
-            </a:r>
-            <a:r>
-              <a:rPr lang="en-US" sz="1400" dirty="0" err="1"/>
-              <a:t>Jupyter</a:t>
-            </a:r>
-            <a:r>
-              <a:rPr lang="en-US" sz="1400" dirty="0"/>
-              <a:t> | </a:t>
-            </a:r>
-            <a:r>
-              <a:rPr lang="de-DE" sz="1400" dirty="0"/>
-              <a:t>Überblick über Datentypen </a:t>
-            </a:r>
-          </a:p>
-          <a:p>
-            <a:pPr marL="285750" indent="-285750">
-              <a:buFont typeface="Arial" panose="020B0604020202020204" pitchFamily="34" charset="0"/>
-              <a:buChar char="•"/>
-            </a:pPr>
-            <a:r>
-              <a:rPr lang="de-DE" sz="1400" dirty="0"/>
-              <a:t>Data | Information | Dataset</a:t>
-            </a:r>
-          </a:p>
-          <a:p>
-            <a:pPr>
-              <a:buFont typeface="Arial" panose="020B0604020202020204" pitchFamily="34" charset="0"/>
-              <a:buChar char="•"/>
-            </a:pPr>
-            <a:endParaRPr lang="de-DE" sz="1400" dirty="0"/>
-          </a:p>
-          <a:p>
-            <a:pPr>
-              <a:buNone/>
-            </a:pPr>
-            <a:r>
-              <a:rPr lang="de-DE" sz="1400" b="1" dirty="0">
-                <a:solidFill>
-                  <a:schemeClr val="accent5">
-                    <a:lumMod val="75000"/>
-                  </a:schemeClr>
-                </a:solidFill>
-              </a:rPr>
-              <a:t>Analyseziele &amp; KPIs definieren</a:t>
-            </a:r>
-            <a:endParaRPr lang="de-DE" sz="1400" dirty="0">
-              <a:solidFill>
-                <a:schemeClr val="accent5">
-                  <a:lumMod val="75000"/>
-                </a:schemeClr>
-              </a:solidFill>
-            </a:endParaRPr>
-          </a:p>
-          <a:p>
-            <a:pPr marL="285750" indent="-285750">
-              <a:buFont typeface="Arial" panose="020B0604020202020204" pitchFamily="34" charset="0"/>
-              <a:buChar char="•"/>
-            </a:pPr>
-            <a:r>
-              <a:rPr lang="de-DE" sz="1400" dirty="0"/>
-              <a:t>Analysefragen &amp; Ziele identifizieren</a:t>
-            </a:r>
-          </a:p>
-          <a:p>
-            <a:pPr marL="285750" indent="-285750">
-              <a:buFont typeface="Arial" panose="020B0604020202020204" pitchFamily="34" charset="0"/>
-              <a:buChar char="•"/>
-            </a:pPr>
-            <a:r>
-              <a:rPr lang="de-DE" sz="1400" dirty="0"/>
-              <a:t>KPIs mit Geschäftsentscheidungen verknüpfen</a:t>
-            </a:r>
-          </a:p>
-          <a:p>
-            <a:pPr>
-              <a:buFont typeface="Arial" panose="020B0604020202020204" pitchFamily="34" charset="0"/>
-              <a:buChar char="•"/>
-            </a:pPr>
-            <a:endParaRPr lang="de-DE" sz="1400" dirty="0"/>
-          </a:p>
-          <a:p>
-            <a:pPr>
-              <a:buNone/>
-            </a:pPr>
-            <a:r>
-              <a:rPr lang="de-DE" sz="1400" b="1" dirty="0">
-                <a:solidFill>
-                  <a:schemeClr val="accent5">
-                    <a:lumMod val="75000"/>
-                  </a:schemeClr>
-                </a:solidFill>
-              </a:rPr>
-              <a:t>Datenerhebung &amp; Datenqualität</a:t>
-            </a:r>
-            <a:endParaRPr lang="de-DE" sz="1400" dirty="0">
-              <a:solidFill>
-                <a:schemeClr val="accent5">
-                  <a:lumMod val="75000"/>
-                </a:schemeClr>
-              </a:solidFill>
-            </a:endParaRPr>
-          </a:p>
-          <a:p>
-            <a:pPr marL="285750" indent="-285750">
-              <a:buFont typeface="Arial" panose="020B0604020202020204" pitchFamily="34" charset="0"/>
-              <a:buChar char="•"/>
-            </a:pPr>
-            <a:r>
-              <a:rPr lang="de-DE" sz="1400" dirty="0"/>
-              <a:t>Daten sammeln: APIs, lokale Dateien, unstrukturierte Daten</a:t>
-            </a:r>
-          </a:p>
-          <a:p>
-            <a:pPr marL="285750" indent="-285750">
-              <a:buFont typeface="Arial" panose="020B0604020202020204" pitchFamily="34" charset="0"/>
-              <a:buChar char="•"/>
-            </a:pPr>
-            <a:r>
-              <a:rPr lang="de-DE" sz="1400" dirty="0"/>
-              <a:t>Vollständigkeit, Genauigkeit, Konsistenz prüfen</a:t>
-            </a:r>
-          </a:p>
-          <a:p>
-            <a:pPr marL="285750" indent="-285750">
-              <a:buFont typeface="Arial" panose="020B0604020202020204" pitchFamily="34" charset="0"/>
-              <a:buChar char="•"/>
-            </a:pPr>
-            <a:r>
-              <a:rPr lang="de-DE" sz="1400" dirty="0"/>
-              <a:t>Daten laden &amp; inspizieren</a:t>
-            </a:r>
-          </a:p>
-          <a:p>
-            <a:pPr marL="285750" indent="-285750">
-              <a:buFont typeface="Arial" panose="020B0604020202020204" pitchFamily="34" charset="0"/>
-              <a:buChar char="•"/>
-            </a:pPr>
-            <a:r>
-              <a:rPr lang="de-DE" sz="1400" dirty="0"/>
-              <a:t>Fehlende Werte, Duplikate, Format prüfen</a:t>
-            </a:r>
-          </a:p>
-          <a:p>
-            <a:pPr marL="285750" indent="-285750">
-              <a:buFont typeface="Arial" panose="020B0604020202020204" pitchFamily="34" charset="0"/>
-              <a:buChar char="•"/>
-            </a:pPr>
-            <a:endParaRPr lang="de-DE" sz="1400" dirty="0"/>
-          </a:p>
-          <a:p>
-            <a:pPr>
-              <a:buNone/>
-            </a:pPr>
-            <a:r>
-              <a:rPr lang="de-DE" sz="1400" b="1" dirty="0">
-                <a:solidFill>
-                  <a:schemeClr val="accent5">
-                    <a:lumMod val="75000"/>
-                  </a:schemeClr>
-                </a:solidFill>
-              </a:rPr>
-              <a:t>Datenbereinigung &amp; -vorbereitung</a:t>
-            </a:r>
-            <a:endParaRPr lang="de-DE" sz="1400" dirty="0">
-              <a:solidFill>
-                <a:schemeClr val="accent5">
-                  <a:lumMod val="75000"/>
-                </a:schemeClr>
-              </a:solidFill>
-            </a:endParaRPr>
-          </a:p>
-          <a:p>
-            <a:pPr marL="285750" indent="-285750">
-              <a:buFont typeface="Arial" panose="020B0604020202020204" pitchFamily="34" charset="0"/>
-              <a:buChar char="•"/>
-            </a:pPr>
-            <a:r>
-              <a:rPr lang="de-DE" sz="1400" dirty="0"/>
-              <a:t>Fehlende/falsche Werte korrigieren</a:t>
-            </a:r>
-          </a:p>
-          <a:p>
-            <a:pPr marL="285750" indent="-285750">
-              <a:buFont typeface="Arial" panose="020B0604020202020204" pitchFamily="34" charset="0"/>
-              <a:buChar char="•"/>
-            </a:pPr>
-            <a:r>
-              <a:rPr lang="de-DE" sz="1400" dirty="0"/>
-              <a:t>Formate standardisieren</a:t>
-            </a:r>
-          </a:p>
-          <a:p>
-            <a:pPr marL="285750" indent="-285750">
-              <a:buFont typeface="Arial" panose="020B0604020202020204" pitchFamily="34" charset="0"/>
-              <a:buChar char="•"/>
-            </a:pPr>
-            <a:r>
-              <a:rPr lang="de-DE" sz="1400" dirty="0"/>
-              <a:t>Variablen für Analyse transformieren</a:t>
-            </a:r>
-          </a:p>
-        </p:txBody>
-      </p:sp>
-      <p:sp>
-        <p:nvSpPr>
-          <p:cNvPr id="20" name="TextBox 19">
-            <a:extLst>
-              <a:ext uri="{FF2B5EF4-FFF2-40B4-BE49-F238E27FC236}">
-                <a16:creationId xmlns:a16="http://schemas.microsoft.com/office/drawing/2014/main" id="{88DBAAF1-C0D6-B182-1588-C698583090A2}"/>
-              </a:ext>
-            </a:extLst>
-          </p:cNvPr>
-          <p:cNvSpPr txBox="1"/>
-          <p:nvPr/>
-        </p:nvSpPr>
-        <p:spPr>
-          <a:xfrm>
-            <a:off x="5950910" y="1490503"/>
-            <a:ext cx="6096680" cy="4616648"/>
-          </a:xfrm>
-          <a:prstGeom prst="rect">
-            <a:avLst/>
-          </a:prstGeom>
-          <a:noFill/>
-        </p:spPr>
-        <p:txBody>
-          <a:bodyPr wrap="square">
-            <a:spAutoFit/>
-          </a:bodyPr>
-          <a:lstStyle/>
-          <a:p>
-            <a:pPr>
-              <a:buNone/>
-            </a:pPr>
-            <a:r>
-              <a:rPr lang="en-US" sz="1400" b="1" dirty="0" err="1">
-                <a:solidFill>
-                  <a:schemeClr val="accent5">
-                    <a:lumMod val="75000"/>
-                  </a:schemeClr>
-                </a:solidFill>
-              </a:rPr>
-              <a:t>Datenmodellierung</a:t>
-            </a:r>
-            <a:r>
-              <a:rPr lang="en-US" sz="1400" b="1" dirty="0">
-                <a:solidFill>
-                  <a:schemeClr val="accent5">
-                    <a:lumMod val="75000"/>
-                  </a:schemeClr>
-                </a:solidFill>
-              </a:rPr>
-              <a:t> &amp; Aggregation</a:t>
-            </a:r>
-            <a:endParaRPr lang="en-US" sz="1400" dirty="0">
-              <a:solidFill>
-                <a:schemeClr val="accent5">
-                  <a:lumMod val="75000"/>
-                </a:schemeClr>
-              </a:solidFill>
-            </a:endParaRPr>
-          </a:p>
-          <a:p>
-            <a:pPr marL="285750" indent="-285750">
-              <a:buFont typeface="Arial" panose="020B0604020202020204" pitchFamily="34" charset="0"/>
-              <a:buChar char="•"/>
-            </a:pPr>
-            <a:r>
-              <a:rPr lang="en-US" sz="1400" dirty="0"/>
-              <a:t>Daten in </a:t>
-            </a:r>
-            <a:r>
-              <a:rPr lang="en-US" sz="1400" dirty="0" err="1"/>
-              <a:t>Tabellen</a:t>
-            </a:r>
-            <a:r>
-              <a:rPr lang="en-US" sz="1400" dirty="0"/>
-              <a:t> &amp; </a:t>
-            </a:r>
-            <a:r>
-              <a:rPr lang="en-US" sz="1400" dirty="0" err="1"/>
-              <a:t>Beziehungen</a:t>
-            </a:r>
-            <a:r>
-              <a:rPr lang="en-US" sz="1400" dirty="0"/>
-              <a:t> </a:t>
-            </a:r>
-            <a:r>
-              <a:rPr lang="en-US" sz="1400" dirty="0" err="1"/>
-              <a:t>organisieren</a:t>
-            </a:r>
-            <a:endParaRPr lang="en-US" sz="1400" dirty="0"/>
-          </a:p>
-          <a:p>
-            <a:pPr marL="285750" indent="-285750">
-              <a:buFont typeface="Arial" panose="020B0604020202020204" pitchFamily="34" charset="0"/>
-              <a:buChar char="•"/>
-            </a:pPr>
-            <a:r>
-              <a:rPr lang="en-US" sz="1400" dirty="0"/>
-              <a:t>Feature Engineering &amp; </a:t>
-            </a:r>
-            <a:r>
-              <a:rPr lang="en-US" sz="1400" dirty="0" err="1"/>
-              <a:t>Aggregationen</a:t>
-            </a:r>
-            <a:r>
-              <a:rPr lang="en-US" sz="1400" dirty="0"/>
-              <a:t> </a:t>
-            </a:r>
-          </a:p>
-          <a:p>
-            <a:pPr>
-              <a:buFont typeface="Arial" panose="020B0604020202020204" pitchFamily="34" charset="0"/>
-              <a:buChar char="•"/>
-            </a:pPr>
-            <a:endParaRPr lang="en-US" sz="1400" dirty="0"/>
-          </a:p>
-          <a:p>
-            <a:r>
-              <a:rPr lang="en-US" sz="1400" b="1" dirty="0" err="1">
-                <a:solidFill>
-                  <a:schemeClr val="accent5">
-                    <a:lumMod val="75000"/>
-                  </a:schemeClr>
-                </a:solidFill>
-              </a:rPr>
-              <a:t>Deskriptive</a:t>
-            </a:r>
-            <a:r>
-              <a:rPr lang="en-US" sz="1400" b="1" dirty="0">
-                <a:solidFill>
-                  <a:schemeClr val="accent5">
-                    <a:lumMod val="75000"/>
-                  </a:schemeClr>
-                </a:solidFill>
-              </a:rPr>
-              <a:t> </a:t>
-            </a:r>
-            <a:r>
-              <a:rPr lang="en-US" sz="1400" b="1" dirty="0" err="1">
-                <a:solidFill>
-                  <a:schemeClr val="accent5">
-                    <a:lumMod val="75000"/>
-                  </a:schemeClr>
-                </a:solidFill>
-              </a:rPr>
-              <a:t>Statistik</a:t>
-            </a:r>
-            <a:r>
-              <a:rPr lang="en-US" sz="1400" b="1" dirty="0">
-                <a:solidFill>
-                  <a:schemeClr val="accent5">
-                    <a:lumMod val="75000"/>
-                  </a:schemeClr>
-                </a:solidFill>
-              </a:rPr>
-              <a:t> &amp; KPIs</a:t>
-            </a:r>
-            <a:endParaRPr lang="en-US" sz="1400" dirty="0">
-              <a:solidFill>
-                <a:schemeClr val="accent5">
-                  <a:lumMod val="75000"/>
-                </a:schemeClr>
-              </a:solidFill>
-            </a:endParaRPr>
-          </a:p>
-          <a:p>
-            <a:r>
-              <a:rPr lang="en-US" sz="1400" dirty="0" err="1"/>
-              <a:t>Mittelwert</a:t>
-            </a:r>
-            <a:r>
-              <a:rPr lang="en-US" sz="1400" dirty="0"/>
-              <a:t>, Median, Modus, </a:t>
-            </a:r>
-            <a:r>
-              <a:rPr lang="en-US" sz="1400" dirty="0" err="1"/>
-              <a:t>Standardabweichung</a:t>
-            </a:r>
-            <a:r>
-              <a:rPr lang="en-US" sz="1400" dirty="0"/>
-              <a:t>, </a:t>
-            </a:r>
-            <a:r>
-              <a:rPr lang="en-US" sz="1400" dirty="0" err="1"/>
-              <a:t>Spannweite</a:t>
-            </a:r>
-            <a:endParaRPr lang="en-US" sz="1400" dirty="0"/>
-          </a:p>
-          <a:p>
-            <a:r>
-              <a:rPr lang="en-US" sz="1400" dirty="0" err="1"/>
-              <a:t>Korrelationen</a:t>
-            </a:r>
-            <a:r>
-              <a:rPr lang="en-US" sz="1400" dirty="0"/>
-              <a:t> &amp; </a:t>
-            </a:r>
-            <a:r>
-              <a:rPr lang="en-US" sz="1400" dirty="0" err="1"/>
-              <a:t>Kreuztabellen</a:t>
-            </a:r>
-            <a:endParaRPr lang="en-US" sz="1400" dirty="0"/>
-          </a:p>
-          <a:p>
-            <a:endParaRPr lang="en-US" sz="1400" dirty="0"/>
-          </a:p>
-          <a:p>
-            <a:pPr>
-              <a:buNone/>
-            </a:pPr>
-            <a:r>
-              <a:rPr lang="en-US" sz="1400" b="1" dirty="0" err="1">
-                <a:solidFill>
-                  <a:schemeClr val="accent5">
-                    <a:lumMod val="75000"/>
-                  </a:schemeClr>
-                </a:solidFill>
-              </a:rPr>
-              <a:t>Datenvisualisierung</a:t>
-            </a:r>
-            <a:endParaRPr lang="en-US" sz="1400" dirty="0">
-              <a:solidFill>
-                <a:schemeClr val="accent5">
-                  <a:lumMod val="75000"/>
-                </a:schemeClr>
-              </a:solidFill>
-            </a:endParaRPr>
-          </a:p>
-          <a:p>
-            <a:pPr marL="285750" indent="-285750">
-              <a:buFont typeface="Arial" panose="020B0604020202020204" pitchFamily="34" charset="0"/>
-              <a:buChar char="•"/>
-            </a:pPr>
-            <a:r>
-              <a:rPr lang="en-US" sz="1400" dirty="0" err="1"/>
-              <a:t>Klassische</a:t>
-            </a:r>
-            <a:r>
-              <a:rPr lang="en-US" sz="1400" dirty="0"/>
-              <a:t> </a:t>
-            </a:r>
-            <a:r>
-              <a:rPr lang="en-US" sz="1400" dirty="0" err="1"/>
-              <a:t>Diagramme</a:t>
-            </a:r>
-            <a:r>
-              <a:rPr lang="en-US" sz="1400" dirty="0"/>
-              <a:t>; </a:t>
-            </a:r>
-            <a:r>
-              <a:rPr lang="en-US" sz="1400" dirty="0" err="1"/>
-              <a:t>Balkendiagramm</a:t>
-            </a:r>
-            <a:r>
-              <a:rPr lang="en-US" sz="1400" dirty="0"/>
-              <a:t>, </a:t>
-            </a:r>
-            <a:r>
-              <a:rPr lang="en-US" sz="1400" dirty="0" err="1"/>
-              <a:t>Histogramm</a:t>
-            </a:r>
-            <a:r>
-              <a:rPr lang="en-US" sz="1400" dirty="0"/>
-              <a:t>, Boxplot, </a:t>
-            </a:r>
-            <a:r>
-              <a:rPr lang="en-US" sz="1400" dirty="0" err="1"/>
-              <a:t>Liniendiagramm</a:t>
-            </a:r>
-            <a:r>
-              <a:rPr lang="en-US" sz="1400" dirty="0"/>
-              <a:t>, </a:t>
-            </a:r>
-            <a:r>
-              <a:rPr lang="en-US" sz="1400" dirty="0" err="1"/>
-              <a:t>Streudiagramm</a:t>
-            </a:r>
-            <a:endParaRPr lang="en-US" sz="1400" dirty="0"/>
-          </a:p>
-          <a:p>
-            <a:pPr marL="285750" indent="-285750">
-              <a:buFont typeface="Arial" panose="020B0604020202020204" pitchFamily="34" charset="0"/>
-              <a:buChar char="•"/>
-            </a:pPr>
-            <a:r>
-              <a:rPr lang="en-US" sz="1400" dirty="0" err="1"/>
-              <a:t>Interaktive</a:t>
-            </a:r>
-            <a:r>
-              <a:rPr lang="en-US" sz="1400" dirty="0"/>
-              <a:t> Charts</a:t>
-            </a:r>
-          </a:p>
-          <a:p>
-            <a:pPr>
-              <a:buFont typeface="Arial" panose="020B0604020202020204" pitchFamily="34" charset="0"/>
-              <a:buChar char="•"/>
-            </a:pPr>
-            <a:endParaRPr lang="en-US" sz="1400" dirty="0"/>
-          </a:p>
-          <a:p>
-            <a:pPr>
-              <a:buNone/>
-            </a:pPr>
-            <a:r>
-              <a:rPr lang="en-US" sz="1400" b="1" dirty="0">
-                <a:solidFill>
-                  <a:schemeClr val="accent5">
-                    <a:lumMod val="75000"/>
-                  </a:schemeClr>
-                </a:solidFill>
-              </a:rPr>
-              <a:t>Analytics-Workflow &amp; Integration</a:t>
-            </a:r>
-            <a:endParaRPr lang="en-US" sz="1400" dirty="0">
-              <a:solidFill>
-                <a:schemeClr val="accent5">
-                  <a:lumMod val="75000"/>
-                </a:schemeClr>
-              </a:solidFill>
-            </a:endParaRPr>
-          </a:p>
-          <a:p>
-            <a:pPr marL="285750" indent="-285750">
-              <a:buFont typeface="Arial" panose="020B0604020202020204" pitchFamily="34" charset="0"/>
-              <a:buChar char="•"/>
-            </a:pPr>
-            <a:r>
-              <a:rPr lang="en-US" sz="1400" dirty="0"/>
-              <a:t>Strukturierter Workflow</a:t>
-            </a:r>
-          </a:p>
-          <a:p>
-            <a:pPr marL="285750" indent="-285750">
-              <a:buFont typeface="Arial" panose="020B0604020202020204" pitchFamily="34" charset="0"/>
-              <a:buChar char="•"/>
-            </a:pPr>
-            <a:r>
-              <a:rPr lang="en-US" sz="1400" dirty="0"/>
-              <a:t>Mini-</a:t>
-            </a:r>
-            <a:r>
-              <a:rPr lang="en-US" sz="1400" dirty="0" err="1"/>
-              <a:t>Fallbeispiele</a:t>
-            </a:r>
-            <a:r>
-              <a:rPr lang="en-US" sz="1400" dirty="0"/>
-              <a:t> </a:t>
-            </a:r>
-            <a:r>
-              <a:rPr lang="en-US" sz="1400" dirty="0" err="1"/>
-              <a:t>mit</a:t>
-            </a:r>
-            <a:r>
-              <a:rPr lang="en-US" sz="1400" dirty="0"/>
-              <a:t> </a:t>
-            </a:r>
-            <a:r>
-              <a:rPr lang="en-US" sz="1400" dirty="0" err="1"/>
-              <a:t>allen</a:t>
-            </a:r>
-            <a:r>
-              <a:rPr lang="en-US" sz="1400" dirty="0"/>
-              <a:t> </a:t>
-            </a:r>
-            <a:r>
-              <a:rPr lang="en-US" sz="1400" dirty="0" err="1"/>
-              <a:t>vorherigen</a:t>
-            </a:r>
-            <a:r>
-              <a:rPr lang="en-US" sz="1400" dirty="0"/>
-              <a:t> </a:t>
-            </a:r>
-            <a:r>
-              <a:rPr lang="en-US" sz="1400" dirty="0" err="1"/>
-              <a:t>Schritten</a:t>
-            </a:r>
-            <a:endParaRPr lang="en-US" sz="1400" dirty="0"/>
-          </a:p>
-          <a:p>
-            <a:endParaRPr lang="en-US" sz="1400" dirty="0"/>
-          </a:p>
-          <a:p>
-            <a:pPr>
-              <a:buNone/>
-            </a:pPr>
-            <a:r>
-              <a:rPr lang="en-US" sz="1400" b="1" dirty="0">
-                <a:solidFill>
-                  <a:schemeClr val="accent5">
-                    <a:lumMod val="75000"/>
-                  </a:schemeClr>
-                </a:solidFill>
-              </a:rPr>
-              <a:t>Capstone End-to-End Projekt</a:t>
-            </a:r>
-          </a:p>
-          <a:p>
-            <a:pPr marL="285750" indent="-285750">
-              <a:buFont typeface="Arial" panose="020B0604020202020204" pitchFamily="34" charset="0"/>
-              <a:buChar char="•"/>
-            </a:pPr>
-            <a:r>
-              <a:rPr lang="de-DE" sz="1400" dirty="0"/>
-              <a:t>Vollständige Analyse von der Fragestellung bis zur Präsentation</a:t>
-            </a:r>
-          </a:p>
-          <a:p>
-            <a:pPr marL="285750" indent="-285750">
-              <a:buFont typeface="Arial" panose="020B0604020202020204" pitchFamily="34" charset="0"/>
-              <a:buChar char="•"/>
-            </a:pPr>
-            <a:r>
-              <a:rPr lang="de-DE" sz="1400" dirty="0"/>
-              <a:t>Alle erlernten Schritte anwenden</a:t>
-            </a:r>
-          </a:p>
-          <a:p>
-            <a:pPr marL="285750" indent="-285750">
-              <a:buFont typeface="Arial" panose="020B0604020202020204" pitchFamily="34" charset="0"/>
-              <a:buChar char="•"/>
-            </a:pPr>
-            <a:r>
-              <a:rPr lang="de-DE" sz="1400" dirty="0"/>
-              <a:t>Ergebnisse präsentieren &amp; diskutieren</a:t>
-            </a:r>
-            <a:endParaRPr lang="en-US" sz="1400" dirty="0">
-              <a:solidFill>
-                <a:schemeClr val="accent5">
-                  <a:lumMod val="75000"/>
-                </a:schemeClr>
-              </a:solidFill>
-            </a:endParaRPr>
-          </a:p>
-        </p:txBody>
-      </p:sp>
-      <p:sp>
-        <p:nvSpPr>
-          <p:cNvPr id="22" name="TextBox 21">
-            <a:extLst>
-              <a:ext uri="{FF2B5EF4-FFF2-40B4-BE49-F238E27FC236}">
-                <a16:creationId xmlns:a16="http://schemas.microsoft.com/office/drawing/2014/main" id="{B45A6950-109D-6924-5D77-32AA072B8DCF}"/>
-              </a:ext>
-            </a:extLst>
-          </p:cNvPr>
-          <p:cNvSpPr txBox="1"/>
-          <p:nvPr/>
-        </p:nvSpPr>
-        <p:spPr>
-          <a:xfrm>
-            <a:off x="2493169" y="272534"/>
-            <a:ext cx="6920462" cy="523220"/>
-          </a:xfrm>
-          <a:prstGeom prst="rect">
-            <a:avLst/>
-          </a:prstGeom>
-          <a:noFill/>
-        </p:spPr>
-        <p:txBody>
-          <a:bodyPr wrap="square">
-            <a:spAutoFit/>
-          </a:bodyPr>
-          <a:lstStyle/>
-          <a:p>
-            <a:r>
-              <a:rPr lang="en-US" sz="2800" b="1" dirty="0" err="1"/>
-              <a:t>Methodische</a:t>
-            </a:r>
-            <a:r>
-              <a:rPr lang="en-US" sz="2800" b="1" dirty="0"/>
-              <a:t> </a:t>
-            </a:r>
-            <a:r>
-              <a:rPr lang="en-US" sz="2800" b="1" dirty="0" err="1"/>
-              <a:t>Grundlagen</a:t>
-            </a:r>
-            <a:r>
-              <a:rPr lang="en-US" sz="2800" b="1" dirty="0"/>
-              <a:t> der </a:t>
-            </a:r>
-            <a:r>
-              <a:rPr lang="en-US" sz="2800" b="1" dirty="0" err="1"/>
-              <a:t>Datenanalyse</a:t>
-            </a:r>
-            <a:endParaRPr lang="LID4096" sz="2800" dirty="0"/>
-          </a:p>
-        </p:txBody>
-      </p:sp>
-    </p:spTree>
-    <p:extLst>
-      <p:ext uri="{BB962C8B-B14F-4D97-AF65-F5344CB8AC3E}">
-        <p14:creationId xmlns:p14="http://schemas.microsoft.com/office/powerpoint/2010/main" val="294054981"/>
-      </p:ext>
-    </p:extLst>
-  </p:cSld>
-  <p:clrMapOvr>
-    <a:masterClrMapping/>
-  </p:clrMapOvr>
-</p:sld>
-</file>
-
-<file path=ppt/slides/slide4.xml><?xml version="1.0" encoding="utf-8"?>
-<p:sld xmlns:a="http://schemas.openxmlformats.org/drawingml/2006/main" xmlns:r="http://schemas.openxmlformats.org/officeDocument/2006/relationships" xmlns:p="http://schemas.openxmlformats.org/presentationml/2006/main">
-  <p:cSld>
-    <p:spTree>
-      <p:nvGrpSpPr>
         <p:cNvPr id="1" name="">
           <a:extLst>
             <a:ext uri="{FF2B5EF4-FFF2-40B4-BE49-F238E27FC236}">
@@ -9521,6 +7632,2125 @@
 </p:sld>
 </file>
 
+<file path=ppt/slides/slide3.xml><?xml version="1.0" encoding="utf-8"?>
+<p:sld xmlns:a="http://schemas.openxmlformats.org/drawingml/2006/main" xmlns:r="http://schemas.openxmlformats.org/officeDocument/2006/relationships" xmlns:p="http://schemas.openxmlformats.org/presentationml/2006/main">
+  <p:cSld>
+    <p:spTree>
+      <p:nvGrpSpPr>
+        <p:cNvPr id="1" name=""/>
+        <p:cNvGrpSpPr/>
+        <p:nvPr/>
+      </p:nvGrpSpPr>
+      <p:grpSpPr>
+        <a:xfrm>
+          <a:off x="0" y="0"/>
+          <a:ext cx="0" cy="0"/>
+          <a:chOff x="0" y="0"/>
+          <a:chExt cx="0" cy="0"/>
+        </a:xfrm>
+      </p:grpSpPr>
+      <p:sp>
+        <p:nvSpPr>
+          <p:cNvPr id="18" name="TextBox 17">
+            <a:extLst>
+              <a:ext uri="{FF2B5EF4-FFF2-40B4-BE49-F238E27FC236}">
+                <a16:creationId xmlns:a16="http://schemas.microsoft.com/office/drawing/2014/main" id="{524F6DF1-AF8B-B5EC-EC2F-2A121854376C}"/>
+              </a:ext>
+            </a:extLst>
+          </p:cNvPr>
+          <p:cNvSpPr txBox="1"/>
+          <p:nvPr/>
+        </p:nvSpPr>
+        <p:spPr>
+          <a:xfrm>
+            <a:off x="358375" y="1490503"/>
+            <a:ext cx="6096680" cy="4247317"/>
+          </a:xfrm>
+          <a:prstGeom prst="rect">
+            <a:avLst/>
+          </a:prstGeom>
+          <a:noFill/>
+        </p:spPr>
+        <p:txBody>
+          <a:bodyPr wrap="square">
+            <a:spAutoFit/>
+          </a:bodyPr>
+          <a:lstStyle/>
+          <a:p>
+            <a:pPr>
+              <a:buNone/>
+            </a:pPr>
+            <a:r>
+              <a:rPr lang="de-DE" sz="1400" b="1" dirty="0">
+                <a:solidFill>
+                  <a:schemeClr val="accent5">
+                    <a:lumMod val="75000"/>
+                  </a:schemeClr>
+                </a:solidFill>
+              </a:rPr>
+              <a:t>Setup, Daten &amp; Datentypen</a:t>
+            </a:r>
+            <a:endParaRPr lang="de-DE" sz="1400" dirty="0">
+              <a:solidFill>
+                <a:schemeClr val="accent5">
+                  <a:lumMod val="75000"/>
+                </a:schemeClr>
+              </a:solidFill>
+            </a:endParaRPr>
+          </a:p>
+          <a:p>
+            <a:pPr marL="285750" indent="-285750">
+              <a:buFont typeface="Arial" panose="020B0604020202020204" pitchFamily="34" charset="0"/>
+              <a:buChar char="•"/>
+            </a:pPr>
+            <a:r>
+              <a:rPr lang="de-DE" sz="1400" dirty="0"/>
+              <a:t>Python, </a:t>
+            </a:r>
+            <a:r>
+              <a:rPr lang="de-DE" sz="1400" dirty="0" err="1"/>
+              <a:t>Jupyter</a:t>
+            </a:r>
+            <a:r>
+              <a:rPr lang="de-DE" sz="1400" dirty="0"/>
+              <a:t> Notebook, Bibliotheken installieren, </a:t>
+            </a:r>
+            <a:r>
+              <a:rPr lang="de-DE" sz="1400" dirty="0" err="1"/>
+              <a:t>VSCode</a:t>
+            </a:r>
+            <a:endParaRPr lang="de-DE" sz="1400" dirty="0"/>
+          </a:p>
+          <a:p>
+            <a:pPr marL="285750" indent="-285750">
+              <a:buFont typeface="Arial" panose="020B0604020202020204" pitchFamily="34" charset="0"/>
+              <a:buChar char="•"/>
+            </a:pPr>
+            <a:r>
+              <a:rPr lang="en-US" sz="1400" dirty="0" err="1"/>
+              <a:t>Arbeiten</a:t>
+            </a:r>
+            <a:r>
+              <a:rPr lang="en-US" sz="1400" dirty="0"/>
+              <a:t> </a:t>
+            </a:r>
+            <a:r>
+              <a:rPr lang="en-US" sz="1400" dirty="0" err="1"/>
+              <a:t>mit</a:t>
+            </a:r>
+            <a:r>
+              <a:rPr lang="en-US" sz="1400" dirty="0"/>
+              <a:t> </a:t>
+            </a:r>
+            <a:r>
+              <a:rPr lang="en-US" sz="1400" dirty="0" err="1"/>
+              <a:t>Jupyter</a:t>
+            </a:r>
+            <a:r>
+              <a:rPr lang="en-US" sz="1400" dirty="0"/>
+              <a:t> | </a:t>
+            </a:r>
+            <a:r>
+              <a:rPr lang="de-DE" sz="1400" dirty="0"/>
+              <a:t>Überblick über Datentypen </a:t>
+            </a:r>
+          </a:p>
+          <a:p>
+            <a:pPr marL="285750" indent="-285750">
+              <a:buFont typeface="Arial" panose="020B0604020202020204" pitchFamily="34" charset="0"/>
+              <a:buChar char="•"/>
+            </a:pPr>
+            <a:r>
+              <a:rPr lang="de-DE" sz="1400" dirty="0"/>
+              <a:t>Data | Information | Dataset</a:t>
+            </a:r>
+          </a:p>
+          <a:p>
+            <a:pPr>
+              <a:buFont typeface="Arial" panose="020B0604020202020204" pitchFamily="34" charset="0"/>
+              <a:buChar char="•"/>
+            </a:pPr>
+            <a:endParaRPr lang="de-DE" sz="1400" dirty="0"/>
+          </a:p>
+          <a:p>
+            <a:pPr>
+              <a:buNone/>
+            </a:pPr>
+            <a:r>
+              <a:rPr lang="de-DE" sz="1400" b="1" dirty="0">
+                <a:solidFill>
+                  <a:schemeClr val="accent5">
+                    <a:lumMod val="75000"/>
+                  </a:schemeClr>
+                </a:solidFill>
+              </a:rPr>
+              <a:t>Analyseziele &amp; KPIs definieren</a:t>
+            </a:r>
+            <a:endParaRPr lang="de-DE" sz="1400" dirty="0">
+              <a:solidFill>
+                <a:schemeClr val="accent5">
+                  <a:lumMod val="75000"/>
+                </a:schemeClr>
+              </a:solidFill>
+            </a:endParaRPr>
+          </a:p>
+          <a:p>
+            <a:pPr marL="285750" indent="-285750">
+              <a:buFont typeface="Arial" panose="020B0604020202020204" pitchFamily="34" charset="0"/>
+              <a:buChar char="•"/>
+            </a:pPr>
+            <a:r>
+              <a:rPr lang="de-DE" sz="1400" dirty="0"/>
+              <a:t>Analysefragen &amp; Ziele identifizieren</a:t>
+            </a:r>
+          </a:p>
+          <a:p>
+            <a:pPr marL="285750" indent="-285750">
+              <a:buFont typeface="Arial" panose="020B0604020202020204" pitchFamily="34" charset="0"/>
+              <a:buChar char="•"/>
+            </a:pPr>
+            <a:r>
+              <a:rPr lang="de-DE" sz="1400" dirty="0"/>
+              <a:t>KPIs mit Geschäftsentscheidungen verknüpfen</a:t>
+            </a:r>
+          </a:p>
+          <a:p>
+            <a:pPr>
+              <a:buFont typeface="Arial" panose="020B0604020202020204" pitchFamily="34" charset="0"/>
+              <a:buChar char="•"/>
+            </a:pPr>
+            <a:endParaRPr lang="de-DE" sz="1400" dirty="0"/>
+          </a:p>
+          <a:p>
+            <a:pPr>
+              <a:buNone/>
+            </a:pPr>
+            <a:r>
+              <a:rPr lang="de-DE" sz="1400" b="1" dirty="0">
+                <a:solidFill>
+                  <a:schemeClr val="accent5">
+                    <a:lumMod val="75000"/>
+                  </a:schemeClr>
+                </a:solidFill>
+              </a:rPr>
+              <a:t>Datenerhebung &amp; Datenqualität</a:t>
+            </a:r>
+            <a:endParaRPr lang="de-DE" sz="1400" dirty="0">
+              <a:solidFill>
+                <a:schemeClr val="accent5">
+                  <a:lumMod val="75000"/>
+                </a:schemeClr>
+              </a:solidFill>
+            </a:endParaRPr>
+          </a:p>
+          <a:p>
+            <a:pPr marL="285750" indent="-285750">
+              <a:buFont typeface="Arial" panose="020B0604020202020204" pitchFamily="34" charset="0"/>
+              <a:buChar char="•"/>
+            </a:pPr>
+            <a:r>
+              <a:rPr lang="de-DE" sz="1400" dirty="0"/>
+              <a:t>Daten sammeln: APIs, lokale Dateien, unstrukturierte Daten</a:t>
+            </a:r>
+          </a:p>
+          <a:p>
+            <a:pPr marL="285750" indent="-285750">
+              <a:buFont typeface="Arial" panose="020B0604020202020204" pitchFamily="34" charset="0"/>
+              <a:buChar char="•"/>
+            </a:pPr>
+            <a:r>
+              <a:rPr lang="de-DE" sz="1400" dirty="0"/>
+              <a:t>Vollständigkeit, Genauigkeit, Konsistenz prüfen</a:t>
+            </a:r>
+          </a:p>
+          <a:p>
+            <a:pPr marL="285750" indent="-285750">
+              <a:buFont typeface="Arial" panose="020B0604020202020204" pitchFamily="34" charset="0"/>
+              <a:buChar char="•"/>
+            </a:pPr>
+            <a:r>
+              <a:rPr lang="de-DE" sz="1400" dirty="0"/>
+              <a:t>Daten laden &amp; inspizieren</a:t>
+            </a:r>
+          </a:p>
+          <a:p>
+            <a:pPr marL="285750" indent="-285750">
+              <a:buFont typeface="Arial" panose="020B0604020202020204" pitchFamily="34" charset="0"/>
+              <a:buChar char="•"/>
+            </a:pPr>
+            <a:r>
+              <a:rPr lang="de-DE" sz="1400" dirty="0"/>
+              <a:t>Fehlende Werte, Duplikate, Format prüfen</a:t>
+            </a:r>
+          </a:p>
+          <a:p>
+            <a:pPr marL="285750" indent="-285750">
+              <a:buFont typeface="Arial" panose="020B0604020202020204" pitchFamily="34" charset="0"/>
+              <a:buChar char="•"/>
+            </a:pPr>
+            <a:endParaRPr lang="de-DE" sz="1400" dirty="0"/>
+          </a:p>
+          <a:p>
+            <a:pPr>
+              <a:buNone/>
+            </a:pPr>
+            <a:r>
+              <a:rPr lang="de-DE" sz="1400" b="1" dirty="0">
+                <a:solidFill>
+                  <a:schemeClr val="accent5">
+                    <a:lumMod val="75000"/>
+                  </a:schemeClr>
+                </a:solidFill>
+              </a:rPr>
+              <a:t>Datenbereinigung &amp; -vorbereitung</a:t>
+            </a:r>
+            <a:endParaRPr lang="de-DE" sz="1400" dirty="0">
+              <a:solidFill>
+                <a:schemeClr val="accent5">
+                  <a:lumMod val="75000"/>
+                </a:schemeClr>
+              </a:solidFill>
+            </a:endParaRPr>
+          </a:p>
+          <a:p>
+            <a:pPr marL="285750" indent="-285750">
+              <a:buFont typeface="Arial" panose="020B0604020202020204" pitchFamily="34" charset="0"/>
+              <a:buChar char="•"/>
+            </a:pPr>
+            <a:r>
+              <a:rPr lang="de-DE" sz="1400" dirty="0"/>
+              <a:t>Fehlende/falsche Werte korrigieren</a:t>
+            </a:r>
+          </a:p>
+          <a:p>
+            <a:pPr marL="285750" indent="-285750">
+              <a:buFont typeface="Arial" panose="020B0604020202020204" pitchFamily="34" charset="0"/>
+              <a:buChar char="•"/>
+            </a:pPr>
+            <a:r>
+              <a:rPr lang="de-DE" sz="1400" dirty="0"/>
+              <a:t>Formate standardisieren</a:t>
+            </a:r>
+          </a:p>
+          <a:p>
+            <a:pPr marL="285750" indent="-285750">
+              <a:buFont typeface="Arial" panose="020B0604020202020204" pitchFamily="34" charset="0"/>
+              <a:buChar char="•"/>
+            </a:pPr>
+            <a:r>
+              <a:rPr lang="de-DE" sz="1400" dirty="0"/>
+              <a:t>Variablen für Analyse transformieren</a:t>
+            </a:r>
+          </a:p>
+        </p:txBody>
+      </p:sp>
+      <p:sp>
+        <p:nvSpPr>
+          <p:cNvPr id="20" name="TextBox 19">
+            <a:extLst>
+              <a:ext uri="{FF2B5EF4-FFF2-40B4-BE49-F238E27FC236}">
+                <a16:creationId xmlns:a16="http://schemas.microsoft.com/office/drawing/2014/main" id="{88DBAAF1-C0D6-B182-1588-C698583090A2}"/>
+              </a:ext>
+            </a:extLst>
+          </p:cNvPr>
+          <p:cNvSpPr txBox="1"/>
+          <p:nvPr/>
+        </p:nvSpPr>
+        <p:spPr>
+          <a:xfrm>
+            <a:off x="5950910" y="1490503"/>
+            <a:ext cx="6096680" cy="4616648"/>
+          </a:xfrm>
+          <a:prstGeom prst="rect">
+            <a:avLst/>
+          </a:prstGeom>
+          <a:noFill/>
+        </p:spPr>
+        <p:txBody>
+          <a:bodyPr wrap="square">
+            <a:spAutoFit/>
+          </a:bodyPr>
+          <a:lstStyle/>
+          <a:p>
+            <a:pPr>
+              <a:buNone/>
+            </a:pPr>
+            <a:r>
+              <a:rPr lang="en-US" sz="1400" b="1" dirty="0" err="1">
+                <a:solidFill>
+                  <a:schemeClr val="accent5">
+                    <a:lumMod val="75000"/>
+                  </a:schemeClr>
+                </a:solidFill>
+              </a:rPr>
+              <a:t>Datenmodellierung</a:t>
+            </a:r>
+            <a:r>
+              <a:rPr lang="en-US" sz="1400" b="1" dirty="0">
+                <a:solidFill>
+                  <a:schemeClr val="accent5">
+                    <a:lumMod val="75000"/>
+                  </a:schemeClr>
+                </a:solidFill>
+              </a:rPr>
+              <a:t> &amp; Aggregation</a:t>
+            </a:r>
+            <a:endParaRPr lang="en-US" sz="1400" dirty="0">
+              <a:solidFill>
+                <a:schemeClr val="accent5">
+                  <a:lumMod val="75000"/>
+                </a:schemeClr>
+              </a:solidFill>
+            </a:endParaRPr>
+          </a:p>
+          <a:p>
+            <a:pPr marL="285750" indent="-285750">
+              <a:buFont typeface="Arial" panose="020B0604020202020204" pitchFamily="34" charset="0"/>
+              <a:buChar char="•"/>
+            </a:pPr>
+            <a:r>
+              <a:rPr lang="en-US" sz="1400" dirty="0"/>
+              <a:t>Daten in </a:t>
+            </a:r>
+            <a:r>
+              <a:rPr lang="en-US" sz="1400" dirty="0" err="1"/>
+              <a:t>Tabellen</a:t>
+            </a:r>
+            <a:r>
+              <a:rPr lang="en-US" sz="1400" dirty="0"/>
+              <a:t> &amp; </a:t>
+            </a:r>
+            <a:r>
+              <a:rPr lang="en-US" sz="1400" dirty="0" err="1"/>
+              <a:t>Beziehungen</a:t>
+            </a:r>
+            <a:r>
+              <a:rPr lang="en-US" sz="1400" dirty="0"/>
+              <a:t> </a:t>
+            </a:r>
+            <a:r>
+              <a:rPr lang="en-US" sz="1400" dirty="0" err="1"/>
+              <a:t>organisieren</a:t>
+            </a:r>
+            <a:endParaRPr lang="en-US" sz="1400" dirty="0"/>
+          </a:p>
+          <a:p>
+            <a:pPr marL="285750" indent="-285750">
+              <a:buFont typeface="Arial" panose="020B0604020202020204" pitchFamily="34" charset="0"/>
+              <a:buChar char="•"/>
+            </a:pPr>
+            <a:r>
+              <a:rPr lang="en-US" sz="1400" dirty="0"/>
+              <a:t>Feature Engineering &amp; </a:t>
+            </a:r>
+            <a:r>
+              <a:rPr lang="en-US" sz="1400" dirty="0" err="1"/>
+              <a:t>Aggregationen</a:t>
+            </a:r>
+            <a:r>
+              <a:rPr lang="en-US" sz="1400" dirty="0"/>
+              <a:t> </a:t>
+            </a:r>
+          </a:p>
+          <a:p>
+            <a:pPr>
+              <a:buFont typeface="Arial" panose="020B0604020202020204" pitchFamily="34" charset="0"/>
+              <a:buChar char="•"/>
+            </a:pPr>
+            <a:endParaRPr lang="en-US" sz="1400" dirty="0"/>
+          </a:p>
+          <a:p>
+            <a:r>
+              <a:rPr lang="en-US" sz="1400" b="1" dirty="0" err="1">
+                <a:solidFill>
+                  <a:schemeClr val="accent5">
+                    <a:lumMod val="75000"/>
+                  </a:schemeClr>
+                </a:solidFill>
+              </a:rPr>
+              <a:t>Deskriptive</a:t>
+            </a:r>
+            <a:r>
+              <a:rPr lang="en-US" sz="1400" b="1" dirty="0">
+                <a:solidFill>
+                  <a:schemeClr val="accent5">
+                    <a:lumMod val="75000"/>
+                  </a:schemeClr>
+                </a:solidFill>
+              </a:rPr>
+              <a:t> </a:t>
+            </a:r>
+            <a:r>
+              <a:rPr lang="en-US" sz="1400" b="1" dirty="0" err="1">
+                <a:solidFill>
+                  <a:schemeClr val="accent5">
+                    <a:lumMod val="75000"/>
+                  </a:schemeClr>
+                </a:solidFill>
+              </a:rPr>
+              <a:t>Statistik</a:t>
+            </a:r>
+            <a:r>
+              <a:rPr lang="en-US" sz="1400" b="1" dirty="0">
+                <a:solidFill>
+                  <a:schemeClr val="accent5">
+                    <a:lumMod val="75000"/>
+                  </a:schemeClr>
+                </a:solidFill>
+              </a:rPr>
+              <a:t> &amp; KPIs</a:t>
+            </a:r>
+            <a:endParaRPr lang="en-US" sz="1400" dirty="0">
+              <a:solidFill>
+                <a:schemeClr val="accent5">
+                  <a:lumMod val="75000"/>
+                </a:schemeClr>
+              </a:solidFill>
+            </a:endParaRPr>
+          </a:p>
+          <a:p>
+            <a:r>
+              <a:rPr lang="en-US" sz="1400" dirty="0" err="1"/>
+              <a:t>Mittelwert</a:t>
+            </a:r>
+            <a:r>
+              <a:rPr lang="en-US" sz="1400" dirty="0"/>
+              <a:t>, Median, Modus, </a:t>
+            </a:r>
+            <a:r>
+              <a:rPr lang="en-US" sz="1400" dirty="0" err="1"/>
+              <a:t>Standardabweichung</a:t>
+            </a:r>
+            <a:r>
+              <a:rPr lang="en-US" sz="1400" dirty="0"/>
+              <a:t>, </a:t>
+            </a:r>
+            <a:r>
+              <a:rPr lang="en-US" sz="1400" dirty="0" err="1"/>
+              <a:t>Spannweite</a:t>
+            </a:r>
+            <a:endParaRPr lang="en-US" sz="1400" dirty="0"/>
+          </a:p>
+          <a:p>
+            <a:r>
+              <a:rPr lang="en-US" sz="1400" dirty="0" err="1"/>
+              <a:t>Korrelationen</a:t>
+            </a:r>
+            <a:r>
+              <a:rPr lang="en-US" sz="1400" dirty="0"/>
+              <a:t> &amp; </a:t>
+            </a:r>
+            <a:r>
+              <a:rPr lang="en-US" sz="1400" dirty="0" err="1"/>
+              <a:t>Kreuztabellen</a:t>
+            </a:r>
+            <a:endParaRPr lang="en-US" sz="1400" dirty="0"/>
+          </a:p>
+          <a:p>
+            <a:endParaRPr lang="en-US" sz="1400" dirty="0"/>
+          </a:p>
+          <a:p>
+            <a:pPr>
+              <a:buNone/>
+            </a:pPr>
+            <a:r>
+              <a:rPr lang="en-US" sz="1400" b="1" dirty="0" err="1">
+                <a:solidFill>
+                  <a:schemeClr val="accent5">
+                    <a:lumMod val="75000"/>
+                  </a:schemeClr>
+                </a:solidFill>
+              </a:rPr>
+              <a:t>Datenvisualisierung</a:t>
+            </a:r>
+            <a:endParaRPr lang="en-US" sz="1400" dirty="0">
+              <a:solidFill>
+                <a:schemeClr val="accent5">
+                  <a:lumMod val="75000"/>
+                </a:schemeClr>
+              </a:solidFill>
+            </a:endParaRPr>
+          </a:p>
+          <a:p>
+            <a:pPr marL="285750" indent="-285750">
+              <a:buFont typeface="Arial" panose="020B0604020202020204" pitchFamily="34" charset="0"/>
+              <a:buChar char="•"/>
+            </a:pPr>
+            <a:r>
+              <a:rPr lang="en-US" sz="1400" dirty="0" err="1"/>
+              <a:t>Klassische</a:t>
+            </a:r>
+            <a:r>
+              <a:rPr lang="en-US" sz="1400" dirty="0"/>
+              <a:t> </a:t>
+            </a:r>
+            <a:r>
+              <a:rPr lang="en-US" sz="1400" dirty="0" err="1"/>
+              <a:t>Diagramme</a:t>
+            </a:r>
+            <a:r>
+              <a:rPr lang="en-US" sz="1400" dirty="0"/>
+              <a:t>; </a:t>
+            </a:r>
+            <a:r>
+              <a:rPr lang="en-US" sz="1400" dirty="0" err="1"/>
+              <a:t>Balkendiagramm</a:t>
+            </a:r>
+            <a:r>
+              <a:rPr lang="en-US" sz="1400" dirty="0"/>
+              <a:t>, </a:t>
+            </a:r>
+            <a:r>
+              <a:rPr lang="en-US" sz="1400" dirty="0" err="1"/>
+              <a:t>Histogramm</a:t>
+            </a:r>
+            <a:r>
+              <a:rPr lang="en-US" sz="1400" dirty="0"/>
+              <a:t>, Boxplot, </a:t>
+            </a:r>
+            <a:r>
+              <a:rPr lang="en-US" sz="1400" dirty="0" err="1"/>
+              <a:t>Liniendiagramm</a:t>
+            </a:r>
+            <a:r>
+              <a:rPr lang="en-US" sz="1400" dirty="0"/>
+              <a:t>, </a:t>
+            </a:r>
+            <a:r>
+              <a:rPr lang="en-US" sz="1400" dirty="0" err="1"/>
+              <a:t>Streudiagramm</a:t>
+            </a:r>
+            <a:endParaRPr lang="en-US" sz="1400" dirty="0"/>
+          </a:p>
+          <a:p>
+            <a:pPr marL="285750" indent="-285750">
+              <a:buFont typeface="Arial" panose="020B0604020202020204" pitchFamily="34" charset="0"/>
+              <a:buChar char="•"/>
+            </a:pPr>
+            <a:r>
+              <a:rPr lang="en-US" sz="1400" dirty="0" err="1"/>
+              <a:t>Interaktive</a:t>
+            </a:r>
+            <a:r>
+              <a:rPr lang="en-US" sz="1400" dirty="0"/>
+              <a:t> Charts</a:t>
+            </a:r>
+          </a:p>
+          <a:p>
+            <a:pPr>
+              <a:buFont typeface="Arial" panose="020B0604020202020204" pitchFamily="34" charset="0"/>
+              <a:buChar char="•"/>
+            </a:pPr>
+            <a:endParaRPr lang="en-US" sz="1400" dirty="0"/>
+          </a:p>
+          <a:p>
+            <a:pPr>
+              <a:buNone/>
+            </a:pPr>
+            <a:r>
+              <a:rPr lang="en-US" sz="1400" b="1" dirty="0">
+                <a:solidFill>
+                  <a:schemeClr val="accent5">
+                    <a:lumMod val="75000"/>
+                  </a:schemeClr>
+                </a:solidFill>
+              </a:rPr>
+              <a:t>Analytics-Workflow &amp; Integration</a:t>
+            </a:r>
+            <a:endParaRPr lang="en-US" sz="1400" dirty="0">
+              <a:solidFill>
+                <a:schemeClr val="accent5">
+                  <a:lumMod val="75000"/>
+                </a:schemeClr>
+              </a:solidFill>
+            </a:endParaRPr>
+          </a:p>
+          <a:p>
+            <a:pPr marL="285750" indent="-285750">
+              <a:buFont typeface="Arial" panose="020B0604020202020204" pitchFamily="34" charset="0"/>
+              <a:buChar char="•"/>
+            </a:pPr>
+            <a:r>
+              <a:rPr lang="en-US" sz="1400" dirty="0"/>
+              <a:t>Strukturierter Workflow</a:t>
+            </a:r>
+          </a:p>
+          <a:p>
+            <a:pPr marL="285750" indent="-285750">
+              <a:buFont typeface="Arial" panose="020B0604020202020204" pitchFamily="34" charset="0"/>
+              <a:buChar char="•"/>
+            </a:pPr>
+            <a:r>
+              <a:rPr lang="en-US" sz="1400" dirty="0"/>
+              <a:t>Mini-</a:t>
+            </a:r>
+            <a:r>
+              <a:rPr lang="en-US" sz="1400" dirty="0" err="1"/>
+              <a:t>Fallbeispiele</a:t>
+            </a:r>
+            <a:r>
+              <a:rPr lang="en-US" sz="1400" dirty="0"/>
+              <a:t> </a:t>
+            </a:r>
+            <a:r>
+              <a:rPr lang="en-US" sz="1400" dirty="0" err="1"/>
+              <a:t>mit</a:t>
+            </a:r>
+            <a:r>
+              <a:rPr lang="en-US" sz="1400" dirty="0"/>
+              <a:t> </a:t>
+            </a:r>
+            <a:r>
+              <a:rPr lang="en-US" sz="1400" dirty="0" err="1"/>
+              <a:t>allen</a:t>
+            </a:r>
+            <a:r>
+              <a:rPr lang="en-US" sz="1400" dirty="0"/>
+              <a:t> </a:t>
+            </a:r>
+            <a:r>
+              <a:rPr lang="en-US" sz="1400" dirty="0" err="1"/>
+              <a:t>vorherigen</a:t>
+            </a:r>
+            <a:r>
+              <a:rPr lang="en-US" sz="1400" dirty="0"/>
+              <a:t> </a:t>
+            </a:r>
+            <a:r>
+              <a:rPr lang="en-US" sz="1400" dirty="0" err="1"/>
+              <a:t>Schritten</a:t>
+            </a:r>
+            <a:endParaRPr lang="en-US" sz="1400" dirty="0"/>
+          </a:p>
+          <a:p>
+            <a:endParaRPr lang="en-US" sz="1400" dirty="0"/>
+          </a:p>
+          <a:p>
+            <a:pPr>
+              <a:buNone/>
+            </a:pPr>
+            <a:r>
+              <a:rPr lang="en-US" sz="1400" b="1" dirty="0">
+                <a:solidFill>
+                  <a:schemeClr val="accent5">
+                    <a:lumMod val="75000"/>
+                  </a:schemeClr>
+                </a:solidFill>
+              </a:rPr>
+              <a:t>Capstone End-to-End Projekt</a:t>
+            </a:r>
+          </a:p>
+          <a:p>
+            <a:pPr marL="285750" indent="-285750">
+              <a:buFont typeface="Arial" panose="020B0604020202020204" pitchFamily="34" charset="0"/>
+              <a:buChar char="•"/>
+            </a:pPr>
+            <a:r>
+              <a:rPr lang="de-DE" sz="1400" dirty="0"/>
+              <a:t>Vollständige Analyse von der Fragestellung bis zur Präsentation</a:t>
+            </a:r>
+          </a:p>
+          <a:p>
+            <a:pPr marL="285750" indent="-285750">
+              <a:buFont typeface="Arial" panose="020B0604020202020204" pitchFamily="34" charset="0"/>
+              <a:buChar char="•"/>
+            </a:pPr>
+            <a:r>
+              <a:rPr lang="de-DE" sz="1400" dirty="0"/>
+              <a:t>Alle erlernten Schritte anwenden</a:t>
+            </a:r>
+          </a:p>
+          <a:p>
+            <a:pPr marL="285750" indent="-285750">
+              <a:buFont typeface="Arial" panose="020B0604020202020204" pitchFamily="34" charset="0"/>
+              <a:buChar char="•"/>
+            </a:pPr>
+            <a:r>
+              <a:rPr lang="de-DE" sz="1400" dirty="0"/>
+              <a:t>Ergebnisse präsentieren &amp; diskutieren</a:t>
+            </a:r>
+            <a:endParaRPr lang="en-US" sz="1400" dirty="0">
+              <a:solidFill>
+                <a:schemeClr val="accent5">
+                  <a:lumMod val="75000"/>
+                </a:schemeClr>
+              </a:solidFill>
+            </a:endParaRPr>
+          </a:p>
+        </p:txBody>
+      </p:sp>
+      <p:sp>
+        <p:nvSpPr>
+          <p:cNvPr id="22" name="TextBox 21">
+            <a:extLst>
+              <a:ext uri="{FF2B5EF4-FFF2-40B4-BE49-F238E27FC236}">
+                <a16:creationId xmlns:a16="http://schemas.microsoft.com/office/drawing/2014/main" id="{B45A6950-109D-6924-5D77-32AA072B8DCF}"/>
+              </a:ext>
+            </a:extLst>
+          </p:cNvPr>
+          <p:cNvSpPr txBox="1"/>
+          <p:nvPr/>
+        </p:nvSpPr>
+        <p:spPr>
+          <a:xfrm>
+            <a:off x="2493169" y="272534"/>
+            <a:ext cx="6920462" cy="523220"/>
+          </a:xfrm>
+          <a:prstGeom prst="rect">
+            <a:avLst/>
+          </a:prstGeom>
+          <a:noFill/>
+        </p:spPr>
+        <p:txBody>
+          <a:bodyPr wrap="square">
+            <a:spAutoFit/>
+          </a:bodyPr>
+          <a:lstStyle/>
+          <a:p>
+            <a:r>
+              <a:rPr lang="en-US" sz="2800" b="1" dirty="0" err="1"/>
+              <a:t>Methodische</a:t>
+            </a:r>
+            <a:r>
+              <a:rPr lang="en-US" sz="2800" b="1" dirty="0"/>
+              <a:t> </a:t>
+            </a:r>
+            <a:r>
+              <a:rPr lang="en-US" sz="2800" b="1" dirty="0" err="1"/>
+              <a:t>Grundlagen</a:t>
+            </a:r>
+            <a:r>
+              <a:rPr lang="en-US" sz="2800" b="1" dirty="0"/>
+              <a:t> der </a:t>
+            </a:r>
+            <a:r>
+              <a:rPr lang="en-US" sz="2800" b="1" dirty="0" err="1"/>
+              <a:t>Datenanalyse</a:t>
+            </a:r>
+            <a:endParaRPr lang="LID4096" sz="2800" dirty="0"/>
+          </a:p>
+        </p:txBody>
+      </p:sp>
+    </p:spTree>
+    <p:extLst>
+      <p:ext uri="{BB962C8B-B14F-4D97-AF65-F5344CB8AC3E}">
+        <p14:creationId xmlns:p14="http://schemas.microsoft.com/office/powerpoint/2010/main" val="294054981"/>
+      </p:ext>
+    </p:extLst>
+  </p:cSld>
+  <p:clrMapOvr>
+    <a:masterClrMapping/>
+  </p:clrMapOvr>
+</p:sld>
+</file>
+
+<file path=ppt/slides/slide4.xml><?xml version="1.0" encoding="utf-8"?>
+<p:sld xmlns:a="http://schemas.openxmlformats.org/drawingml/2006/main" xmlns:r="http://schemas.openxmlformats.org/officeDocument/2006/relationships" xmlns:p="http://schemas.openxmlformats.org/presentationml/2006/main">
+  <p:cSld>
+    <p:spTree>
+      <p:nvGrpSpPr>
+        <p:cNvPr id="1" name="">
+          <a:extLst>
+            <a:ext uri="{FF2B5EF4-FFF2-40B4-BE49-F238E27FC236}">
+              <a16:creationId xmlns:a16="http://schemas.microsoft.com/office/drawing/2014/main" id="{E76156AC-30C4-2912-C852-F8A9E4A740A7}"/>
+            </a:ext>
+          </a:extLst>
+        </p:cNvPr>
+        <p:cNvGrpSpPr/>
+        <p:nvPr/>
+      </p:nvGrpSpPr>
+      <p:grpSpPr>
+        <a:xfrm>
+          <a:off x="0" y="0"/>
+          <a:ext cx="0" cy="0"/>
+          <a:chOff x="0" y="0"/>
+          <a:chExt cx="0" cy="0"/>
+        </a:xfrm>
+      </p:grpSpPr>
+      <p:sp>
+        <p:nvSpPr>
+          <p:cNvPr id="18" name="TextBox 17">
+            <a:extLst>
+              <a:ext uri="{FF2B5EF4-FFF2-40B4-BE49-F238E27FC236}">
+                <a16:creationId xmlns:a16="http://schemas.microsoft.com/office/drawing/2014/main" id="{7AE1D1E8-BB27-9F07-6D1A-519FABFBAFBE}"/>
+              </a:ext>
+            </a:extLst>
+          </p:cNvPr>
+          <p:cNvSpPr txBox="1"/>
+          <p:nvPr/>
+        </p:nvSpPr>
+        <p:spPr>
+          <a:xfrm>
+            <a:off x="358375" y="1490503"/>
+            <a:ext cx="6096680" cy="4247317"/>
+          </a:xfrm>
+          <a:prstGeom prst="rect">
+            <a:avLst/>
+          </a:prstGeom>
+          <a:noFill/>
+        </p:spPr>
+        <p:txBody>
+          <a:bodyPr wrap="square">
+            <a:spAutoFit/>
+          </a:bodyPr>
+          <a:lstStyle/>
+          <a:p>
+            <a:pPr>
+              <a:buNone/>
+            </a:pPr>
+            <a:r>
+              <a:rPr lang="de-DE" sz="1400" b="1" dirty="0">
+                <a:solidFill>
+                  <a:schemeClr val="accent6">
+                    <a:lumMod val="75000"/>
+                  </a:schemeClr>
+                </a:solidFill>
+              </a:rPr>
+              <a:t>Setup, Daten &amp; Datentypen</a:t>
+            </a:r>
+            <a:endParaRPr lang="de-DE" sz="1400" dirty="0">
+              <a:solidFill>
+                <a:schemeClr val="accent6">
+                  <a:lumMod val="75000"/>
+                </a:schemeClr>
+              </a:solidFill>
+            </a:endParaRPr>
+          </a:p>
+          <a:p>
+            <a:pPr marL="285750" indent="-285750">
+              <a:buFont typeface="Arial" panose="020B0604020202020204" pitchFamily="34" charset="0"/>
+              <a:buChar char="•"/>
+            </a:pPr>
+            <a:r>
+              <a:rPr lang="de-DE" sz="1400" b="1" dirty="0">
+                <a:solidFill>
+                  <a:schemeClr val="accent6">
+                    <a:lumMod val="75000"/>
+                  </a:schemeClr>
+                </a:solidFill>
+              </a:rPr>
+              <a:t>Python, </a:t>
+            </a:r>
+            <a:r>
+              <a:rPr lang="de-DE" sz="1400" b="1" dirty="0" err="1">
+                <a:solidFill>
+                  <a:schemeClr val="accent6">
+                    <a:lumMod val="75000"/>
+                  </a:schemeClr>
+                </a:solidFill>
+              </a:rPr>
+              <a:t>Jupyter</a:t>
+            </a:r>
+            <a:r>
+              <a:rPr lang="de-DE" sz="1400" b="1" dirty="0">
+                <a:solidFill>
+                  <a:schemeClr val="accent6">
+                    <a:lumMod val="75000"/>
+                  </a:schemeClr>
+                </a:solidFill>
+              </a:rPr>
+              <a:t> Notebook, Bibliotheken installieren, </a:t>
+            </a:r>
+            <a:r>
+              <a:rPr lang="de-DE" sz="1400" b="1" dirty="0" err="1">
+                <a:solidFill>
+                  <a:schemeClr val="accent6">
+                    <a:lumMod val="75000"/>
+                  </a:schemeClr>
+                </a:solidFill>
+              </a:rPr>
+              <a:t>VSCode</a:t>
+            </a:r>
+            <a:endParaRPr lang="de-DE" sz="1400" b="1" dirty="0">
+              <a:solidFill>
+                <a:schemeClr val="accent6">
+                  <a:lumMod val="75000"/>
+                </a:schemeClr>
+              </a:solidFill>
+            </a:endParaRPr>
+          </a:p>
+          <a:p>
+            <a:pPr marL="285750" indent="-285750">
+              <a:buFont typeface="Arial" panose="020B0604020202020204" pitchFamily="34" charset="0"/>
+              <a:buChar char="•"/>
+            </a:pPr>
+            <a:r>
+              <a:rPr lang="en-US" sz="1400" b="1" dirty="0" err="1">
+                <a:solidFill>
+                  <a:schemeClr val="accent6">
+                    <a:lumMod val="75000"/>
+                  </a:schemeClr>
+                </a:solidFill>
+              </a:rPr>
+              <a:t>Arbeiten</a:t>
+            </a:r>
+            <a:r>
+              <a:rPr lang="en-US" sz="1400" b="1" dirty="0">
+                <a:solidFill>
+                  <a:schemeClr val="accent6">
+                    <a:lumMod val="75000"/>
+                  </a:schemeClr>
+                </a:solidFill>
+              </a:rPr>
+              <a:t> </a:t>
+            </a:r>
+            <a:r>
+              <a:rPr lang="en-US" sz="1400" b="1" dirty="0" err="1">
+                <a:solidFill>
+                  <a:schemeClr val="accent6">
+                    <a:lumMod val="75000"/>
+                  </a:schemeClr>
+                </a:solidFill>
+              </a:rPr>
+              <a:t>mit</a:t>
+            </a:r>
+            <a:r>
+              <a:rPr lang="en-US" sz="1400" b="1" dirty="0">
+                <a:solidFill>
+                  <a:schemeClr val="accent6">
+                    <a:lumMod val="75000"/>
+                  </a:schemeClr>
+                </a:solidFill>
+              </a:rPr>
+              <a:t> </a:t>
+            </a:r>
+            <a:r>
+              <a:rPr lang="en-US" sz="1400" b="1" dirty="0" err="1">
+                <a:solidFill>
+                  <a:schemeClr val="accent6">
+                    <a:lumMod val="75000"/>
+                  </a:schemeClr>
+                </a:solidFill>
+              </a:rPr>
+              <a:t>Jupyter</a:t>
+            </a:r>
+            <a:r>
+              <a:rPr lang="en-US" sz="1400" b="1" dirty="0">
+                <a:solidFill>
+                  <a:schemeClr val="accent6">
+                    <a:lumMod val="75000"/>
+                  </a:schemeClr>
+                </a:solidFill>
+              </a:rPr>
+              <a:t> | </a:t>
+            </a:r>
+            <a:r>
+              <a:rPr lang="de-DE" sz="1400" b="1" dirty="0">
+                <a:solidFill>
+                  <a:schemeClr val="accent6">
+                    <a:lumMod val="75000"/>
+                  </a:schemeClr>
+                </a:solidFill>
+              </a:rPr>
+              <a:t>Überblick über Datentypen </a:t>
+            </a:r>
+          </a:p>
+          <a:p>
+            <a:pPr marL="285750" indent="-285750">
+              <a:buFont typeface="Arial" panose="020B0604020202020204" pitchFamily="34" charset="0"/>
+              <a:buChar char="•"/>
+            </a:pPr>
+            <a:r>
+              <a:rPr lang="de-DE" sz="1400" b="1" dirty="0">
+                <a:solidFill>
+                  <a:schemeClr val="accent6">
+                    <a:lumMod val="75000"/>
+                  </a:schemeClr>
+                </a:solidFill>
+              </a:rPr>
+              <a:t>Data | Information | Dataset</a:t>
+            </a:r>
+          </a:p>
+          <a:p>
+            <a:pPr>
+              <a:buFont typeface="Arial" panose="020B0604020202020204" pitchFamily="34" charset="0"/>
+              <a:buChar char="•"/>
+            </a:pPr>
+            <a:endParaRPr lang="de-DE" sz="1400" dirty="0"/>
+          </a:p>
+          <a:p>
+            <a:pPr>
+              <a:buNone/>
+            </a:pPr>
+            <a:r>
+              <a:rPr lang="de-DE" sz="1600" b="1" dirty="0">
+                <a:solidFill>
+                  <a:srgbClr val="FF9933"/>
+                </a:solidFill>
+              </a:rPr>
+              <a:t>Analyseziele &amp; KPIs definieren</a:t>
+            </a:r>
+          </a:p>
+          <a:p>
+            <a:pPr marL="285750" indent="-285750">
+              <a:buFont typeface="Arial" panose="020B0604020202020204" pitchFamily="34" charset="0"/>
+              <a:buChar char="•"/>
+            </a:pPr>
+            <a:r>
+              <a:rPr lang="de-DE" sz="1400" b="1" dirty="0"/>
+              <a:t>Analysefragen &amp; Ziele identifizieren</a:t>
+            </a:r>
+          </a:p>
+          <a:p>
+            <a:pPr marL="285750" indent="-285750">
+              <a:buFont typeface="Arial" panose="020B0604020202020204" pitchFamily="34" charset="0"/>
+              <a:buChar char="•"/>
+            </a:pPr>
+            <a:r>
+              <a:rPr lang="de-DE" sz="1400" b="1" dirty="0"/>
+              <a:t>KPIs mit Geschäftsentscheidungen verknüpfen</a:t>
+            </a:r>
+          </a:p>
+          <a:p>
+            <a:pPr>
+              <a:buFont typeface="Arial" panose="020B0604020202020204" pitchFamily="34" charset="0"/>
+              <a:buChar char="•"/>
+            </a:pPr>
+            <a:endParaRPr lang="de-DE" sz="1400" dirty="0"/>
+          </a:p>
+          <a:p>
+            <a:pPr>
+              <a:buNone/>
+            </a:pPr>
+            <a:r>
+              <a:rPr lang="de-DE" sz="1400" b="1" dirty="0">
+                <a:solidFill>
+                  <a:schemeClr val="bg2">
+                    <a:lumMod val="50000"/>
+                  </a:schemeClr>
+                </a:solidFill>
+              </a:rPr>
+              <a:t>Datenerhebung &amp; Datenqualität</a:t>
+            </a:r>
+            <a:endParaRPr lang="de-DE" sz="1400" dirty="0">
+              <a:solidFill>
+                <a:schemeClr val="bg2">
+                  <a:lumMod val="50000"/>
+                </a:schemeClr>
+              </a:solidFill>
+            </a:endParaRPr>
+          </a:p>
+          <a:p>
+            <a:pPr marL="285750" indent="-285750">
+              <a:buFont typeface="Arial" panose="020B0604020202020204" pitchFamily="34" charset="0"/>
+              <a:buChar char="•"/>
+            </a:pPr>
+            <a:r>
+              <a:rPr lang="de-DE" sz="1400" dirty="0">
+                <a:solidFill>
+                  <a:schemeClr val="bg2">
+                    <a:lumMod val="50000"/>
+                  </a:schemeClr>
+                </a:solidFill>
+              </a:rPr>
+              <a:t>Daten sammeln: APIs, lokale Dateien, unstrukturierte Daten</a:t>
+            </a:r>
+          </a:p>
+          <a:p>
+            <a:pPr marL="285750" indent="-285750">
+              <a:buFont typeface="Arial" panose="020B0604020202020204" pitchFamily="34" charset="0"/>
+              <a:buChar char="•"/>
+            </a:pPr>
+            <a:r>
+              <a:rPr lang="de-DE" sz="1400" dirty="0">
+                <a:solidFill>
+                  <a:schemeClr val="bg2">
+                    <a:lumMod val="50000"/>
+                  </a:schemeClr>
+                </a:solidFill>
+              </a:rPr>
+              <a:t>Vollständigkeit, Genauigkeit, Konsistenz prüfen</a:t>
+            </a:r>
+          </a:p>
+          <a:p>
+            <a:pPr marL="285750" indent="-285750">
+              <a:buFont typeface="Arial" panose="020B0604020202020204" pitchFamily="34" charset="0"/>
+              <a:buChar char="•"/>
+            </a:pPr>
+            <a:r>
+              <a:rPr lang="de-DE" sz="1400" dirty="0">
+                <a:solidFill>
+                  <a:schemeClr val="bg2">
+                    <a:lumMod val="50000"/>
+                  </a:schemeClr>
+                </a:solidFill>
+              </a:rPr>
+              <a:t>Daten laden &amp; inspizieren</a:t>
+            </a:r>
+          </a:p>
+          <a:p>
+            <a:pPr marL="285750" indent="-285750">
+              <a:buFont typeface="Arial" panose="020B0604020202020204" pitchFamily="34" charset="0"/>
+              <a:buChar char="•"/>
+            </a:pPr>
+            <a:r>
+              <a:rPr lang="de-DE" sz="1400" dirty="0">
+                <a:solidFill>
+                  <a:schemeClr val="bg2">
+                    <a:lumMod val="50000"/>
+                  </a:schemeClr>
+                </a:solidFill>
+              </a:rPr>
+              <a:t>Fehlende Werte, Duplikate, Format prüfen</a:t>
+            </a:r>
+          </a:p>
+          <a:p>
+            <a:pPr marL="285750" indent="-285750">
+              <a:buFont typeface="Arial" panose="020B0604020202020204" pitchFamily="34" charset="0"/>
+              <a:buChar char="•"/>
+            </a:pPr>
+            <a:endParaRPr lang="de-DE" sz="1400" dirty="0">
+              <a:solidFill>
+                <a:schemeClr val="bg2">
+                  <a:lumMod val="50000"/>
+                </a:schemeClr>
+              </a:solidFill>
+            </a:endParaRPr>
+          </a:p>
+          <a:p>
+            <a:pPr>
+              <a:buNone/>
+            </a:pPr>
+            <a:r>
+              <a:rPr lang="de-DE" sz="1400" b="1" dirty="0">
+                <a:solidFill>
+                  <a:schemeClr val="bg2">
+                    <a:lumMod val="50000"/>
+                  </a:schemeClr>
+                </a:solidFill>
+              </a:rPr>
+              <a:t>Datenbereinigung &amp; -vorbereitung</a:t>
+            </a:r>
+            <a:endParaRPr lang="de-DE" sz="1400" dirty="0">
+              <a:solidFill>
+                <a:schemeClr val="bg2">
+                  <a:lumMod val="50000"/>
+                </a:schemeClr>
+              </a:solidFill>
+            </a:endParaRPr>
+          </a:p>
+          <a:p>
+            <a:pPr marL="285750" indent="-285750">
+              <a:buFont typeface="Arial" panose="020B0604020202020204" pitchFamily="34" charset="0"/>
+              <a:buChar char="•"/>
+            </a:pPr>
+            <a:r>
+              <a:rPr lang="de-DE" sz="1400" dirty="0">
+                <a:solidFill>
+                  <a:schemeClr val="bg2">
+                    <a:lumMod val="50000"/>
+                  </a:schemeClr>
+                </a:solidFill>
+              </a:rPr>
+              <a:t>Fehlende/falsche Werte korrigieren</a:t>
+            </a:r>
+          </a:p>
+          <a:p>
+            <a:pPr marL="285750" indent="-285750">
+              <a:buFont typeface="Arial" panose="020B0604020202020204" pitchFamily="34" charset="0"/>
+              <a:buChar char="•"/>
+            </a:pPr>
+            <a:r>
+              <a:rPr lang="de-DE" sz="1400" dirty="0">
+                <a:solidFill>
+                  <a:schemeClr val="bg2">
+                    <a:lumMod val="50000"/>
+                  </a:schemeClr>
+                </a:solidFill>
+              </a:rPr>
+              <a:t>Formate standardisieren</a:t>
+            </a:r>
+          </a:p>
+          <a:p>
+            <a:pPr marL="285750" indent="-285750">
+              <a:buFont typeface="Arial" panose="020B0604020202020204" pitchFamily="34" charset="0"/>
+              <a:buChar char="•"/>
+            </a:pPr>
+            <a:r>
+              <a:rPr lang="de-DE" sz="1400" dirty="0">
+                <a:solidFill>
+                  <a:schemeClr val="bg2">
+                    <a:lumMod val="50000"/>
+                  </a:schemeClr>
+                </a:solidFill>
+              </a:rPr>
+              <a:t>Variablen für Analyse transformieren</a:t>
+            </a:r>
+          </a:p>
+        </p:txBody>
+      </p:sp>
+      <p:sp>
+        <p:nvSpPr>
+          <p:cNvPr id="20" name="TextBox 19">
+            <a:extLst>
+              <a:ext uri="{FF2B5EF4-FFF2-40B4-BE49-F238E27FC236}">
+                <a16:creationId xmlns:a16="http://schemas.microsoft.com/office/drawing/2014/main" id="{6C8B5D11-0392-D029-394E-0E2E29F38FDB}"/>
+              </a:ext>
+            </a:extLst>
+          </p:cNvPr>
+          <p:cNvSpPr txBox="1"/>
+          <p:nvPr/>
+        </p:nvSpPr>
+        <p:spPr>
+          <a:xfrm>
+            <a:off x="5950910" y="1490503"/>
+            <a:ext cx="6096680" cy="4616648"/>
+          </a:xfrm>
+          <a:prstGeom prst="rect">
+            <a:avLst/>
+          </a:prstGeom>
+          <a:noFill/>
+        </p:spPr>
+        <p:txBody>
+          <a:bodyPr wrap="square">
+            <a:spAutoFit/>
+          </a:bodyPr>
+          <a:lstStyle/>
+          <a:p>
+            <a:pPr>
+              <a:buNone/>
+            </a:pPr>
+            <a:r>
+              <a:rPr lang="en-US" sz="1400" b="1" dirty="0" err="1">
+                <a:solidFill>
+                  <a:schemeClr val="bg2">
+                    <a:lumMod val="50000"/>
+                  </a:schemeClr>
+                </a:solidFill>
+              </a:rPr>
+              <a:t>Datenmodellierung</a:t>
+            </a:r>
+            <a:r>
+              <a:rPr lang="en-US" sz="1400" b="1" dirty="0">
+                <a:solidFill>
+                  <a:schemeClr val="bg2">
+                    <a:lumMod val="50000"/>
+                  </a:schemeClr>
+                </a:solidFill>
+              </a:rPr>
+              <a:t> &amp; Aggregation</a:t>
+            </a:r>
+            <a:endParaRPr lang="en-US" sz="1400" dirty="0">
+              <a:solidFill>
+                <a:schemeClr val="bg2">
+                  <a:lumMod val="50000"/>
+                </a:schemeClr>
+              </a:solidFill>
+            </a:endParaRPr>
+          </a:p>
+          <a:p>
+            <a:pPr marL="285750" indent="-285750">
+              <a:buFont typeface="Arial" panose="020B0604020202020204" pitchFamily="34" charset="0"/>
+              <a:buChar char="•"/>
+            </a:pPr>
+            <a:r>
+              <a:rPr lang="en-US" sz="1400" dirty="0">
+                <a:solidFill>
+                  <a:schemeClr val="bg2">
+                    <a:lumMod val="50000"/>
+                  </a:schemeClr>
+                </a:solidFill>
+              </a:rPr>
+              <a:t>Daten in </a:t>
+            </a:r>
+            <a:r>
+              <a:rPr lang="en-US" sz="1400" dirty="0" err="1">
+                <a:solidFill>
+                  <a:schemeClr val="bg2">
+                    <a:lumMod val="50000"/>
+                  </a:schemeClr>
+                </a:solidFill>
+              </a:rPr>
+              <a:t>Tabellen</a:t>
+            </a:r>
+            <a:r>
+              <a:rPr lang="en-US" sz="1400" dirty="0">
+                <a:solidFill>
+                  <a:schemeClr val="bg2">
+                    <a:lumMod val="50000"/>
+                  </a:schemeClr>
+                </a:solidFill>
+              </a:rPr>
+              <a:t> &amp; </a:t>
+            </a:r>
+            <a:r>
+              <a:rPr lang="en-US" sz="1400" dirty="0" err="1">
+                <a:solidFill>
+                  <a:schemeClr val="bg2">
+                    <a:lumMod val="50000"/>
+                  </a:schemeClr>
+                </a:solidFill>
+              </a:rPr>
+              <a:t>Beziehungen</a:t>
+            </a:r>
+            <a:r>
+              <a:rPr lang="en-US" sz="1400" dirty="0">
+                <a:solidFill>
+                  <a:schemeClr val="bg2">
+                    <a:lumMod val="50000"/>
+                  </a:schemeClr>
+                </a:solidFill>
+              </a:rPr>
+              <a:t> </a:t>
+            </a:r>
+            <a:r>
+              <a:rPr lang="en-US" sz="1400" dirty="0" err="1">
+                <a:solidFill>
+                  <a:schemeClr val="bg2">
+                    <a:lumMod val="50000"/>
+                  </a:schemeClr>
+                </a:solidFill>
+              </a:rPr>
+              <a:t>organisieren</a:t>
+            </a:r>
+            <a:endParaRPr lang="en-US" sz="1400" dirty="0">
+              <a:solidFill>
+                <a:schemeClr val="bg2">
+                  <a:lumMod val="50000"/>
+                </a:schemeClr>
+              </a:solidFill>
+            </a:endParaRPr>
+          </a:p>
+          <a:p>
+            <a:pPr marL="285750" indent="-285750">
+              <a:buFont typeface="Arial" panose="020B0604020202020204" pitchFamily="34" charset="0"/>
+              <a:buChar char="•"/>
+            </a:pPr>
+            <a:r>
+              <a:rPr lang="en-US" sz="1400" dirty="0">
+                <a:solidFill>
+                  <a:schemeClr val="bg2">
+                    <a:lumMod val="50000"/>
+                  </a:schemeClr>
+                </a:solidFill>
+              </a:rPr>
+              <a:t>Feature Engineering &amp; </a:t>
+            </a:r>
+            <a:r>
+              <a:rPr lang="en-US" sz="1400" dirty="0" err="1">
+                <a:solidFill>
+                  <a:schemeClr val="bg2">
+                    <a:lumMod val="50000"/>
+                  </a:schemeClr>
+                </a:solidFill>
+              </a:rPr>
+              <a:t>Aggregationen</a:t>
+            </a:r>
+            <a:r>
+              <a:rPr lang="en-US" sz="1400" dirty="0">
+                <a:solidFill>
+                  <a:schemeClr val="bg2">
+                    <a:lumMod val="50000"/>
+                  </a:schemeClr>
+                </a:solidFill>
+              </a:rPr>
+              <a:t> </a:t>
+            </a:r>
+          </a:p>
+          <a:p>
+            <a:pPr>
+              <a:buFont typeface="Arial" panose="020B0604020202020204" pitchFamily="34" charset="0"/>
+              <a:buChar char="•"/>
+            </a:pPr>
+            <a:endParaRPr lang="en-US" sz="1400" dirty="0">
+              <a:solidFill>
+                <a:schemeClr val="bg2">
+                  <a:lumMod val="50000"/>
+                </a:schemeClr>
+              </a:solidFill>
+            </a:endParaRPr>
+          </a:p>
+          <a:p>
+            <a:r>
+              <a:rPr lang="en-US" sz="1400" b="1" dirty="0" err="1">
+                <a:solidFill>
+                  <a:schemeClr val="bg2">
+                    <a:lumMod val="50000"/>
+                  </a:schemeClr>
+                </a:solidFill>
+              </a:rPr>
+              <a:t>Deskriptive</a:t>
+            </a:r>
+            <a:r>
+              <a:rPr lang="en-US" sz="1400" b="1" dirty="0">
+                <a:solidFill>
+                  <a:schemeClr val="bg2">
+                    <a:lumMod val="50000"/>
+                  </a:schemeClr>
+                </a:solidFill>
+              </a:rPr>
+              <a:t> </a:t>
+            </a:r>
+            <a:r>
+              <a:rPr lang="en-US" sz="1400" b="1" dirty="0" err="1">
+                <a:solidFill>
+                  <a:schemeClr val="bg2">
+                    <a:lumMod val="50000"/>
+                  </a:schemeClr>
+                </a:solidFill>
+              </a:rPr>
+              <a:t>Statistik</a:t>
+            </a:r>
+            <a:r>
+              <a:rPr lang="en-US" sz="1400" b="1" dirty="0">
+                <a:solidFill>
+                  <a:schemeClr val="bg2">
+                    <a:lumMod val="50000"/>
+                  </a:schemeClr>
+                </a:solidFill>
+              </a:rPr>
+              <a:t> &amp; KPIs</a:t>
+            </a:r>
+            <a:endParaRPr lang="en-US" sz="1400" dirty="0">
+              <a:solidFill>
+                <a:schemeClr val="bg2">
+                  <a:lumMod val="50000"/>
+                </a:schemeClr>
+              </a:solidFill>
+            </a:endParaRPr>
+          </a:p>
+          <a:p>
+            <a:r>
+              <a:rPr lang="en-US" sz="1400" dirty="0" err="1">
+                <a:solidFill>
+                  <a:schemeClr val="bg2">
+                    <a:lumMod val="50000"/>
+                  </a:schemeClr>
+                </a:solidFill>
+              </a:rPr>
+              <a:t>Mittelwert</a:t>
+            </a:r>
+            <a:r>
+              <a:rPr lang="en-US" sz="1400" dirty="0">
+                <a:solidFill>
+                  <a:schemeClr val="bg2">
+                    <a:lumMod val="50000"/>
+                  </a:schemeClr>
+                </a:solidFill>
+              </a:rPr>
+              <a:t>, Median, Modus, </a:t>
+            </a:r>
+            <a:r>
+              <a:rPr lang="en-US" sz="1400" dirty="0" err="1">
+                <a:solidFill>
+                  <a:schemeClr val="bg2">
+                    <a:lumMod val="50000"/>
+                  </a:schemeClr>
+                </a:solidFill>
+              </a:rPr>
+              <a:t>Standardabweichung</a:t>
+            </a:r>
+            <a:r>
+              <a:rPr lang="en-US" sz="1400" dirty="0">
+                <a:solidFill>
+                  <a:schemeClr val="bg2">
+                    <a:lumMod val="50000"/>
+                  </a:schemeClr>
+                </a:solidFill>
+              </a:rPr>
+              <a:t>, </a:t>
+            </a:r>
+            <a:r>
+              <a:rPr lang="en-US" sz="1400" dirty="0" err="1">
+                <a:solidFill>
+                  <a:schemeClr val="bg2">
+                    <a:lumMod val="50000"/>
+                  </a:schemeClr>
+                </a:solidFill>
+              </a:rPr>
+              <a:t>Spannweite</a:t>
+            </a:r>
+            <a:endParaRPr lang="en-US" sz="1400" dirty="0">
+              <a:solidFill>
+                <a:schemeClr val="bg2">
+                  <a:lumMod val="50000"/>
+                </a:schemeClr>
+              </a:solidFill>
+            </a:endParaRPr>
+          </a:p>
+          <a:p>
+            <a:r>
+              <a:rPr lang="en-US" sz="1400" dirty="0" err="1">
+                <a:solidFill>
+                  <a:schemeClr val="bg2">
+                    <a:lumMod val="50000"/>
+                  </a:schemeClr>
+                </a:solidFill>
+              </a:rPr>
+              <a:t>Korrelationen</a:t>
+            </a:r>
+            <a:r>
+              <a:rPr lang="en-US" sz="1400" dirty="0">
+                <a:solidFill>
+                  <a:schemeClr val="bg2">
+                    <a:lumMod val="50000"/>
+                  </a:schemeClr>
+                </a:solidFill>
+              </a:rPr>
+              <a:t> &amp; </a:t>
+            </a:r>
+            <a:r>
+              <a:rPr lang="en-US" sz="1400" dirty="0" err="1">
+                <a:solidFill>
+                  <a:schemeClr val="bg2">
+                    <a:lumMod val="50000"/>
+                  </a:schemeClr>
+                </a:solidFill>
+              </a:rPr>
+              <a:t>Kreuztabellen</a:t>
+            </a:r>
+            <a:endParaRPr lang="en-US" sz="1400" dirty="0">
+              <a:solidFill>
+                <a:schemeClr val="bg2">
+                  <a:lumMod val="50000"/>
+                </a:schemeClr>
+              </a:solidFill>
+            </a:endParaRPr>
+          </a:p>
+          <a:p>
+            <a:endParaRPr lang="en-US" sz="1400" dirty="0">
+              <a:solidFill>
+                <a:schemeClr val="bg2">
+                  <a:lumMod val="50000"/>
+                </a:schemeClr>
+              </a:solidFill>
+            </a:endParaRPr>
+          </a:p>
+          <a:p>
+            <a:pPr>
+              <a:buNone/>
+            </a:pPr>
+            <a:r>
+              <a:rPr lang="en-US" sz="1400" b="1" dirty="0" err="1">
+                <a:solidFill>
+                  <a:schemeClr val="bg2">
+                    <a:lumMod val="50000"/>
+                  </a:schemeClr>
+                </a:solidFill>
+              </a:rPr>
+              <a:t>Datenvisualisierung</a:t>
+            </a:r>
+            <a:endParaRPr lang="en-US" sz="1400" dirty="0">
+              <a:solidFill>
+                <a:schemeClr val="bg2">
+                  <a:lumMod val="50000"/>
+                </a:schemeClr>
+              </a:solidFill>
+            </a:endParaRPr>
+          </a:p>
+          <a:p>
+            <a:pPr marL="285750" indent="-285750">
+              <a:buFont typeface="Arial" panose="020B0604020202020204" pitchFamily="34" charset="0"/>
+              <a:buChar char="•"/>
+            </a:pPr>
+            <a:r>
+              <a:rPr lang="en-US" sz="1400" dirty="0" err="1">
+                <a:solidFill>
+                  <a:schemeClr val="bg2">
+                    <a:lumMod val="50000"/>
+                  </a:schemeClr>
+                </a:solidFill>
+              </a:rPr>
+              <a:t>Klassische</a:t>
+            </a:r>
+            <a:r>
+              <a:rPr lang="en-US" sz="1400" dirty="0">
+                <a:solidFill>
+                  <a:schemeClr val="bg2">
+                    <a:lumMod val="50000"/>
+                  </a:schemeClr>
+                </a:solidFill>
+              </a:rPr>
+              <a:t> </a:t>
+            </a:r>
+            <a:r>
+              <a:rPr lang="en-US" sz="1400" dirty="0" err="1">
+                <a:solidFill>
+                  <a:schemeClr val="bg2">
+                    <a:lumMod val="50000"/>
+                  </a:schemeClr>
+                </a:solidFill>
+              </a:rPr>
+              <a:t>Diagramme</a:t>
+            </a:r>
+            <a:r>
+              <a:rPr lang="en-US" sz="1400" dirty="0">
+                <a:solidFill>
+                  <a:schemeClr val="bg2">
+                    <a:lumMod val="50000"/>
+                  </a:schemeClr>
+                </a:solidFill>
+              </a:rPr>
+              <a:t>; </a:t>
+            </a:r>
+            <a:r>
+              <a:rPr lang="en-US" sz="1400" dirty="0" err="1">
+                <a:solidFill>
+                  <a:schemeClr val="bg2">
+                    <a:lumMod val="50000"/>
+                  </a:schemeClr>
+                </a:solidFill>
+              </a:rPr>
+              <a:t>Balkendiagramm</a:t>
+            </a:r>
+            <a:r>
+              <a:rPr lang="en-US" sz="1400" dirty="0">
+                <a:solidFill>
+                  <a:schemeClr val="bg2">
+                    <a:lumMod val="50000"/>
+                  </a:schemeClr>
+                </a:solidFill>
+              </a:rPr>
+              <a:t>, </a:t>
+            </a:r>
+            <a:r>
+              <a:rPr lang="en-US" sz="1400" dirty="0" err="1">
+                <a:solidFill>
+                  <a:schemeClr val="bg2">
+                    <a:lumMod val="50000"/>
+                  </a:schemeClr>
+                </a:solidFill>
+              </a:rPr>
+              <a:t>Histogramm</a:t>
+            </a:r>
+            <a:r>
+              <a:rPr lang="en-US" sz="1400" dirty="0">
+                <a:solidFill>
+                  <a:schemeClr val="bg2">
+                    <a:lumMod val="50000"/>
+                  </a:schemeClr>
+                </a:solidFill>
+              </a:rPr>
+              <a:t>, Boxplot, </a:t>
+            </a:r>
+            <a:r>
+              <a:rPr lang="en-US" sz="1400" dirty="0" err="1">
+                <a:solidFill>
+                  <a:schemeClr val="bg2">
+                    <a:lumMod val="50000"/>
+                  </a:schemeClr>
+                </a:solidFill>
+              </a:rPr>
+              <a:t>Liniendiagramm</a:t>
+            </a:r>
+            <a:r>
+              <a:rPr lang="en-US" sz="1400" dirty="0">
+                <a:solidFill>
+                  <a:schemeClr val="bg2">
+                    <a:lumMod val="50000"/>
+                  </a:schemeClr>
+                </a:solidFill>
+              </a:rPr>
+              <a:t>, </a:t>
+            </a:r>
+            <a:r>
+              <a:rPr lang="en-US" sz="1400" dirty="0" err="1">
+                <a:solidFill>
+                  <a:schemeClr val="bg2">
+                    <a:lumMod val="50000"/>
+                  </a:schemeClr>
+                </a:solidFill>
+              </a:rPr>
+              <a:t>Streudiagramm</a:t>
+            </a:r>
+            <a:endParaRPr lang="en-US" sz="1400" dirty="0">
+              <a:solidFill>
+                <a:schemeClr val="bg2">
+                  <a:lumMod val="50000"/>
+                </a:schemeClr>
+              </a:solidFill>
+            </a:endParaRPr>
+          </a:p>
+          <a:p>
+            <a:pPr marL="285750" indent="-285750">
+              <a:buFont typeface="Arial" panose="020B0604020202020204" pitchFamily="34" charset="0"/>
+              <a:buChar char="•"/>
+            </a:pPr>
+            <a:r>
+              <a:rPr lang="en-US" sz="1400" dirty="0" err="1">
+                <a:solidFill>
+                  <a:schemeClr val="bg2">
+                    <a:lumMod val="50000"/>
+                  </a:schemeClr>
+                </a:solidFill>
+              </a:rPr>
+              <a:t>Interaktive</a:t>
+            </a:r>
+            <a:r>
+              <a:rPr lang="en-US" sz="1400" dirty="0">
+                <a:solidFill>
+                  <a:schemeClr val="bg2">
+                    <a:lumMod val="50000"/>
+                  </a:schemeClr>
+                </a:solidFill>
+              </a:rPr>
+              <a:t> Charts</a:t>
+            </a:r>
+          </a:p>
+          <a:p>
+            <a:pPr>
+              <a:buFont typeface="Arial" panose="020B0604020202020204" pitchFamily="34" charset="0"/>
+              <a:buChar char="•"/>
+            </a:pPr>
+            <a:endParaRPr lang="en-US" sz="1400" dirty="0">
+              <a:solidFill>
+                <a:schemeClr val="bg2">
+                  <a:lumMod val="50000"/>
+                </a:schemeClr>
+              </a:solidFill>
+            </a:endParaRPr>
+          </a:p>
+          <a:p>
+            <a:pPr>
+              <a:buNone/>
+            </a:pPr>
+            <a:r>
+              <a:rPr lang="en-US" sz="1400" b="1" dirty="0">
+                <a:solidFill>
+                  <a:schemeClr val="bg2">
+                    <a:lumMod val="50000"/>
+                  </a:schemeClr>
+                </a:solidFill>
+              </a:rPr>
+              <a:t>Analytics-Workflow &amp; Integration</a:t>
+            </a:r>
+            <a:endParaRPr lang="en-US" sz="1400" dirty="0">
+              <a:solidFill>
+                <a:schemeClr val="bg2">
+                  <a:lumMod val="50000"/>
+                </a:schemeClr>
+              </a:solidFill>
+            </a:endParaRPr>
+          </a:p>
+          <a:p>
+            <a:pPr marL="285750" indent="-285750">
+              <a:buFont typeface="Arial" panose="020B0604020202020204" pitchFamily="34" charset="0"/>
+              <a:buChar char="•"/>
+            </a:pPr>
+            <a:r>
+              <a:rPr lang="en-US" sz="1400" dirty="0">
+                <a:solidFill>
+                  <a:schemeClr val="bg2">
+                    <a:lumMod val="50000"/>
+                  </a:schemeClr>
+                </a:solidFill>
+              </a:rPr>
+              <a:t>Strukturierter Workflow</a:t>
+            </a:r>
+          </a:p>
+          <a:p>
+            <a:pPr marL="285750" indent="-285750">
+              <a:buFont typeface="Arial" panose="020B0604020202020204" pitchFamily="34" charset="0"/>
+              <a:buChar char="•"/>
+            </a:pPr>
+            <a:r>
+              <a:rPr lang="en-US" sz="1400" dirty="0">
+                <a:solidFill>
+                  <a:schemeClr val="bg2">
+                    <a:lumMod val="50000"/>
+                  </a:schemeClr>
+                </a:solidFill>
+              </a:rPr>
+              <a:t>Mini-</a:t>
+            </a:r>
+            <a:r>
+              <a:rPr lang="en-US" sz="1400" dirty="0" err="1">
+                <a:solidFill>
+                  <a:schemeClr val="bg2">
+                    <a:lumMod val="50000"/>
+                  </a:schemeClr>
+                </a:solidFill>
+              </a:rPr>
+              <a:t>Fallbeispiele</a:t>
+            </a:r>
+            <a:r>
+              <a:rPr lang="en-US" sz="1400" dirty="0">
+                <a:solidFill>
+                  <a:schemeClr val="bg2">
+                    <a:lumMod val="50000"/>
+                  </a:schemeClr>
+                </a:solidFill>
+              </a:rPr>
+              <a:t> </a:t>
+            </a:r>
+            <a:r>
+              <a:rPr lang="en-US" sz="1400" dirty="0" err="1">
+                <a:solidFill>
+                  <a:schemeClr val="bg2">
+                    <a:lumMod val="50000"/>
+                  </a:schemeClr>
+                </a:solidFill>
+              </a:rPr>
+              <a:t>mit</a:t>
+            </a:r>
+            <a:r>
+              <a:rPr lang="en-US" sz="1400" dirty="0">
+                <a:solidFill>
+                  <a:schemeClr val="bg2">
+                    <a:lumMod val="50000"/>
+                  </a:schemeClr>
+                </a:solidFill>
+              </a:rPr>
+              <a:t> </a:t>
+            </a:r>
+            <a:r>
+              <a:rPr lang="en-US" sz="1400" dirty="0" err="1">
+                <a:solidFill>
+                  <a:schemeClr val="bg2">
+                    <a:lumMod val="50000"/>
+                  </a:schemeClr>
+                </a:solidFill>
+              </a:rPr>
+              <a:t>allen</a:t>
+            </a:r>
+            <a:r>
+              <a:rPr lang="en-US" sz="1400" dirty="0">
+                <a:solidFill>
+                  <a:schemeClr val="bg2">
+                    <a:lumMod val="50000"/>
+                  </a:schemeClr>
+                </a:solidFill>
+              </a:rPr>
+              <a:t> </a:t>
+            </a:r>
+            <a:r>
+              <a:rPr lang="en-US" sz="1400" dirty="0" err="1">
+                <a:solidFill>
+                  <a:schemeClr val="bg2">
+                    <a:lumMod val="50000"/>
+                  </a:schemeClr>
+                </a:solidFill>
+              </a:rPr>
+              <a:t>vorherigen</a:t>
+            </a:r>
+            <a:r>
+              <a:rPr lang="en-US" sz="1400" dirty="0">
+                <a:solidFill>
+                  <a:schemeClr val="bg2">
+                    <a:lumMod val="50000"/>
+                  </a:schemeClr>
+                </a:solidFill>
+              </a:rPr>
+              <a:t> </a:t>
+            </a:r>
+            <a:r>
+              <a:rPr lang="en-US" sz="1400" dirty="0" err="1">
+                <a:solidFill>
+                  <a:schemeClr val="bg2">
+                    <a:lumMod val="50000"/>
+                  </a:schemeClr>
+                </a:solidFill>
+              </a:rPr>
+              <a:t>Schritten</a:t>
+            </a:r>
+            <a:endParaRPr lang="en-US" sz="1400" dirty="0">
+              <a:solidFill>
+                <a:schemeClr val="bg2">
+                  <a:lumMod val="50000"/>
+                </a:schemeClr>
+              </a:solidFill>
+            </a:endParaRPr>
+          </a:p>
+          <a:p>
+            <a:endParaRPr lang="en-US" sz="1400" dirty="0">
+              <a:solidFill>
+                <a:schemeClr val="bg2">
+                  <a:lumMod val="50000"/>
+                </a:schemeClr>
+              </a:solidFill>
+            </a:endParaRPr>
+          </a:p>
+          <a:p>
+            <a:pPr>
+              <a:buNone/>
+            </a:pPr>
+            <a:r>
+              <a:rPr lang="en-US" sz="1400" b="1" dirty="0">
+                <a:solidFill>
+                  <a:schemeClr val="bg2">
+                    <a:lumMod val="50000"/>
+                  </a:schemeClr>
+                </a:solidFill>
+              </a:rPr>
+              <a:t>Capstone End-to-End Projekt</a:t>
+            </a:r>
+          </a:p>
+          <a:p>
+            <a:pPr marL="285750" indent="-285750">
+              <a:buFont typeface="Arial" panose="020B0604020202020204" pitchFamily="34" charset="0"/>
+              <a:buChar char="•"/>
+            </a:pPr>
+            <a:r>
+              <a:rPr lang="de-DE" sz="1400" dirty="0">
+                <a:solidFill>
+                  <a:schemeClr val="bg2">
+                    <a:lumMod val="50000"/>
+                  </a:schemeClr>
+                </a:solidFill>
+              </a:rPr>
+              <a:t>Vollständige Analyse von der Fragestellung bis zur Präsentation</a:t>
+            </a:r>
+          </a:p>
+          <a:p>
+            <a:pPr marL="285750" indent="-285750">
+              <a:buFont typeface="Arial" panose="020B0604020202020204" pitchFamily="34" charset="0"/>
+              <a:buChar char="•"/>
+            </a:pPr>
+            <a:r>
+              <a:rPr lang="de-DE" sz="1400" dirty="0">
+                <a:solidFill>
+                  <a:schemeClr val="bg2">
+                    <a:lumMod val="50000"/>
+                  </a:schemeClr>
+                </a:solidFill>
+              </a:rPr>
+              <a:t>Alle erlernten Schritte anwenden</a:t>
+            </a:r>
+          </a:p>
+          <a:p>
+            <a:pPr marL="285750" indent="-285750">
+              <a:buFont typeface="Arial" panose="020B0604020202020204" pitchFamily="34" charset="0"/>
+              <a:buChar char="•"/>
+            </a:pPr>
+            <a:r>
+              <a:rPr lang="de-DE" sz="1400" dirty="0">
+                <a:solidFill>
+                  <a:schemeClr val="bg2">
+                    <a:lumMod val="50000"/>
+                  </a:schemeClr>
+                </a:solidFill>
+              </a:rPr>
+              <a:t>Ergebnisse präsentieren &amp; diskutieren</a:t>
+            </a:r>
+            <a:endParaRPr lang="en-US" sz="1400" dirty="0">
+              <a:solidFill>
+                <a:schemeClr val="bg2">
+                  <a:lumMod val="50000"/>
+                </a:schemeClr>
+              </a:solidFill>
+            </a:endParaRPr>
+          </a:p>
+        </p:txBody>
+      </p:sp>
+      <p:sp>
+        <p:nvSpPr>
+          <p:cNvPr id="22" name="TextBox 21">
+            <a:extLst>
+              <a:ext uri="{FF2B5EF4-FFF2-40B4-BE49-F238E27FC236}">
+                <a16:creationId xmlns:a16="http://schemas.microsoft.com/office/drawing/2014/main" id="{0F11F9C1-4711-A265-C578-3AF4BAD66930}"/>
+              </a:ext>
+            </a:extLst>
+          </p:cNvPr>
+          <p:cNvSpPr txBox="1"/>
+          <p:nvPr/>
+        </p:nvSpPr>
+        <p:spPr>
+          <a:xfrm>
+            <a:off x="2493169" y="272534"/>
+            <a:ext cx="6920462" cy="523220"/>
+          </a:xfrm>
+          <a:prstGeom prst="rect">
+            <a:avLst/>
+          </a:prstGeom>
+          <a:noFill/>
+        </p:spPr>
+        <p:txBody>
+          <a:bodyPr wrap="square">
+            <a:spAutoFit/>
+          </a:bodyPr>
+          <a:lstStyle/>
+          <a:p>
+            <a:r>
+              <a:rPr lang="en-US" sz="2800" b="1" dirty="0" err="1"/>
+              <a:t>Methodische</a:t>
+            </a:r>
+            <a:r>
+              <a:rPr lang="en-US" sz="2800" b="1" dirty="0"/>
+              <a:t> </a:t>
+            </a:r>
+            <a:r>
+              <a:rPr lang="en-US" sz="2800" b="1" dirty="0" err="1"/>
+              <a:t>Grundlagen</a:t>
+            </a:r>
+            <a:r>
+              <a:rPr lang="en-US" sz="2800" b="1" dirty="0"/>
+              <a:t> der </a:t>
+            </a:r>
+            <a:r>
+              <a:rPr lang="en-US" sz="2800" b="1" dirty="0" err="1"/>
+              <a:t>Datenanalyse</a:t>
+            </a:r>
+            <a:endParaRPr lang="LID4096" sz="2800" dirty="0"/>
+          </a:p>
+        </p:txBody>
+      </p:sp>
+      <p:sp>
+        <p:nvSpPr>
+          <p:cNvPr id="2" name="Rectangle: Rounded Corners 1">
+            <a:extLst>
+              <a:ext uri="{FF2B5EF4-FFF2-40B4-BE49-F238E27FC236}">
+                <a16:creationId xmlns:a16="http://schemas.microsoft.com/office/drawing/2014/main" id="{DF27597A-65BE-0742-AA12-965AEC469016}"/>
+              </a:ext>
+            </a:extLst>
+          </p:cNvPr>
+          <p:cNvSpPr/>
+          <p:nvPr/>
+        </p:nvSpPr>
+        <p:spPr>
+          <a:xfrm>
+            <a:off x="358375" y="2451100"/>
+            <a:ext cx="4823225" cy="977900"/>
+          </a:xfrm>
+          <a:prstGeom prst="roundRect">
+            <a:avLst/>
+          </a:prstGeom>
+          <a:noFill/>
+          <a:ln w="3175">
+            <a:solidFill>
+              <a:schemeClr val="bg2">
+                <a:lumMod val="75000"/>
+              </a:schemeClr>
+            </a:solidFill>
+          </a:ln>
+        </p:spPr>
+        <p:style>
+          <a:lnRef idx="2">
+            <a:schemeClr val="accent1">
+              <a:shade val="15000"/>
+            </a:schemeClr>
+          </a:lnRef>
+          <a:fillRef idx="1">
+            <a:schemeClr val="accent1"/>
+          </a:fillRef>
+          <a:effectRef idx="0">
+            <a:schemeClr val="accent1"/>
+          </a:effectRef>
+          <a:fontRef idx="minor">
+            <a:schemeClr val="lt1"/>
+          </a:fontRef>
+        </p:style>
+        <p:txBody>
+          <a:bodyPr rtlCol="0" anchor="ctr"/>
+          <a:lstStyle/>
+          <a:p>
+            <a:pPr algn="ctr"/>
+            <a:endParaRPr lang="LID4096" dirty="0"/>
+          </a:p>
+        </p:txBody>
+      </p:sp>
+    </p:spTree>
+    <p:extLst>
+      <p:ext uri="{BB962C8B-B14F-4D97-AF65-F5344CB8AC3E}">
+        <p14:creationId xmlns:p14="http://schemas.microsoft.com/office/powerpoint/2010/main" val="3752529550"/>
+      </p:ext>
+    </p:extLst>
+  </p:cSld>
+  <p:clrMapOvr>
+    <a:masterClrMapping/>
+  </p:clrMapOvr>
+</p:sld>
+</file>
+
 <file path=ppt/slides/slide5.xml><?xml version="1.0" encoding="utf-8"?>
 <p:sld xmlns:a="http://schemas.openxmlformats.org/drawingml/2006/main" xmlns:r="http://schemas.openxmlformats.org/officeDocument/2006/relationships" xmlns:p="http://schemas.openxmlformats.org/presentationml/2006/main">
   <p:cSld>
@@ -10320,1313 +10550,6 @@
 </file>
 
 <file path=ppt/slides/slide6.xml><?xml version="1.0" encoding="utf-8"?>
-<p:sld xmlns:a="http://schemas.openxmlformats.org/drawingml/2006/main" xmlns:r="http://schemas.openxmlformats.org/officeDocument/2006/relationships" xmlns:p="http://schemas.openxmlformats.org/presentationml/2006/main">
-  <p:cSld>
-    <p:spTree>
-      <p:nvGrpSpPr>
-        <p:cNvPr id="1" name="">
-          <a:extLst>
-            <a:ext uri="{FF2B5EF4-FFF2-40B4-BE49-F238E27FC236}">
-              <a16:creationId xmlns:a16="http://schemas.microsoft.com/office/drawing/2014/main" id="{E76156AC-30C4-2912-C852-F8A9E4A740A7}"/>
-            </a:ext>
-          </a:extLst>
-        </p:cNvPr>
-        <p:cNvGrpSpPr/>
-        <p:nvPr/>
-      </p:nvGrpSpPr>
-      <p:grpSpPr>
-        <a:xfrm>
-          <a:off x="0" y="0"/>
-          <a:ext cx="0" cy="0"/>
-          <a:chOff x="0" y="0"/>
-          <a:chExt cx="0" cy="0"/>
-        </a:xfrm>
-      </p:grpSpPr>
-      <p:sp>
-        <p:nvSpPr>
-          <p:cNvPr id="18" name="TextBox 17">
-            <a:extLst>
-              <a:ext uri="{FF2B5EF4-FFF2-40B4-BE49-F238E27FC236}">
-                <a16:creationId xmlns:a16="http://schemas.microsoft.com/office/drawing/2014/main" id="{7AE1D1E8-BB27-9F07-6D1A-519FABFBAFBE}"/>
-              </a:ext>
-            </a:extLst>
-          </p:cNvPr>
-          <p:cNvSpPr txBox="1"/>
-          <p:nvPr/>
-        </p:nvSpPr>
-        <p:spPr>
-          <a:xfrm>
-            <a:off x="358375" y="1490503"/>
-            <a:ext cx="6096680" cy="4247317"/>
-          </a:xfrm>
-          <a:prstGeom prst="rect">
-            <a:avLst/>
-          </a:prstGeom>
-          <a:noFill/>
-        </p:spPr>
-        <p:txBody>
-          <a:bodyPr wrap="square">
-            <a:spAutoFit/>
-          </a:bodyPr>
-          <a:lstStyle/>
-          <a:p>
-            <a:pPr>
-              <a:buNone/>
-            </a:pPr>
-            <a:r>
-              <a:rPr lang="de-DE" sz="1400" b="1" dirty="0">
-                <a:solidFill>
-                  <a:schemeClr val="accent6">
-                    <a:lumMod val="75000"/>
-                  </a:schemeClr>
-                </a:solidFill>
-              </a:rPr>
-              <a:t>Setup, Daten &amp; Datentypen</a:t>
-            </a:r>
-            <a:endParaRPr lang="de-DE" sz="1400" dirty="0">
-              <a:solidFill>
-                <a:schemeClr val="accent6">
-                  <a:lumMod val="75000"/>
-                </a:schemeClr>
-              </a:solidFill>
-            </a:endParaRPr>
-          </a:p>
-          <a:p>
-            <a:pPr marL="285750" indent="-285750">
-              <a:buFont typeface="Arial" panose="020B0604020202020204" pitchFamily="34" charset="0"/>
-              <a:buChar char="•"/>
-            </a:pPr>
-            <a:r>
-              <a:rPr lang="de-DE" sz="1400" b="1" dirty="0">
-                <a:solidFill>
-                  <a:schemeClr val="accent6">
-                    <a:lumMod val="75000"/>
-                  </a:schemeClr>
-                </a:solidFill>
-              </a:rPr>
-              <a:t>Python, </a:t>
-            </a:r>
-            <a:r>
-              <a:rPr lang="de-DE" sz="1400" b="1" dirty="0" err="1">
-                <a:solidFill>
-                  <a:schemeClr val="accent6">
-                    <a:lumMod val="75000"/>
-                  </a:schemeClr>
-                </a:solidFill>
-              </a:rPr>
-              <a:t>Jupyter</a:t>
-            </a:r>
-            <a:r>
-              <a:rPr lang="de-DE" sz="1400" b="1" dirty="0">
-                <a:solidFill>
-                  <a:schemeClr val="accent6">
-                    <a:lumMod val="75000"/>
-                  </a:schemeClr>
-                </a:solidFill>
-              </a:rPr>
-              <a:t> Notebook, Bibliotheken installieren, </a:t>
-            </a:r>
-            <a:r>
-              <a:rPr lang="de-DE" sz="1400" b="1" dirty="0" err="1">
-                <a:solidFill>
-                  <a:schemeClr val="accent6">
-                    <a:lumMod val="75000"/>
-                  </a:schemeClr>
-                </a:solidFill>
-              </a:rPr>
-              <a:t>VSCode</a:t>
-            </a:r>
-            <a:endParaRPr lang="de-DE" sz="1400" b="1" dirty="0">
-              <a:solidFill>
-                <a:schemeClr val="accent6">
-                  <a:lumMod val="75000"/>
-                </a:schemeClr>
-              </a:solidFill>
-            </a:endParaRPr>
-          </a:p>
-          <a:p>
-            <a:pPr marL="285750" indent="-285750">
-              <a:buFont typeface="Arial" panose="020B0604020202020204" pitchFamily="34" charset="0"/>
-              <a:buChar char="•"/>
-            </a:pPr>
-            <a:r>
-              <a:rPr lang="en-US" sz="1400" b="1" dirty="0" err="1">
-                <a:solidFill>
-                  <a:schemeClr val="accent6">
-                    <a:lumMod val="75000"/>
-                  </a:schemeClr>
-                </a:solidFill>
-              </a:rPr>
-              <a:t>Arbeiten</a:t>
-            </a:r>
-            <a:r>
-              <a:rPr lang="en-US" sz="1400" b="1" dirty="0">
-                <a:solidFill>
-                  <a:schemeClr val="accent6">
-                    <a:lumMod val="75000"/>
-                  </a:schemeClr>
-                </a:solidFill>
-              </a:rPr>
-              <a:t> </a:t>
-            </a:r>
-            <a:r>
-              <a:rPr lang="en-US" sz="1400" b="1" dirty="0" err="1">
-                <a:solidFill>
-                  <a:schemeClr val="accent6">
-                    <a:lumMod val="75000"/>
-                  </a:schemeClr>
-                </a:solidFill>
-              </a:rPr>
-              <a:t>mit</a:t>
-            </a:r>
-            <a:r>
-              <a:rPr lang="en-US" sz="1400" b="1" dirty="0">
-                <a:solidFill>
-                  <a:schemeClr val="accent6">
-                    <a:lumMod val="75000"/>
-                  </a:schemeClr>
-                </a:solidFill>
-              </a:rPr>
-              <a:t> </a:t>
-            </a:r>
-            <a:r>
-              <a:rPr lang="en-US" sz="1400" b="1" dirty="0" err="1">
-                <a:solidFill>
-                  <a:schemeClr val="accent6">
-                    <a:lumMod val="75000"/>
-                  </a:schemeClr>
-                </a:solidFill>
-              </a:rPr>
-              <a:t>Jupyter</a:t>
-            </a:r>
-            <a:r>
-              <a:rPr lang="en-US" sz="1400" b="1" dirty="0">
-                <a:solidFill>
-                  <a:schemeClr val="accent6">
-                    <a:lumMod val="75000"/>
-                  </a:schemeClr>
-                </a:solidFill>
-              </a:rPr>
-              <a:t> | </a:t>
-            </a:r>
-            <a:r>
-              <a:rPr lang="de-DE" sz="1400" b="1" dirty="0">
-                <a:solidFill>
-                  <a:schemeClr val="accent6">
-                    <a:lumMod val="75000"/>
-                  </a:schemeClr>
-                </a:solidFill>
-              </a:rPr>
-              <a:t>Überblick über Datentypen </a:t>
-            </a:r>
-          </a:p>
-          <a:p>
-            <a:pPr marL="285750" indent="-285750">
-              <a:buFont typeface="Arial" panose="020B0604020202020204" pitchFamily="34" charset="0"/>
-              <a:buChar char="•"/>
-            </a:pPr>
-            <a:r>
-              <a:rPr lang="de-DE" sz="1400" b="1" dirty="0">
-                <a:solidFill>
-                  <a:schemeClr val="accent6">
-                    <a:lumMod val="75000"/>
-                  </a:schemeClr>
-                </a:solidFill>
-              </a:rPr>
-              <a:t>Data | Information | Dataset</a:t>
-            </a:r>
-          </a:p>
-          <a:p>
-            <a:pPr>
-              <a:buFont typeface="Arial" panose="020B0604020202020204" pitchFamily="34" charset="0"/>
-              <a:buChar char="•"/>
-            </a:pPr>
-            <a:endParaRPr lang="de-DE" sz="1400" dirty="0"/>
-          </a:p>
-          <a:p>
-            <a:pPr>
-              <a:buNone/>
-            </a:pPr>
-            <a:r>
-              <a:rPr lang="de-DE" sz="1600" b="1" dirty="0">
-                <a:solidFill>
-                  <a:srgbClr val="FF9933"/>
-                </a:solidFill>
-              </a:rPr>
-              <a:t>Analyseziele &amp; KPIs definieren</a:t>
-            </a:r>
-          </a:p>
-          <a:p>
-            <a:pPr marL="285750" indent="-285750">
-              <a:buFont typeface="Arial" panose="020B0604020202020204" pitchFamily="34" charset="0"/>
-              <a:buChar char="•"/>
-            </a:pPr>
-            <a:r>
-              <a:rPr lang="de-DE" sz="1400" b="1" dirty="0"/>
-              <a:t>Analysefragen &amp; Ziele identifizieren</a:t>
-            </a:r>
-          </a:p>
-          <a:p>
-            <a:pPr marL="285750" indent="-285750">
-              <a:buFont typeface="Arial" panose="020B0604020202020204" pitchFamily="34" charset="0"/>
-              <a:buChar char="•"/>
-            </a:pPr>
-            <a:r>
-              <a:rPr lang="de-DE" sz="1400" b="1" dirty="0"/>
-              <a:t>KPIs mit Geschäftsentscheidungen verknüpfen</a:t>
-            </a:r>
-          </a:p>
-          <a:p>
-            <a:pPr>
-              <a:buFont typeface="Arial" panose="020B0604020202020204" pitchFamily="34" charset="0"/>
-              <a:buChar char="•"/>
-            </a:pPr>
-            <a:endParaRPr lang="de-DE" sz="1400" dirty="0"/>
-          </a:p>
-          <a:p>
-            <a:pPr>
-              <a:buNone/>
-            </a:pPr>
-            <a:r>
-              <a:rPr lang="de-DE" sz="1400" b="1" dirty="0">
-                <a:solidFill>
-                  <a:schemeClr val="bg2">
-                    <a:lumMod val="50000"/>
-                  </a:schemeClr>
-                </a:solidFill>
-              </a:rPr>
-              <a:t>Datenerhebung &amp; Datenqualität</a:t>
-            </a:r>
-            <a:endParaRPr lang="de-DE" sz="1400" dirty="0">
-              <a:solidFill>
-                <a:schemeClr val="bg2">
-                  <a:lumMod val="50000"/>
-                </a:schemeClr>
-              </a:solidFill>
-            </a:endParaRPr>
-          </a:p>
-          <a:p>
-            <a:pPr marL="285750" indent="-285750">
-              <a:buFont typeface="Arial" panose="020B0604020202020204" pitchFamily="34" charset="0"/>
-              <a:buChar char="•"/>
-            </a:pPr>
-            <a:r>
-              <a:rPr lang="de-DE" sz="1400" dirty="0">
-                <a:solidFill>
-                  <a:schemeClr val="bg2">
-                    <a:lumMod val="50000"/>
-                  </a:schemeClr>
-                </a:solidFill>
-              </a:rPr>
-              <a:t>Daten sammeln: APIs, lokale Dateien, unstrukturierte Daten</a:t>
-            </a:r>
-          </a:p>
-          <a:p>
-            <a:pPr marL="285750" indent="-285750">
-              <a:buFont typeface="Arial" panose="020B0604020202020204" pitchFamily="34" charset="0"/>
-              <a:buChar char="•"/>
-            </a:pPr>
-            <a:r>
-              <a:rPr lang="de-DE" sz="1400" dirty="0">
-                <a:solidFill>
-                  <a:schemeClr val="bg2">
-                    <a:lumMod val="50000"/>
-                  </a:schemeClr>
-                </a:solidFill>
-              </a:rPr>
-              <a:t>Vollständigkeit, Genauigkeit, Konsistenz prüfen</a:t>
-            </a:r>
-          </a:p>
-          <a:p>
-            <a:pPr marL="285750" indent="-285750">
-              <a:buFont typeface="Arial" panose="020B0604020202020204" pitchFamily="34" charset="0"/>
-              <a:buChar char="•"/>
-            </a:pPr>
-            <a:r>
-              <a:rPr lang="de-DE" sz="1400" dirty="0">
-                <a:solidFill>
-                  <a:schemeClr val="bg2">
-                    <a:lumMod val="50000"/>
-                  </a:schemeClr>
-                </a:solidFill>
-              </a:rPr>
-              <a:t>Daten laden &amp; inspizieren</a:t>
-            </a:r>
-          </a:p>
-          <a:p>
-            <a:pPr marL="285750" indent="-285750">
-              <a:buFont typeface="Arial" panose="020B0604020202020204" pitchFamily="34" charset="0"/>
-              <a:buChar char="•"/>
-            </a:pPr>
-            <a:r>
-              <a:rPr lang="de-DE" sz="1400" dirty="0">
-                <a:solidFill>
-                  <a:schemeClr val="bg2">
-                    <a:lumMod val="50000"/>
-                  </a:schemeClr>
-                </a:solidFill>
-              </a:rPr>
-              <a:t>Fehlende Werte, Duplikate, Format prüfen</a:t>
-            </a:r>
-          </a:p>
-          <a:p>
-            <a:pPr marL="285750" indent="-285750">
-              <a:buFont typeface="Arial" panose="020B0604020202020204" pitchFamily="34" charset="0"/>
-              <a:buChar char="•"/>
-            </a:pPr>
-            <a:endParaRPr lang="de-DE" sz="1400" dirty="0">
-              <a:solidFill>
-                <a:schemeClr val="bg2">
-                  <a:lumMod val="50000"/>
-                </a:schemeClr>
-              </a:solidFill>
-            </a:endParaRPr>
-          </a:p>
-          <a:p>
-            <a:pPr>
-              <a:buNone/>
-            </a:pPr>
-            <a:r>
-              <a:rPr lang="de-DE" sz="1400" b="1" dirty="0">
-                <a:solidFill>
-                  <a:schemeClr val="bg2">
-                    <a:lumMod val="50000"/>
-                  </a:schemeClr>
-                </a:solidFill>
-              </a:rPr>
-              <a:t>Datenbereinigung &amp; -vorbereitung</a:t>
-            </a:r>
-            <a:endParaRPr lang="de-DE" sz="1400" dirty="0">
-              <a:solidFill>
-                <a:schemeClr val="bg2">
-                  <a:lumMod val="50000"/>
-                </a:schemeClr>
-              </a:solidFill>
-            </a:endParaRPr>
-          </a:p>
-          <a:p>
-            <a:pPr marL="285750" indent="-285750">
-              <a:buFont typeface="Arial" panose="020B0604020202020204" pitchFamily="34" charset="0"/>
-              <a:buChar char="•"/>
-            </a:pPr>
-            <a:r>
-              <a:rPr lang="de-DE" sz="1400" dirty="0">
-                <a:solidFill>
-                  <a:schemeClr val="bg2">
-                    <a:lumMod val="50000"/>
-                  </a:schemeClr>
-                </a:solidFill>
-              </a:rPr>
-              <a:t>Fehlende/falsche Werte korrigieren</a:t>
-            </a:r>
-          </a:p>
-          <a:p>
-            <a:pPr marL="285750" indent="-285750">
-              <a:buFont typeface="Arial" panose="020B0604020202020204" pitchFamily="34" charset="0"/>
-              <a:buChar char="•"/>
-            </a:pPr>
-            <a:r>
-              <a:rPr lang="de-DE" sz="1400" dirty="0">
-                <a:solidFill>
-                  <a:schemeClr val="bg2">
-                    <a:lumMod val="50000"/>
-                  </a:schemeClr>
-                </a:solidFill>
-              </a:rPr>
-              <a:t>Formate standardisieren</a:t>
-            </a:r>
-          </a:p>
-          <a:p>
-            <a:pPr marL="285750" indent="-285750">
-              <a:buFont typeface="Arial" panose="020B0604020202020204" pitchFamily="34" charset="0"/>
-              <a:buChar char="•"/>
-            </a:pPr>
-            <a:r>
-              <a:rPr lang="de-DE" sz="1400" dirty="0">
-                <a:solidFill>
-                  <a:schemeClr val="bg2">
-                    <a:lumMod val="50000"/>
-                  </a:schemeClr>
-                </a:solidFill>
-              </a:rPr>
-              <a:t>Variablen für Analyse transformieren</a:t>
-            </a:r>
-          </a:p>
-        </p:txBody>
-      </p:sp>
-      <p:sp>
-        <p:nvSpPr>
-          <p:cNvPr id="20" name="TextBox 19">
-            <a:extLst>
-              <a:ext uri="{FF2B5EF4-FFF2-40B4-BE49-F238E27FC236}">
-                <a16:creationId xmlns:a16="http://schemas.microsoft.com/office/drawing/2014/main" id="{6C8B5D11-0392-D029-394E-0E2E29F38FDB}"/>
-              </a:ext>
-            </a:extLst>
-          </p:cNvPr>
-          <p:cNvSpPr txBox="1"/>
-          <p:nvPr/>
-        </p:nvSpPr>
-        <p:spPr>
-          <a:xfrm>
-            <a:off x="5950910" y="1490503"/>
-            <a:ext cx="6096680" cy="4616648"/>
-          </a:xfrm>
-          <a:prstGeom prst="rect">
-            <a:avLst/>
-          </a:prstGeom>
-          <a:noFill/>
-        </p:spPr>
-        <p:txBody>
-          <a:bodyPr wrap="square">
-            <a:spAutoFit/>
-          </a:bodyPr>
-          <a:lstStyle/>
-          <a:p>
-            <a:pPr>
-              <a:buNone/>
-            </a:pPr>
-            <a:r>
-              <a:rPr lang="en-US" sz="1400" b="1" dirty="0" err="1">
-                <a:solidFill>
-                  <a:schemeClr val="bg2">
-                    <a:lumMod val="50000"/>
-                  </a:schemeClr>
-                </a:solidFill>
-              </a:rPr>
-              <a:t>Datenmodellierung</a:t>
-            </a:r>
-            <a:r>
-              <a:rPr lang="en-US" sz="1400" b="1" dirty="0">
-                <a:solidFill>
-                  <a:schemeClr val="bg2">
-                    <a:lumMod val="50000"/>
-                  </a:schemeClr>
-                </a:solidFill>
-              </a:rPr>
-              <a:t> &amp; Aggregation</a:t>
-            </a:r>
-            <a:endParaRPr lang="en-US" sz="1400" dirty="0">
-              <a:solidFill>
-                <a:schemeClr val="bg2">
-                  <a:lumMod val="50000"/>
-                </a:schemeClr>
-              </a:solidFill>
-            </a:endParaRPr>
-          </a:p>
-          <a:p>
-            <a:pPr marL="285750" indent="-285750">
-              <a:buFont typeface="Arial" panose="020B0604020202020204" pitchFamily="34" charset="0"/>
-              <a:buChar char="•"/>
-            </a:pPr>
-            <a:r>
-              <a:rPr lang="en-US" sz="1400" dirty="0">
-                <a:solidFill>
-                  <a:schemeClr val="bg2">
-                    <a:lumMod val="50000"/>
-                  </a:schemeClr>
-                </a:solidFill>
-              </a:rPr>
-              <a:t>Daten in </a:t>
-            </a:r>
-            <a:r>
-              <a:rPr lang="en-US" sz="1400" dirty="0" err="1">
-                <a:solidFill>
-                  <a:schemeClr val="bg2">
-                    <a:lumMod val="50000"/>
-                  </a:schemeClr>
-                </a:solidFill>
-              </a:rPr>
-              <a:t>Tabellen</a:t>
-            </a:r>
-            <a:r>
-              <a:rPr lang="en-US" sz="1400" dirty="0">
-                <a:solidFill>
-                  <a:schemeClr val="bg2">
-                    <a:lumMod val="50000"/>
-                  </a:schemeClr>
-                </a:solidFill>
-              </a:rPr>
-              <a:t> &amp; </a:t>
-            </a:r>
-            <a:r>
-              <a:rPr lang="en-US" sz="1400" dirty="0" err="1">
-                <a:solidFill>
-                  <a:schemeClr val="bg2">
-                    <a:lumMod val="50000"/>
-                  </a:schemeClr>
-                </a:solidFill>
-              </a:rPr>
-              <a:t>Beziehungen</a:t>
-            </a:r>
-            <a:r>
-              <a:rPr lang="en-US" sz="1400" dirty="0">
-                <a:solidFill>
-                  <a:schemeClr val="bg2">
-                    <a:lumMod val="50000"/>
-                  </a:schemeClr>
-                </a:solidFill>
-              </a:rPr>
-              <a:t> </a:t>
-            </a:r>
-            <a:r>
-              <a:rPr lang="en-US" sz="1400" dirty="0" err="1">
-                <a:solidFill>
-                  <a:schemeClr val="bg2">
-                    <a:lumMod val="50000"/>
-                  </a:schemeClr>
-                </a:solidFill>
-              </a:rPr>
-              <a:t>organisieren</a:t>
-            </a:r>
-            <a:endParaRPr lang="en-US" sz="1400" dirty="0">
-              <a:solidFill>
-                <a:schemeClr val="bg2">
-                  <a:lumMod val="50000"/>
-                </a:schemeClr>
-              </a:solidFill>
-            </a:endParaRPr>
-          </a:p>
-          <a:p>
-            <a:pPr marL="285750" indent="-285750">
-              <a:buFont typeface="Arial" panose="020B0604020202020204" pitchFamily="34" charset="0"/>
-              <a:buChar char="•"/>
-            </a:pPr>
-            <a:r>
-              <a:rPr lang="en-US" sz="1400" dirty="0">
-                <a:solidFill>
-                  <a:schemeClr val="bg2">
-                    <a:lumMod val="50000"/>
-                  </a:schemeClr>
-                </a:solidFill>
-              </a:rPr>
-              <a:t>Feature Engineering &amp; </a:t>
-            </a:r>
-            <a:r>
-              <a:rPr lang="en-US" sz="1400" dirty="0" err="1">
-                <a:solidFill>
-                  <a:schemeClr val="bg2">
-                    <a:lumMod val="50000"/>
-                  </a:schemeClr>
-                </a:solidFill>
-              </a:rPr>
-              <a:t>Aggregationen</a:t>
-            </a:r>
-            <a:r>
-              <a:rPr lang="en-US" sz="1400" dirty="0">
-                <a:solidFill>
-                  <a:schemeClr val="bg2">
-                    <a:lumMod val="50000"/>
-                  </a:schemeClr>
-                </a:solidFill>
-              </a:rPr>
-              <a:t> </a:t>
-            </a:r>
-          </a:p>
-          <a:p>
-            <a:pPr>
-              <a:buFont typeface="Arial" panose="020B0604020202020204" pitchFamily="34" charset="0"/>
-              <a:buChar char="•"/>
-            </a:pPr>
-            <a:endParaRPr lang="en-US" sz="1400" dirty="0">
-              <a:solidFill>
-                <a:schemeClr val="bg2">
-                  <a:lumMod val="50000"/>
-                </a:schemeClr>
-              </a:solidFill>
-            </a:endParaRPr>
-          </a:p>
-          <a:p>
-            <a:r>
-              <a:rPr lang="en-US" sz="1400" b="1" dirty="0" err="1">
-                <a:solidFill>
-                  <a:schemeClr val="bg2">
-                    <a:lumMod val="50000"/>
-                  </a:schemeClr>
-                </a:solidFill>
-              </a:rPr>
-              <a:t>Deskriptive</a:t>
-            </a:r>
-            <a:r>
-              <a:rPr lang="en-US" sz="1400" b="1" dirty="0">
-                <a:solidFill>
-                  <a:schemeClr val="bg2">
-                    <a:lumMod val="50000"/>
-                  </a:schemeClr>
-                </a:solidFill>
-              </a:rPr>
-              <a:t> </a:t>
-            </a:r>
-            <a:r>
-              <a:rPr lang="en-US" sz="1400" b="1" dirty="0" err="1">
-                <a:solidFill>
-                  <a:schemeClr val="bg2">
-                    <a:lumMod val="50000"/>
-                  </a:schemeClr>
-                </a:solidFill>
-              </a:rPr>
-              <a:t>Statistik</a:t>
-            </a:r>
-            <a:r>
-              <a:rPr lang="en-US" sz="1400" b="1" dirty="0">
-                <a:solidFill>
-                  <a:schemeClr val="bg2">
-                    <a:lumMod val="50000"/>
-                  </a:schemeClr>
-                </a:solidFill>
-              </a:rPr>
-              <a:t> &amp; KPIs</a:t>
-            </a:r>
-            <a:endParaRPr lang="en-US" sz="1400" dirty="0">
-              <a:solidFill>
-                <a:schemeClr val="bg2">
-                  <a:lumMod val="50000"/>
-                </a:schemeClr>
-              </a:solidFill>
-            </a:endParaRPr>
-          </a:p>
-          <a:p>
-            <a:r>
-              <a:rPr lang="en-US" sz="1400" dirty="0" err="1">
-                <a:solidFill>
-                  <a:schemeClr val="bg2">
-                    <a:lumMod val="50000"/>
-                  </a:schemeClr>
-                </a:solidFill>
-              </a:rPr>
-              <a:t>Mittelwert</a:t>
-            </a:r>
-            <a:r>
-              <a:rPr lang="en-US" sz="1400" dirty="0">
-                <a:solidFill>
-                  <a:schemeClr val="bg2">
-                    <a:lumMod val="50000"/>
-                  </a:schemeClr>
-                </a:solidFill>
-              </a:rPr>
-              <a:t>, Median, Modus, </a:t>
-            </a:r>
-            <a:r>
-              <a:rPr lang="en-US" sz="1400" dirty="0" err="1">
-                <a:solidFill>
-                  <a:schemeClr val="bg2">
-                    <a:lumMod val="50000"/>
-                  </a:schemeClr>
-                </a:solidFill>
-              </a:rPr>
-              <a:t>Standardabweichung</a:t>
-            </a:r>
-            <a:r>
-              <a:rPr lang="en-US" sz="1400" dirty="0">
-                <a:solidFill>
-                  <a:schemeClr val="bg2">
-                    <a:lumMod val="50000"/>
-                  </a:schemeClr>
-                </a:solidFill>
-              </a:rPr>
-              <a:t>, </a:t>
-            </a:r>
-            <a:r>
-              <a:rPr lang="en-US" sz="1400" dirty="0" err="1">
-                <a:solidFill>
-                  <a:schemeClr val="bg2">
-                    <a:lumMod val="50000"/>
-                  </a:schemeClr>
-                </a:solidFill>
-              </a:rPr>
-              <a:t>Spannweite</a:t>
-            </a:r>
-            <a:endParaRPr lang="en-US" sz="1400" dirty="0">
-              <a:solidFill>
-                <a:schemeClr val="bg2">
-                  <a:lumMod val="50000"/>
-                </a:schemeClr>
-              </a:solidFill>
-            </a:endParaRPr>
-          </a:p>
-          <a:p>
-            <a:r>
-              <a:rPr lang="en-US" sz="1400" dirty="0" err="1">
-                <a:solidFill>
-                  <a:schemeClr val="bg2">
-                    <a:lumMod val="50000"/>
-                  </a:schemeClr>
-                </a:solidFill>
-              </a:rPr>
-              <a:t>Korrelationen</a:t>
-            </a:r>
-            <a:r>
-              <a:rPr lang="en-US" sz="1400" dirty="0">
-                <a:solidFill>
-                  <a:schemeClr val="bg2">
-                    <a:lumMod val="50000"/>
-                  </a:schemeClr>
-                </a:solidFill>
-              </a:rPr>
-              <a:t> &amp; </a:t>
-            </a:r>
-            <a:r>
-              <a:rPr lang="en-US" sz="1400" dirty="0" err="1">
-                <a:solidFill>
-                  <a:schemeClr val="bg2">
-                    <a:lumMod val="50000"/>
-                  </a:schemeClr>
-                </a:solidFill>
-              </a:rPr>
-              <a:t>Kreuztabellen</a:t>
-            </a:r>
-            <a:endParaRPr lang="en-US" sz="1400" dirty="0">
-              <a:solidFill>
-                <a:schemeClr val="bg2">
-                  <a:lumMod val="50000"/>
-                </a:schemeClr>
-              </a:solidFill>
-            </a:endParaRPr>
-          </a:p>
-          <a:p>
-            <a:endParaRPr lang="en-US" sz="1400" dirty="0">
-              <a:solidFill>
-                <a:schemeClr val="bg2">
-                  <a:lumMod val="50000"/>
-                </a:schemeClr>
-              </a:solidFill>
-            </a:endParaRPr>
-          </a:p>
-          <a:p>
-            <a:pPr>
-              <a:buNone/>
-            </a:pPr>
-            <a:r>
-              <a:rPr lang="en-US" sz="1400" b="1" dirty="0" err="1">
-                <a:solidFill>
-                  <a:schemeClr val="bg2">
-                    <a:lumMod val="50000"/>
-                  </a:schemeClr>
-                </a:solidFill>
-              </a:rPr>
-              <a:t>Datenvisualisierung</a:t>
-            </a:r>
-            <a:endParaRPr lang="en-US" sz="1400" dirty="0">
-              <a:solidFill>
-                <a:schemeClr val="bg2">
-                  <a:lumMod val="50000"/>
-                </a:schemeClr>
-              </a:solidFill>
-            </a:endParaRPr>
-          </a:p>
-          <a:p>
-            <a:pPr marL="285750" indent="-285750">
-              <a:buFont typeface="Arial" panose="020B0604020202020204" pitchFamily="34" charset="0"/>
-              <a:buChar char="•"/>
-            </a:pPr>
-            <a:r>
-              <a:rPr lang="en-US" sz="1400" dirty="0" err="1">
-                <a:solidFill>
-                  <a:schemeClr val="bg2">
-                    <a:lumMod val="50000"/>
-                  </a:schemeClr>
-                </a:solidFill>
-              </a:rPr>
-              <a:t>Klassische</a:t>
-            </a:r>
-            <a:r>
-              <a:rPr lang="en-US" sz="1400" dirty="0">
-                <a:solidFill>
-                  <a:schemeClr val="bg2">
-                    <a:lumMod val="50000"/>
-                  </a:schemeClr>
-                </a:solidFill>
-              </a:rPr>
-              <a:t> </a:t>
-            </a:r>
-            <a:r>
-              <a:rPr lang="en-US" sz="1400" dirty="0" err="1">
-                <a:solidFill>
-                  <a:schemeClr val="bg2">
-                    <a:lumMod val="50000"/>
-                  </a:schemeClr>
-                </a:solidFill>
-              </a:rPr>
-              <a:t>Diagramme</a:t>
-            </a:r>
-            <a:r>
-              <a:rPr lang="en-US" sz="1400" dirty="0">
-                <a:solidFill>
-                  <a:schemeClr val="bg2">
-                    <a:lumMod val="50000"/>
-                  </a:schemeClr>
-                </a:solidFill>
-              </a:rPr>
-              <a:t>; </a:t>
-            </a:r>
-            <a:r>
-              <a:rPr lang="en-US" sz="1400" dirty="0" err="1">
-                <a:solidFill>
-                  <a:schemeClr val="bg2">
-                    <a:lumMod val="50000"/>
-                  </a:schemeClr>
-                </a:solidFill>
-              </a:rPr>
-              <a:t>Balkendiagramm</a:t>
-            </a:r>
-            <a:r>
-              <a:rPr lang="en-US" sz="1400" dirty="0">
-                <a:solidFill>
-                  <a:schemeClr val="bg2">
-                    <a:lumMod val="50000"/>
-                  </a:schemeClr>
-                </a:solidFill>
-              </a:rPr>
-              <a:t>, </a:t>
-            </a:r>
-            <a:r>
-              <a:rPr lang="en-US" sz="1400" dirty="0" err="1">
-                <a:solidFill>
-                  <a:schemeClr val="bg2">
-                    <a:lumMod val="50000"/>
-                  </a:schemeClr>
-                </a:solidFill>
-              </a:rPr>
-              <a:t>Histogramm</a:t>
-            </a:r>
-            <a:r>
-              <a:rPr lang="en-US" sz="1400" dirty="0">
-                <a:solidFill>
-                  <a:schemeClr val="bg2">
-                    <a:lumMod val="50000"/>
-                  </a:schemeClr>
-                </a:solidFill>
-              </a:rPr>
-              <a:t>, Boxplot, </a:t>
-            </a:r>
-            <a:r>
-              <a:rPr lang="en-US" sz="1400" dirty="0" err="1">
-                <a:solidFill>
-                  <a:schemeClr val="bg2">
-                    <a:lumMod val="50000"/>
-                  </a:schemeClr>
-                </a:solidFill>
-              </a:rPr>
-              <a:t>Liniendiagramm</a:t>
-            </a:r>
-            <a:r>
-              <a:rPr lang="en-US" sz="1400" dirty="0">
-                <a:solidFill>
-                  <a:schemeClr val="bg2">
-                    <a:lumMod val="50000"/>
-                  </a:schemeClr>
-                </a:solidFill>
-              </a:rPr>
-              <a:t>, </a:t>
-            </a:r>
-            <a:r>
-              <a:rPr lang="en-US" sz="1400" dirty="0" err="1">
-                <a:solidFill>
-                  <a:schemeClr val="bg2">
-                    <a:lumMod val="50000"/>
-                  </a:schemeClr>
-                </a:solidFill>
-              </a:rPr>
-              <a:t>Streudiagramm</a:t>
-            </a:r>
-            <a:endParaRPr lang="en-US" sz="1400" dirty="0">
-              <a:solidFill>
-                <a:schemeClr val="bg2">
-                  <a:lumMod val="50000"/>
-                </a:schemeClr>
-              </a:solidFill>
-            </a:endParaRPr>
-          </a:p>
-          <a:p>
-            <a:pPr marL="285750" indent="-285750">
-              <a:buFont typeface="Arial" panose="020B0604020202020204" pitchFamily="34" charset="0"/>
-              <a:buChar char="•"/>
-            </a:pPr>
-            <a:r>
-              <a:rPr lang="en-US" sz="1400" dirty="0" err="1">
-                <a:solidFill>
-                  <a:schemeClr val="bg2">
-                    <a:lumMod val="50000"/>
-                  </a:schemeClr>
-                </a:solidFill>
-              </a:rPr>
-              <a:t>Interaktive</a:t>
-            </a:r>
-            <a:r>
-              <a:rPr lang="en-US" sz="1400" dirty="0">
-                <a:solidFill>
-                  <a:schemeClr val="bg2">
-                    <a:lumMod val="50000"/>
-                  </a:schemeClr>
-                </a:solidFill>
-              </a:rPr>
-              <a:t> Charts</a:t>
-            </a:r>
-          </a:p>
-          <a:p>
-            <a:pPr>
-              <a:buFont typeface="Arial" panose="020B0604020202020204" pitchFamily="34" charset="0"/>
-              <a:buChar char="•"/>
-            </a:pPr>
-            <a:endParaRPr lang="en-US" sz="1400" dirty="0">
-              <a:solidFill>
-                <a:schemeClr val="bg2">
-                  <a:lumMod val="50000"/>
-                </a:schemeClr>
-              </a:solidFill>
-            </a:endParaRPr>
-          </a:p>
-          <a:p>
-            <a:pPr>
-              <a:buNone/>
-            </a:pPr>
-            <a:r>
-              <a:rPr lang="en-US" sz="1400" b="1" dirty="0">
-                <a:solidFill>
-                  <a:schemeClr val="bg2">
-                    <a:lumMod val="50000"/>
-                  </a:schemeClr>
-                </a:solidFill>
-              </a:rPr>
-              <a:t>Analytics-Workflow &amp; Integration</a:t>
-            </a:r>
-            <a:endParaRPr lang="en-US" sz="1400" dirty="0">
-              <a:solidFill>
-                <a:schemeClr val="bg2">
-                  <a:lumMod val="50000"/>
-                </a:schemeClr>
-              </a:solidFill>
-            </a:endParaRPr>
-          </a:p>
-          <a:p>
-            <a:pPr marL="285750" indent="-285750">
-              <a:buFont typeface="Arial" panose="020B0604020202020204" pitchFamily="34" charset="0"/>
-              <a:buChar char="•"/>
-            </a:pPr>
-            <a:r>
-              <a:rPr lang="en-US" sz="1400" dirty="0">
-                <a:solidFill>
-                  <a:schemeClr val="bg2">
-                    <a:lumMod val="50000"/>
-                  </a:schemeClr>
-                </a:solidFill>
-              </a:rPr>
-              <a:t>Strukturierter Workflow</a:t>
-            </a:r>
-          </a:p>
-          <a:p>
-            <a:pPr marL="285750" indent="-285750">
-              <a:buFont typeface="Arial" panose="020B0604020202020204" pitchFamily="34" charset="0"/>
-              <a:buChar char="•"/>
-            </a:pPr>
-            <a:r>
-              <a:rPr lang="en-US" sz="1400" dirty="0">
-                <a:solidFill>
-                  <a:schemeClr val="bg2">
-                    <a:lumMod val="50000"/>
-                  </a:schemeClr>
-                </a:solidFill>
-              </a:rPr>
-              <a:t>Mini-</a:t>
-            </a:r>
-            <a:r>
-              <a:rPr lang="en-US" sz="1400" dirty="0" err="1">
-                <a:solidFill>
-                  <a:schemeClr val="bg2">
-                    <a:lumMod val="50000"/>
-                  </a:schemeClr>
-                </a:solidFill>
-              </a:rPr>
-              <a:t>Fallbeispiele</a:t>
-            </a:r>
-            <a:r>
-              <a:rPr lang="en-US" sz="1400" dirty="0">
-                <a:solidFill>
-                  <a:schemeClr val="bg2">
-                    <a:lumMod val="50000"/>
-                  </a:schemeClr>
-                </a:solidFill>
-              </a:rPr>
-              <a:t> </a:t>
-            </a:r>
-            <a:r>
-              <a:rPr lang="en-US" sz="1400" dirty="0" err="1">
-                <a:solidFill>
-                  <a:schemeClr val="bg2">
-                    <a:lumMod val="50000"/>
-                  </a:schemeClr>
-                </a:solidFill>
-              </a:rPr>
-              <a:t>mit</a:t>
-            </a:r>
-            <a:r>
-              <a:rPr lang="en-US" sz="1400" dirty="0">
-                <a:solidFill>
-                  <a:schemeClr val="bg2">
-                    <a:lumMod val="50000"/>
-                  </a:schemeClr>
-                </a:solidFill>
-              </a:rPr>
-              <a:t> </a:t>
-            </a:r>
-            <a:r>
-              <a:rPr lang="en-US" sz="1400" dirty="0" err="1">
-                <a:solidFill>
-                  <a:schemeClr val="bg2">
-                    <a:lumMod val="50000"/>
-                  </a:schemeClr>
-                </a:solidFill>
-              </a:rPr>
-              <a:t>allen</a:t>
-            </a:r>
-            <a:r>
-              <a:rPr lang="en-US" sz="1400" dirty="0">
-                <a:solidFill>
-                  <a:schemeClr val="bg2">
-                    <a:lumMod val="50000"/>
-                  </a:schemeClr>
-                </a:solidFill>
-              </a:rPr>
-              <a:t> </a:t>
-            </a:r>
-            <a:r>
-              <a:rPr lang="en-US" sz="1400" dirty="0" err="1">
-                <a:solidFill>
-                  <a:schemeClr val="bg2">
-                    <a:lumMod val="50000"/>
-                  </a:schemeClr>
-                </a:solidFill>
-              </a:rPr>
-              <a:t>vorherigen</a:t>
-            </a:r>
-            <a:r>
-              <a:rPr lang="en-US" sz="1400" dirty="0">
-                <a:solidFill>
-                  <a:schemeClr val="bg2">
-                    <a:lumMod val="50000"/>
-                  </a:schemeClr>
-                </a:solidFill>
-              </a:rPr>
-              <a:t> </a:t>
-            </a:r>
-            <a:r>
-              <a:rPr lang="en-US" sz="1400" dirty="0" err="1">
-                <a:solidFill>
-                  <a:schemeClr val="bg2">
-                    <a:lumMod val="50000"/>
-                  </a:schemeClr>
-                </a:solidFill>
-              </a:rPr>
-              <a:t>Schritten</a:t>
-            </a:r>
-            <a:endParaRPr lang="en-US" sz="1400" dirty="0">
-              <a:solidFill>
-                <a:schemeClr val="bg2">
-                  <a:lumMod val="50000"/>
-                </a:schemeClr>
-              </a:solidFill>
-            </a:endParaRPr>
-          </a:p>
-          <a:p>
-            <a:endParaRPr lang="en-US" sz="1400" dirty="0">
-              <a:solidFill>
-                <a:schemeClr val="bg2">
-                  <a:lumMod val="50000"/>
-                </a:schemeClr>
-              </a:solidFill>
-            </a:endParaRPr>
-          </a:p>
-          <a:p>
-            <a:pPr>
-              <a:buNone/>
-            </a:pPr>
-            <a:r>
-              <a:rPr lang="en-US" sz="1400" b="1" dirty="0">
-                <a:solidFill>
-                  <a:schemeClr val="bg2">
-                    <a:lumMod val="50000"/>
-                  </a:schemeClr>
-                </a:solidFill>
-              </a:rPr>
-              <a:t>Capstone End-to-End Projekt</a:t>
-            </a:r>
-          </a:p>
-          <a:p>
-            <a:pPr marL="285750" indent="-285750">
-              <a:buFont typeface="Arial" panose="020B0604020202020204" pitchFamily="34" charset="0"/>
-              <a:buChar char="•"/>
-            </a:pPr>
-            <a:r>
-              <a:rPr lang="de-DE" sz="1400" dirty="0">
-                <a:solidFill>
-                  <a:schemeClr val="bg2">
-                    <a:lumMod val="50000"/>
-                  </a:schemeClr>
-                </a:solidFill>
-              </a:rPr>
-              <a:t>Vollständige Analyse von der Fragestellung bis zur Präsentation</a:t>
-            </a:r>
-          </a:p>
-          <a:p>
-            <a:pPr marL="285750" indent="-285750">
-              <a:buFont typeface="Arial" panose="020B0604020202020204" pitchFamily="34" charset="0"/>
-              <a:buChar char="•"/>
-            </a:pPr>
-            <a:r>
-              <a:rPr lang="de-DE" sz="1400" dirty="0">
-                <a:solidFill>
-                  <a:schemeClr val="bg2">
-                    <a:lumMod val="50000"/>
-                  </a:schemeClr>
-                </a:solidFill>
-              </a:rPr>
-              <a:t>Alle erlernten Schritte anwenden</a:t>
-            </a:r>
-          </a:p>
-          <a:p>
-            <a:pPr marL="285750" indent="-285750">
-              <a:buFont typeface="Arial" panose="020B0604020202020204" pitchFamily="34" charset="0"/>
-              <a:buChar char="•"/>
-            </a:pPr>
-            <a:r>
-              <a:rPr lang="de-DE" sz="1400" dirty="0">
-                <a:solidFill>
-                  <a:schemeClr val="bg2">
-                    <a:lumMod val="50000"/>
-                  </a:schemeClr>
-                </a:solidFill>
-              </a:rPr>
-              <a:t>Ergebnisse präsentieren &amp; diskutieren</a:t>
-            </a:r>
-            <a:endParaRPr lang="en-US" sz="1400" dirty="0">
-              <a:solidFill>
-                <a:schemeClr val="bg2">
-                  <a:lumMod val="50000"/>
-                </a:schemeClr>
-              </a:solidFill>
-            </a:endParaRPr>
-          </a:p>
-        </p:txBody>
-      </p:sp>
-      <p:sp>
-        <p:nvSpPr>
-          <p:cNvPr id="22" name="TextBox 21">
-            <a:extLst>
-              <a:ext uri="{FF2B5EF4-FFF2-40B4-BE49-F238E27FC236}">
-                <a16:creationId xmlns:a16="http://schemas.microsoft.com/office/drawing/2014/main" id="{0F11F9C1-4711-A265-C578-3AF4BAD66930}"/>
-              </a:ext>
-            </a:extLst>
-          </p:cNvPr>
-          <p:cNvSpPr txBox="1"/>
-          <p:nvPr/>
-        </p:nvSpPr>
-        <p:spPr>
-          <a:xfrm>
-            <a:off x="2493169" y="272534"/>
-            <a:ext cx="6920462" cy="523220"/>
-          </a:xfrm>
-          <a:prstGeom prst="rect">
-            <a:avLst/>
-          </a:prstGeom>
-          <a:noFill/>
-        </p:spPr>
-        <p:txBody>
-          <a:bodyPr wrap="square">
-            <a:spAutoFit/>
-          </a:bodyPr>
-          <a:lstStyle/>
-          <a:p>
-            <a:r>
-              <a:rPr lang="en-US" sz="2800" b="1" dirty="0" err="1"/>
-              <a:t>Methodische</a:t>
-            </a:r>
-            <a:r>
-              <a:rPr lang="en-US" sz="2800" b="1" dirty="0"/>
-              <a:t> </a:t>
-            </a:r>
-            <a:r>
-              <a:rPr lang="en-US" sz="2800" b="1" dirty="0" err="1"/>
-              <a:t>Grundlagen</a:t>
-            </a:r>
-            <a:r>
-              <a:rPr lang="en-US" sz="2800" b="1" dirty="0"/>
-              <a:t> der </a:t>
-            </a:r>
-            <a:r>
-              <a:rPr lang="en-US" sz="2800" b="1" dirty="0" err="1"/>
-              <a:t>Datenanalyse</a:t>
-            </a:r>
-            <a:endParaRPr lang="LID4096" sz="2800" dirty="0"/>
-          </a:p>
-        </p:txBody>
-      </p:sp>
-      <p:sp>
-        <p:nvSpPr>
-          <p:cNvPr id="2" name="Rectangle: Rounded Corners 1">
-            <a:extLst>
-              <a:ext uri="{FF2B5EF4-FFF2-40B4-BE49-F238E27FC236}">
-                <a16:creationId xmlns:a16="http://schemas.microsoft.com/office/drawing/2014/main" id="{DF27597A-65BE-0742-AA12-965AEC469016}"/>
-              </a:ext>
-            </a:extLst>
-          </p:cNvPr>
-          <p:cNvSpPr/>
-          <p:nvPr/>
-        </p:nvSpPr>
-        <p:spPr>
-          <a:xfrm>
-            <a:off x="358375" y="2451100"/>
-            <a:ext cx="4823225" cy="977900"/>
-          </a:xfrm>
-          <a:prstGeom prst="roundRect">
-            <a:avLst/>
-          </a:prstGeom>
-          <a:noFill/>
-          <a:ln w="3175">
-            <a:solidFill>
-              <a:schemeClr val="bg2">
-                <a:lumMod val="75000"/>
-              </a:schemeClr>
-            </a:solidFill>
-          </a:ln>
-        </p:spPr>
-        <p:style>
-          <a:lnRef idx="2">
-            <a:schemeClr val="accent1">
-              <a:shade val="15000"/>
-            </a:schemeClr>
-          </a:lnRef>
-          <a:fillRef idx="1">
-            <a:schemeClr val="accent1"/>
-          </a:fillRef>
-          <a:effectRef idx="0">
-            <a:schemeClr val="accent1"/>
-          </a:effectRef>
-          <a:fontRef idx="minor">
-            <a:schemeClr val="lt1"/>
-          </a:fontRef>
-        </p:style>
-        <p:txBody>
-          <a:bodyPr rtlCol="0" anchor="ctr"/>
-          <a:lstStyle/>
-          <a:p>
-            <a:pPr algn="ctr"/>
-            <a:endParaRPr lang="LID4096" dirty="0"/>
-          </a:p>
-        </p:txBody>
-      </p:sp>
-    </p:spTree>
-    <p:extLst>
-      <p:ext uri="{BB962C8B-B14F-4D97-AF65-F5344CB8AC3E}">
-        <p14:creationId xmlns:p14="http://schemas.microsoft.com/office/powerpoint/2010/main" val="3752529550"/>
-      </p:ext>
-    </p:extLst>
-  </p:cSld>
-  <p:clrMapOvr>
-    <a:masterClrMapping/>
-  </p:clrMapOvr>
-</p:sld>
-</file>
-
-<file path=ppt/slides/slide7.xml><?xml version="1.0" encoding="utf-8"?>
 <p:sld xmlns:a="http://schemas.openxmlformats.org/drawingml/2006/main" xmlns:r="http://schemas.openxmlformats.org/officeDocument/2006/relationships" xmlns:p="http://schemas.openxmlformats.org/presentationml/2006/main">
   <p:cSld>
     <p:spTree>
@@ -12738,7 +11661,7 @@
 </p:sld>
 </file>
 
-<file path=ppt/slides/slide8.xml><?xml version="1.0" encoding="utf-8"?>
+<file path=ppt/slides/slide7.xml><?xml version="1.0" encoding="utf-8"?>
 <p:sld xmlns:a="http://schemas.openxmlformats.org/drawingml/2006/main" xmlns:r="http://schemas.openxmlformats.org/officeDocument/2006/relationships" xmlns:p="http://schemas.openxmlformats.org/presentationml/2006/main">
   <p:cSld>
     <p:spTree>
@@ -13453,7 +12376,7 @@
 </p:sld>
 </file>
 
-<file path=ppt/slides/slide9.xml><?xml version="1.0" encoding="utf-8"?>
+<file path=ppt/slides/slide8.xml><?xml version="1.0" encoding="utf-8"?>
 <p:sld xmlns:a="http://schemas.openxmlformats.org/drawingml/2006/main" xmlns:r="http://schemas.openxmlformats.org/officeDocument/2006/relationships" xmlns:p="http://schemas.openxmlformats.org/presentationml/2006/main">
   <p:cSld>
     <p:spTree>
@@ -14260,6 +13183,1184 @@
     <p:extLst>
       <p:ext uri="{BB962C8B-B14F-4D97-AF65-F5344CB8AC3E}">
         <p14:creationId xmlns:p14="http://schemas.microsoft.com/office/powerpoint/2010/main" val="1674050375"/>
+      </p:ext>
+    </p:extLst>
+  </p:cSld>
+  <p:clrMapOvr>
+    <a:masterClrMapping/>
+  </p:clrMapOvr>
+</p:sld>
+</file>
+
+<file path=ppt/slides/slide9.xml><?xml version="1.0" encoding="utf-8"?>
+<p:sld xmlns:a="http://schemas.openxmlformats.org/drawingml/2006/main" xmlns:r="http://schemas.openxmlformats.org/officeDocument/2006/relationships" xmlns:p="http://schemas.openxmlformats.org/presentationml/2006/main">
+  <p:cSld>
+    <p:spTree>
+      <p:nvGrpSpPr>
+        <p:cNvPr id="1" name="">
+          <a:extLst>
+            <a:ext uri="{FF2B5EF4-FFF2-40B4-BE49-F238E27FC236}">
+              <a16:creationId xmlns:a16="http://schemas.microsoft.com/office/drawing/2014/main" id="{A564C6B1-33B9-2DBC-AC58-93D5A7CAC342}"/>
+            </a:ext>
+          </a:extLst>
+        </p:cNvPr>
+        <p:cNvGrpSpPr/>
+        <p:nvPr/>
+      </p:nvGrpSpPr>
+      <p:grpSpPr>
+        <a:xfrm>
+          <a:off x="0" y="0"/>
+          <a:ext cx="0" cy="0"/>
+          <a:chOff x="0" y="0"/>
+          <a:chExt cx="0" cy="0"/>
+        </a:xfrm>
+      </p:grpSpPr>
+      <p:sp>
+        <p:nvSpPr>
+          <p:cNvPr id="7" name="Rectangle: Rounded Corners 6">
+            <a:extLst>
+              <a:ext uri="{FF2B5EF4-FFF2-40B4-BE49-F238E27FC236}">
+                <a16:creationId xmlns:a16="http://schemas.microsoft.com/office/drawing/2014/main" id="{984F80A2-E69A-EE92-0461-010F2F7DE6F7}"/>
+              </a:ext>
+            </a:extLst>
+          </p:cNvPr>
+          <p:cNvSpPr/>
+          <p:nvPr/>
+        </p:nvSpPr>
+        <p:spPr>
+          <a:xfrm>
+            <a:off x="2679778" y="4506364"/>
+            <a:ext cx="2724811" cy="2046835"/>
+          </a:xfrm>
+          <a:prstGeom prst="roundRect">
+            <a:avLst/>
+          </a:prstGeom>
+          <a:solidFill>
+            <a:srgbClr val="FFC000"/>
+          </a:solidFill>
+          <a:ln>
+            <a:noFill/>
+          </a:ln>
+        </p:spPr>
+        <p:style>
+          <a:lnRef idx="2">
+            <a:schemeClr val="accent1">
+              <a:shade val="15000"/>
+            </a:schemeClr>
+          </a:lnRef>
+          <a:fillRef idx="1">
+            <a:schemeClr val="accent1"/>
+          </a:fillRef>
+          <a:effectRef idx="0">
+            <a:schemeClr val="accent1"/>
+          </a:effectRef>
+          <a:fontRef idx="minor">
+            <a:schemeClr val="lt1"/>
+          </a:fontRef>
+        </p:style>
+        <p:txBody>
+          <a:bodyPr rtlCol="0" anchor="ctr"/>
+          <a:lstStyle/>
+          <a:p>
+            <a:pPr algn="ctr"/>
+            <a:r>
+              <a:rPr lang="en-US" sz="2000" b="1" dirty="0" err="1">
+                <a:solidFill>
+                  <a:schemeClr val="tx1"/>
+                </a:solidFill>
+              </a:rPr>
+              <a:t>Prädiktiv</a:t>
+            </a:r>
+            <a:r>
+              <a:rPr lang="en-US" b="1" dirty="0">
+                <a:solidFill>
+                  <a:schemeClr val="tx1"/>
+                </a:solidFill>
+              </a:rPr>
+              <a:t> </a:t>
+            </a:r>
+          </a:p>
+          <a:p>
+            <a:pPr algn="ctr"/>
+            <a:endParaRPr lang="en-US" dirty="0">
+              <a:solidFill>
+                <a:schemeClr val="tx1"/>
+              </a:solidFill>
+            </a:endParaRPr>
+          </a:p>
+          <a:p>
+            <a:pPr algn="ctr"/>
+            <a:r>
+              <a:rPr lang="en-US" sz="1400" dirty="0">
+                <a:solidFill>
+                  <a:schemeClr val="tx1"/>
+                </a:solidFill>
+              </a:rPr>
+              <a:t>Was </a:t>
+            </a:r>
+            <a:r>
+              <a:rPr lang="en-US" sz="1400" dirty="0" err="1">
+                <a:solidFill>
+                  <a:schemeClr val="tx1"/>
+                </a:solidFill>
+              </a:rPr>
+              <a:t>wird</a:t>
+            </a:r>
+            <a:r>
+              <a:rPr lang="en-US" sz="1400" dirty="0">
+                <a:solidFill>
+                  <a:schemeClr val="tx1"/>
+                </a:solidFill>
+              </a:rPr>
+              <a:t> </a:t>
+            </a:r>
+            <a:r>
+              <a:rPr lang="en-US" sz="1400" dirty="0" err="1">
+                <a:solidFill>
+                  <a:schemeClr val="tx1"/>
+                </a:solidFill>
+              </a:rPr>
+              <a:t>wahrscheinlich</a:t>
+            </a:r>
+            <a:r>
+              <a:rPr lang="en-US" sz="1400" dirty="0">
+                <a:solidFill>
+                  <a:schemeClr val="tx1"/>
+                </a:solidFill>
+              </a:rPr>
+              <a:t> </a:t>
+            </a:r>
+            <a:r>
+              <a:rPr lang="en-US" sz="1400" dirty="0" err="1">
+                <a:solidFill>
+                  <a:schemeClr val="tx1"/>
+                </a:solidFill>
+              </a:rPr>
+              <a:t>passieren</a:t>
+            </a:r>
+            <a:r>
+              <a:rPr lang="en-US" sz="1400" dirty="0">
+                <a:solidFill>
+                  <a:schemeClr val="tx1"/>
+                </a:solidFill>
+              </a:rPr>
+              <a:t>?</a:t>
+            </a:r>
+          </a:p>
+          <a:p>
+            <a:pPr algn="ctr"/>
+            <a:r>
+              <a:rPr lang="en-US" sz="1400" dirty="0" err="1">
+                <a:solidFill>
+                  <a:schemeClr val="tx1"/>
+                </a:solidFill>
+              </a:rPr>
+              <a:t>Prognosen</a:t>
+            </a:r>
+            <a:endParaRPr lang="en-US" sz="1400" dirty="0">
+              <a:solidFill>
+                <a:schemeClr val="tx1"/>
+              </a:solidFill>
+            </a:endParaRPr>
+          </a:p>
+          <a:p>
+            <a:pPr algn="ctr"/>
+            <a:r>
+              <a:rPr lang="en-US" sz="1200" dirty="0">
+                <a:solidFill>
+                  <a:schemeClr val="tx1"/>
+                </a:solidFill>
+              </a:rPr>
+              <a:t>What would be the price of </a:t>
+            </a:r>
+            <a:r>
+              <a:rPr lang="en-US" sz="1200" dirty="0" err="1">
+                <a:solidFill>
+                  <a:schemeClr val="tx1"/>
+                </a:solidFill>
+              </a:rPr>
+              <a:t>Simense</a:t>
+            </a:r>
+            <a:r>
+              <a:rPr lang="en-US" sz="1200" dirty="0">
+                <a:solidFill>
+                  <a:schemeClr val="tx1"/>
+                </a:solidFill>
+              </a:rPr>
+              <a:t> tomorrow?</a:t>
+            </a:r>
+            <a:endParaRPr lang="LID4096" sz="1200" dirty="0">
+              <a:solidFill>
+                <a:schemeClr val="tx1"/>
+              </a:solidFill>
+            </a:endParaRPr>
+          </a:p>
+        </p:txBody>
+      </p:sp>
+      <p:sp>
+        <p:nvSpPr>
+          <p:cNvPr id="11" name="Rectangle: Rounded Corners 10">
+            <a:extLst>
+              <a:ext uri="{FF2B5EF4-FFF2-40B4-BE49-F238E27FC236}">
+                <a16:creationId xmlns:a16="http://schemas.microsoft.com/office/drawing/2014/main" id="{7B71A0FD-5076-CC95-7983-54F469C4EBF2}"/>
+              </a:ext>
+            </a:extLst>
+          </p:cNvPr>
+          <p:cNvSpPr/>
+          <p:nvPr/>
+        </p:nvSpPr>
+        <p:spPr>
+          <a:xfrm>
+            <a:off x="6359919" y="4506364"/>
+            <a:ext cx="2724811" cy="2046835"/>
+          </a:xfrm>
+          <a:prstGeom prst="roundRect">
+            <a:avLst/>
+          </a:prstGeom>
+          <a:solidFill>
+            <a:schemeClr val="accent2">
+              <a:lumMod val="60000"/>
+              <a:lumOff val="40000"/>
+            </a:schemeClr>
+          </a:solidFill>
+          <a:ln>
+            <a:noFill/>
+          </a:ln>
+        </p:spPr>
+        <p:style>
+          <a:lnRef idx="2">
+            <a:schemeClr val="accent1">
+              <a:shade val="15000"/>
+            </a:schemeClr>
+          </a:lnRef>
+          <a:fillRef idx="1">
+            <a:schemeClr val="accent1"/>
+          </a:fillRef>
+          <a:effectRef idx="0">
+            <a:schemeClr val="accent1"/>
+          </a:effectRef>
+          <a:fontRef idx="minor">
+            <a:schemeClr val="lt1"/>
+          </a:fontRef>
+        </p:style>
+        <p:txBody>
+          <a:bodyPr rtlCol="0" anchor="ctr"/>
+          <a:lstStyle/>
+          <a:p>
+            <a:pPr algn="ctr"/>
+            <a:r>
+              <a:rPr lang="en-US" sz="2000" b="1" dirty="0">
+                <a:solidFill>
+                  <a:schemeClr val="tx1"/>
+                </a:solidFill>
+              </a:rPr>
+              <a:t>Präskriptiv</a:t>
+            </a:r>
+            <a:r>
+              <a:rPr lang="en-US" b="1" dirty="0">
+                <a:solidFill>
+                  <a:schemeClr val="tx1"/>
+                </a:solidFill>
+              </a:rPr>
+              <a:t> </a:t>
+            </a:r>
+          </a:p>
+          <a:p>
+            <a:pPr algn="ctr"/>
+            <a:endParaRPr lang="en-US" dirty="0">
+              <a:solidFill>
+                <a:schemeClr val="tx1"/>
+              </a:solidFill>
+            </a:endParaRPr>
+          </a:p>
+          <a:p>
+            <a:pPr algn="ctr"/>
+            <a:r>
+              <a:rPr lang="en-US" sz="1400" dirty="0">
+                <a:solidFill>
+                  <a:schemeClr val="tx1"/>
+                </a:solidFill>
+              </a:rPr>
+              <a:t>Was </a:t>
+            </a:r>
+            <a:r>
+              <a:rPr lang="en-US" sz="1400" dirty="0" err="1">
+                <a:solidFill>
+                  <a:schemeClr val="tx1"/>
+                </a:solidFill>
+              </a:rPr>
+              <a:t>sollen</a:t>
+            </a:r>
+            <a:r>
+              <a:rPr lang="en-US" sz="1400" dirty="0">
+                <a:solidFill>
+                  <a:schemeClr val="tx1"/>
+                </a:solidFill>
+              </a:rPr>
+              <a:t> </a:t>
+            </a:r>
+            <a:r>
+              <a:rPr lang="en-US" sz="1400" dirty="0" err="1">
+                <a:solidFill>
+                  <a:schemeClr val="tx1"/>
+                </a:solidFill>
+              </a:rPr>
+              <a:t>wir</a:t>
+            </a:r>
+            <a:r>
+              <a:rPr lang="en-US" sz="1400" dirty="0">
+                <a:solidFill>
+                  <a:schemeClr val="tx1"/>
+                </a:solidFill>
+              </a:rPr>
+              <a:t> tun?</a:t>
+            </a:r>
+          </a:p>
+          <a:p>
+            <a:pPr algn="ctr"/>
+            <a:r>
+              <a:rPr lang="en-US" sz="1400" dirty="0" err="1">
+                <a:solidFill>
+                  <a:schemeClr val="tx1"/>
+                </a:solidFill>
+              </a:rPr>
+              <a:t>Handlungsempfehlungen</a:t>
+            </a:r>
+            <a:endParaRPr lang="en-US" sz="1400" dirty="0">
+              <a:solidFill>
+                <a:schemeClr val="tx1"/>
+              </a:solidFill>
+            </a:endParaRPr>
+          </a:p>
+          <a:p>
+            <a:pPr algn="ctr"/>
+            <a:r>
+              <a:rPr lang="en-US" sz="1200" dirty="0">
+                <a:solidFill>
+                  <a:schemeClr val="tx1"/>
+                </a:solidFill>
+              </a:rPr>
+              <a:t>Should we increase price by 5 % next month?</a:t>
+            </a:r>
+            <a:endParaRPr lang="LID4096" sz="1200" dirty="0">
+              <a:solidFill>
+                <a:schemeClr val="tx1"/>
+              </a:solidFill>
+            </a:endParaRPr>
+          </a:p>
+        </p:txBody>
+      </p:sp>
+      <p:sp>
+        <p:nvSpPr>
+          <p:cNvPr id="12" name="Rectangle: Rounded Corners 11">
+            <a:extLst>
+              <a:ext uri="{FF2B5EF4-FFF2-40B4-BE49-F238E27FC236}">
+                <a16:creationId xmlns:a16="http://schemas.microsoft.com/office/drawing/2014/main" id="{231F4F12-9BCF-8551-6603-E2EE4BD22D04}"/>
+              </a:ext>
+            </a:extLst>
+          </p:cNvPr>
+          <p:cNvSpPr/>
+          <p:nvPr/>
+        </p:nvSpPr>
+        <p:spPr>
+          <a:xfrm>
+            <a:off x="2679779" y="1659467"/>
+            <a:ext cx="2724811" cy="2046835"/>
+          </a:xfrm>
+          <a:prstGeom prst="roundRect">
+            <a:avLst/>
+          </a:prstGeom>
+          <a:solidFill>
+            <a:schemeClr val="accent1">
+              <a:lumMod val="60000"/>
+              <a:lumOff val="40000"/>
+            </a:schemeClr>
+          </a:solidFill>
+          <a:ln>
+            <a:noFill/>
+          </a:ln>
+        </p:spPr>
+        <p:style>
+          <a:lnRef idx="2">
+            <a:schemeClr val="accent1">
+              <a:shade val="15000"/>
+            </a:schemeClr>
+          </a:lnRef>
+          <a:fillRef idx="1">
+            <a:schemeClr val="accent1"/>
+          </a:fillRef>
+          <a:effectRef idx="0">
+            <a:schemeClr val="accent1"/>
+          </a:effectRef>
+          <a:fontRef idx="minor">
+            <a:schemeClr val="lt1"/>
+          </a:fontRef>
+        </p:style>
+        <p:txBody>
+          <a:bodyPr rtlCol="0" anchor="ctr"/>
+          <a:lstStyle/>
+          <a:p>
+            <a:pPr algn="ctr"/>
+            <a:r>
+              <a:rPr lang="en-US" sz="2000" b="1" dirty="0" err="1">
+                <a:solidFill>
+                  <a:schemeClr val="tx1"/>
+                </a:solidFill>
+              </a:rPr>
+              <a:t>Deskriptiv</a:t>
+            </a:r>
+            <a:r>
+              <a:rPr lang="en-US" sz="2000" b="1" dirty="0">
+                <a:solidFill>
+                  <a:schemeClr val="tx1"/>
+                </a:solidFill>
+              </a:rPr>
+              <a:t> </a:t>
+            </a:r>
+          </a:p>
+          <a:p>
+            <a:pPr algn="ctr"/>
+            <a:endParaRPr lang="en-US" dirty="0">
+              <a:solidFill>
+                <a:schemeClr val="tx1"/>
+              </a:solidFill>
+            </a:endParaRPr>
+          </a:p>
+          <a:p>
+            <a:pPr algn="ctr"/>
+            <a:r>
+              <a:rPr lang="en-US" sz="1400" dirty="0">
+                <a:solidFill>
+                  <a:schemeClr val="tx1"/>
+                </a:solidFill>
+              </a:rPr>
+              <a:t>Was </a:t>
+            </a:r>
+            <a:r>
+              <a:rPr lang="en-US" sz="1400" dirty="0" err="1">
+                <a:solidFill>
+                  <a:schemeClr val="tx1"/>
+                </a:solidFill>
+              </a:rPr>
+              <a:t>ist</a:t>
+            </a:r>
+            <a:r>
+              <a:rPr lang="en-US" sz="1400" dirty="0">
+                <a:solidFill>
+                  <a:schemeClr val="tx1"/>
+                </a:solidFill>
+              </a:rPr>
+              <a:t> </a:t>
+            </a:r>
+            <a:r>
+              <a:rPr lang="en-US" sz="1400" dirty="0" err="1">
+                <a:solidFill>
+                  <a:schemeClr val="tx1"/>
+                </a:solidFill>
+              </a:rPr>
+              <a:t>passiert</a:t>
+            </a:r>
+            <a:r>
+              <a:rPr lang="en-US" sz="1400" dirty="0">
+                <a:solidFill>
+                  <a:schemeClr val="tx1"/>
+                </a:solidFill>
+              </a:rPr>
+              <a:t>?</a:t>
+            </a:r>
+          </a:p>
+          <a:p>
+            <a:pPr algn="ctr"/>
+            <a:r>
+              <a:rPr lang="en-US" sz="1400" dirty="0">
+                <a:solidFill>
+                  <a:schemeClr val="tx1"/>
+                </a:solidFill>
+              </a:rPr>
+              <a:t>Dashboard, </a:t>
+            </a:r>
+            <a:r>
+              <a:rPr lang="en-US" sz="1400" dirty="0" err="1">
+                <a:solidFill>
+                  <a:schemeClr val="tx1"/>
+                </a:solidFill>
+              </a:rPr>
+              <a:t>daten</a:t>
+            </a:r>
+            <a:r>
+              <a:rPr lang="en-US" sz="1400" dirty="0">
+                <a:solidFill>
+                  <a:schemeClr val="tx1"/>
+                </a:solidFill>
+              </a:rPr>
+              <a:t> aggregation</a:t>
+            </a:r>
+          </a:p>
+          <a:p>
+            <a:pPr algn="ctr"/>
+            <a:r>
+              <a:rPr lang="en-US" sz="1200" dirty="0">
+                <a:solidFill>
+                  <a:schemeClr val="tx1">
+                    <a:lumMod val="85000"/>
+                    <a:lumOff val="15000"/>
+                  </a:schemeClr>
+                </a:solidFill>
+              </a:rPr>
+              <a:t>What was the average test score last month?</a:t>
+            </a:r>
+            <a:endParaRPr lang="LID4096" sz="1100" dirty="0">
+              <a:solidFill>
+                <a:schemeClr val="tx1">
+                  <a:lumMod val="85000"/>
+                  <a:lumOff val="15000"/>
+                </a:schemeClr>
+              </a:solidFill>
+            </a:endParaRPr>
+          </a:p>
+        </p:txBody>
+      </p:sp>
+      <p:sp>
+        <p:nvSpPr>
+          <p:cNvPr id="13" name="Rectangle: Rounded Corners 12">
+            <a:extLst>
+              <a:ext uri="{FF2B5EF4-FFF2-40B4-BE49-F238E27FC236}">
+                <a16:creationId xmlns:a16="http://schemas.microsoft.com/office/drawing/2014/main" id="{87173726-AE18-EB65-1992-70251583DB2C}"/>
+              </a:ext>
+            </a:extLst>
+          </p:cNvPr>
+          <p:cNvSpPr/>
+          <p:nvPr/>
+        </p:nvSpPr>
+        <p:spPr>
+          <a:xfrm>
+            <a:off x="6359920" y="1659467"/>
+            <a:ext cx="2724811" cy="2046835"/>
+          </a:xfrm>
+          <a:prstGeom prst="roundRect">
+            <a:avLst/>
+          </a:prstGeom>
+          <a:solidFill>
+            <a:schemeClr val="accent4">
+              <a:lumMod val="60000"/>
+              <a:lumOff val="40000"/>
+            </a:schemeClr>
+          </a:solidFill>
+          <a:ln>
+            <a:noFill/>
+          </a:ln>
+        </p:spPr>
+        <p:style>
+          <a:lnRef idx="2">
+            <a:schemeClr val="accent1">
+              <a:shade val="15000"/>
+            </a:schemeClr>
+          </a:lnRef>
+          <a:fillRef idx="1">
+            <a:schemeClr val="accent1"/>
+          </a:fillRef>
+          <a:effectRef idx="0">
+            <a:schemeClr val="accent1"/>
+          </a:effectRef>
+          <a:fontRef idx="minor">
+            <a:schemeClr val="lt1"/>
+          </a:fontRef>
+        </p:style>
+        <p:txBody>
+          <a:bodyPr rtlCol="0" anchor="ctr"/>
+          <a:lstStyle/>
+          <a:p>
+            <a:pPr algn="ctr"/>
+            <a:r>
+              <a:rPr lang="en-US" sz="2000" b="1" dirty="0" err="1">
+                <a:solidFill>
+                  <a:schemeClr val="tx1"/>
+                </a:solidFill>
+              </a:rPr>
+              <a:t>Diagnostisch</a:t>
+            </a:r>
+            <a:r>
+              <a:rPr lang="en-US" b="1" dirty="0">
+                <a:solidFill>
+                  <a:schemeClr val="tx1"/>
+                </a:solidFill>
+              </a:rPr>
+              <a:t> </a:t>
+            </a:r>
+          </a:p>
+          <a:p>
+            <a:pPr algn="ctr"/>
+            <a:endParaRPr lang="en-US" dirty="0">
+              <a:solidFill>
+                <a:schemeClr val="tx1"/>
+              </a:solidFill>
+            </a:endParaRPr>
+          </a:p>
+          <a:p>
+            <a:pPr algn="ctr"/>
+            <a:r>
+              <a:rPr lang="en-US" sz="1400" dirty="0" err="1">
+                <a:solidFill>
+                  <a:schemeClr val="tx1"/>
+                </a:solidFill>
+              </a:rPr>
+              <a:t>Warum</a:t>
+            </a:r>
+            <a:r>
+              <a:rPr lang="en-US" sz="1400" dirty="0">
+                <a:solidFill>
+                  <a:schemeClr val="tx1"/>
+                </a:solidFill>
+              </a:rPr>
+              <a:t> </a:t>
+            </a:r>
+            <a:r>
+              <a:rPr lang="en-US" sz="1400" dirty="0" err="1">
+                <a:solidFill>
+                  <a:schemeClr val="tx1"/>
+                </a:solidFill>
+              </a:rPr>
+              <a:t>ist</a:t>
+            </a:r>
+            <a:r>
+              <a:rPr lang="en-US" sz="1400" dirty="0">
+                <a:solidFill>
+                  <a:schemeClr val="tx1"/>
+                </a:solidFill>
+              </a:rPr>
+              <a:t> es </a:t>
+            </a:r>
+            <a:r>
+              <a:rPr lang="en-US" sz="1400" dirty="0" err="1">
+                <a:solidFill>
+                  <a:schemeClr val="tx1"/>
+                </a:solidFill>
+              </a:rPr>
+              <a:t>passiert</a:t>
+            </a:r>
+            <a:r>
+              <a:rPr lang="en-US" sz="1400" dirty="0">
+                <a:solidFill>
+                  <a:schemeClr val="tx1"/>
+                </a:solidFill>
+              </a:rPr>
+              <a:t>?</a:t>
+            </a:r>
+          </a:p>
+          <a:p>
+            <a:pPr algn="ctr"/>
+            <a:r>
+              <a:rPr lang="en-US" sz="1400" dirty="0" err="1">
+                <a:solidFill>
+                  <a:schemeClr val="tx1"/>
+                </a:solidFill>
+              </a:rPr>
+              <a:t>Ursachen</a:t>
+            </a:r>
+            <a:r>
+              <a:rPr lang="en-US" sz="1400" dirty="0">
+                <a:solidFill>
+                  <a:schemeClr val="tx1"/>
+                </a:solidFill>
+              </a:rPr>
+              <a:t> </a:t>
+            </a:r>
+            <a:r>
+              <a:rPr lang="en-US" sz="1400" dirty="0" err="1">
+                <a:solidFill>
+                  <a:schemeClr val="tx1"/>
+                </a:solidFill>
+              </a:rPr>
+              <a:t>analyse</a:t>
+            </a:r>
+            <a:endParaRPr lang="en-US" sz="1400" dirty="0">
+              <a:solidFill>
+                <a:schemeClr val="tx1"/>
+              </a:solidFill>
+            </a:endParaRPr>
+          </a:p>
+          <a:p>
+            <a:pPr algn="ctr"/>
+            <a:r>
+              <a:rPr lang="en-US" sz="1200" dirty="0">
+                <a:solidFill>
+                  <a:schemeClr val="tx1"/>
+                </a:solidFill>
+              </a:rPr>
+              <a:t>Why did sales drop last week?</a:t>
+            </a:r>
+            <a:endParaRPr lang="LID4096" sz="1400" dirty="0">
+              <a:solidFill>
+                <a:schemeClr val="tx1"/>
+              </a:solidFill>
+            </a:endParaRPr>
+          </a:p>
+        </p:txBody>
+      </p:sp>
+      <p:sp>
+        <p:nvSpPr>
+          <p:cNvPr id="16" name="TextBox 15">
+            <a:extLst>
+              <a:ext uri="{FF2B5EF4-FFF2-40B4-BE49-F238E27FC236}">
+                <a16:creationId xmlns:a16="http://schemas.microsoft.com/office/drawing/2014/main" id="{3E2F213E-ABFB-684F-098E-9FB8F1F6B320}"/>
+              </a:ext>
+            </a:extLst>
+          </p:cNvPr>
+          <p:cNvSpPr txBox="1"/>
+          <p:nvPr/>
+        </p:nvSpPr>
+        <p:spPr>
+          <a:xfrm>
+            <a:off x="543998" y="593523"/>
+            <a:ext cx="5966870" cy="523220"/>
+          </a:xfrm>
+          <a:prstGeom prst="rect">
+            <a:avLst/>
+          </a:prstGeom>
+          <a:noFill/>
+        </p:spPr>
+        <p:txBody>
+          <a:bodyPr wrap="square">
+            <a:spAutoFit/>
+          </a:bodyPr>
+          <a:lstStyle/>
+          <a:p>
+            <a:r>
+              <a:rPr lang="de-DE" sz="2800" b="1"/>
+              <a:t>Die 4 Arten von Datenanalyse-Fragen</a:t>
+            </a:r>
+            <a:endParaRPr lang="de-DE" sz="2800" b="1" dirty="0"/>
+          </a:p>
+        </p:txBody>
+      </p:sp>
+      <p:sp>
+        <p:nvSpPr>
+          <p:cNvPr id="18" name="TextBox 17">
+            <a:extLst>
+              <a:ext uri="{FF2B5EF4-FFF2-40B4-BE49-F238E27FC236}">
+                <a16:creationId xmlns:a16="http://schemas.microsoft.com/office/drawing/2014/main" id="{FABC9C7A-79F2-8071-3325-28541661B27C}"/>
+              </a:ext>
+            </a:extLst>
+          </p:cNvPr>
+          <p:cNvSpPr txBox="1"/>
+          <p:nvPr/>
+        </p:nvSpPr>
+        <p:spPr>
+          <a:xfrm>
+            <a:off x="10244668" y="47193"/>
+            <a:ext cx="1925335" cy="369332"/>
+          </a:xfrm>
+          <a:prstGeom prst="rect">
+            <a:avLst/>
+          </a:prstGeom>
+          <a:noFill/>
+        </p:spPr>
+        <p:txBody>
+          <a:bodyPr wrap="none" rtlCol="0">
+            <a:spAutoFit/>
+          </a:bodyPr>
+          <a:lstStyle/>
+          <a:p>
+            <a:r>
+              <a:rPr lang="en-US" dirty="0"/>
+              <a:t>Types of questions</a:t>
+            </a:r>
+            <a:endParaRPr lang="LID4096" dirty="0"/>
+          </a:p>
+        </p:txBody>
+      </p:sp>
+      <p:sp>
+        <p:nvSpPr>
+          <p:cNvPr id="3" name="TextBox 2">
+            <a:extLst>
+              <a:ext uri="{FF2B5EF4-FFF2-40B4-BE49-F238E27FC236}">
+                <a16:creationId xmlns:a16="http://schemas.microsoft.com/office/drawing/2014/main" id="{F61FDF87-0196-5D30-43A5-57C441EC1778}"/>
+              </a:ext>
+            </a:extLst>
+          </p:cNvPr>
+          <p:cNvSpPr txBox="1"/>
+          <p:nvPr/>
+        </p:nvSpPr>
+        <p:spPr>
+          <a:xfrm>
+            <a:off x="626924" y="2359719"/>
+            <a:ext cx="1937390" cy="584775"/>
+          </a:xfrm>
+          <a:prstGeom prst="rect">
+            <a:avLst/>
+          </a:prstGeom>
+          <a:noFill/>
+        </p:spPr>
+        <p:txBody>
+          <a:bodyPr wrap="none" rtlCol="0">
+            <a:spAutoFit/>
+          </a:bodyPr>
+          <a:lstStyle/>
+          <a:p>
+            <a:pPr algn="r"/>
+            <a:r>
+              <a:rPr lang="en-US" sz="1600" b="1" dirty="0"/>
+              <a:t>Descriptive Statistics</a:t>
+            </a:r>
+          </a:p>
+          <a:p>
+            <a:pPr algn="r"/>
+            <a:r>
+              <a:rPr lang="en-US" sz="1600" b="1" dirty="0"/>
+              <a:t>Data Visualization</a:t>
+            </a:r>
+            <a:endParaRPr lang="LID4096" sz="1600" b="1" dirty="0"/>
+          </a:p>
+        </p:txBody>
+      </p:sp>
+      <p:sp>
+        <p:nvSpPr>
+          <p:cNvPr id="4" name="TextBox 3">
+            <a:extLst>
+              <a:ext uri="{FF2B5EF4-FFF2-40B4-BE49-F238E27FC236}">
+                <a16:creationId xmlns:a16="http://schemas.microsoft.com/office/drawing/2014/main" id="{60AD942C-8FD8-D60A-3073-1850358CD9AB}"/>
+              </a:ext>
+            </a:extLst>
+          </p:cNvPr>
+          <p:cNvSpPr txBox="1"/>
+          <p:nvPr/>
+        </p:nvSpPr>
+        <p:spPr>
+          <a:xfrm>
+            <a:off x="863031" y="5206616"/>
+            <a:ext cx="1704314" cy="584775"/>
+          </a:xfrm>
+          <a:prstGeom prst="rect">
+            <a:avLst/>
+          </a:prstGeom>
+          <a:noFill/>
+        </p:spPr>
+        <p:txBody>
+          <a:bodyPr wrap="none" rtlCol="0">
+            <a:spAutoFit/>
+          </a:bodyPr>
+          <a:lstStyle/>
+          <a:p>
+            <a:pPr algn="r"/>
+            <a:r>
+              <a:rPr lang="en-US" sz="1600" b="1" dirty="0"/>
+              <a:t>Statistical Models</a:t>
+            </a:r>
+          </a:p>
+          <a:p>
+            <a:pPr algn="r"/>
+            <a:r>
+              <a:rPr lang="en-US" sz="1600" b="1" dirty="0"/>
+              <a:t>Machine Learning</a:t>
+            </a:r>
+            <a:endParaRPr lang="LID4096" sz="1600" b="1" dirty="0"/>
+          </a:p>
+        </p:txBody>
+      </p:sp>
+      <p:sp>
+        <p:nvSpPr>
+          <p:cNvPr id="5" name="TextBox 4">
+            <a:extLst>
+              <a:ext uri="{FF2B5EF4-FFF2-40B4-BE49-F238E27FC236}">
+                <a16:creationId xmlns:a16="http://schemas.microsoft.com/office/drawing/2014/main" id="{9AE0182F-C8DA-D523-76A6-C6F6B484F738}"/>
+              </a:ext>
+            </a:extLst>
+          </p:cNvPr>
+          <p:cNvSpPr txBox="1"/>
+          <p:nvPr/>
+        </p:nvSpPr>
+        <p:spPr>
+          <a:xfrm>
+            <a:off x="9177860" y="2359719"/>
+            <a:ext cx="1480213" cy="584775"/>
+          </a:xfrm>
+          <a:prstGeom prst="rect">
+            <a:avLst/>
+          </a:prstGeom>
+          <a:noFill/>
+        </p:spPr>
+        <p:txBody>
+          <a:bodyPr wrap="none" rtlCol="0">
+            <a:spAutoFit/>
+          </a:bodyPr>
+          <a:lstStyle/>
+          <a:p>
+            <a:r>
+              <a:rPr lang="en-US" sz="1600" b="1" dirty="0"/>
+              <a:t>Correlation</a:t>
+            </a:r>
+          </a:p>
+          <a:p>
+            <a:r>
+              <a:rPr lang="en-US" sz="1600" b="1" dirty="0"/>
+              <a:t>Causal Analysis</a:t>
+            </a:r>
+            <a:endParaRPr lang="LID4096" sz="1600" b="1" dirty="0"/>
+          </a:p>
+        </p:txBody>
+      </p:sp>
+      <p:sp>
+        <p:nvSpPr>
+          <p:cNvPr id="6" name="TextBox 5">
+            <a:extLst>
+              <a:ext uri="{FF2B5EF4-FFF2-40B4-BE49-F238E27FC236}">
+                <a16:creationId xmlns:a16="http://schemas.microsoft.com/office/drawing/2014/main" id="{E2A80A53-B08D-145C-7923-F30376ABA6A6}"/>
+              </a:ext>
+            </a:extLst>
+          </p:cNvPr>
+          <p:cNvSpPr txBox="1"/>
+          <p:nvPr/>
+        </p:nvSpPr>
+        <p:spPr>
+          <a:xfrm>
+            <a:off x="9177863" y="5206616"/>
+            <a:ext cx="1290161" cy="584775"/>
+          </a:xfrm>
+          <a:prstGeom prst="rect">
+            <a:avLst/>
+          </a:prstGeom>
+          <a:noFill/>
+        </p:spPr>
+        <p:txBody>
+          <a:bodyPr wrap="none" rtlCol="0">
+            <a:spAutoFit/>
+          </a:bodyPr>
+          <a:lstStyle/>
+          <a:p>
+            <a:r>
+              <a:rPr lang="en-US" sz="1600" b="1" dirty="0"/>
+              <a:t>Optimization</a:t>
+            </a:r>
+          </a:p>
+          <a:p>
+            <a:r>
+              <a:rPr lang="en-US" sz="1600" b="1" dirty="0"/>
+              <a:t>Simulation</a:t>
+            </a:r>
+            <a:endParaRPr lang="LID4096" sz="1600" b="1" dirty="0"/>
+          </a:p>
+        </p:txBody>
+      </p:sp>
+      <p:sp>
+        <p:nvSpPr>
+          <p:cNvPr id="9" name="Rectangle: Rounded Corners 8">
+            <a:extLst>
+              <a:ext uri="{FF2B5EF4-FFF2-40B4-BE49-F238E27FC236}">
+                <a16:creationId xmlns:a16="http://schemas.microsoft.com/office/drawing/2014/main" id="{0002193A-84CB-700C-5867-C5B2E81AF05A}"/>
+              </a:ext>
+            </a:extLst>
+          </p:cNvPr>
+          <p:cNvSpPr/>
+          <p:nvPr/>
+        </p:nvSpPr>
+        <p:spPr>
+          <a:xfrm>
+            <a:off x="6359920" y="1659467"/>
+            <a:ext cx="4790677" cy="2046835"/>
+          </a:xfrm>
+          <a:prstGeom prst="roundRect">
+            <a:avLst/>
+          </a:prstGeom>
+          <a:noFill/>
+          <a:ln>
+            <a:solidFill>
+              <a:schemeClr val="bg2">
+                <a:lumMod val="50000"/>
+              </a:schemeClr>
+            </a:solidFill>
+          </a:ln>
+        </p:spPr>
+        <p:style>
+          <a:lnRef idx="2">
+            <a:schemeClr val="accent1">
+              <a:shade val="15000"/>
+            </a:schemeClr>
+          </a:lnRef>
+          <a:fillRef idx="1">
+            <a:schemeClr val="accent1"/>
+          </a:fillRef>
+          <a:effectRef idx="0">
+            <a:schemeClr val="accent1"/>
+          </a:effectRef>
+          <a:fontRef idx="minor">
+            <a:schemeClr val="lt1"/>
+          </a:fontRef>
+        </p:style>
+        <p:txBody>
+          <a:bodyPr rtlCol="0" anchor="ctr"/>
+          <a:lstStyle/>
+          <a:p>
+            <a:pPr algn="ctr"/>
+            <a:endParaRPr lang="LID4096"/>
+          </a:p>
+        </p:txBody>
+      </p:sp>
+      <p:sp>
+        <p:nvSpPr>
+          <p:cNvPr id="10" name="Rectangle: Rounded Corners 9">
+            <a:extLst>
+              <a:ext uri="{FF2B5EF4-FFF2-40B4-BE49-F238E27FC236}">
+                <a16:creationId xmlns:a16="http://schemas.microsoft.com/office/drawing/2014/main" id="{3477360A-A6CA-8090-D9B6-2F77EE651BB4}"/>
+              </a:ext>
+            </a:extLst>
+          </p:cNvPr>
+          <p:cNvSpPr/>
+          <p:nvPr/>
+        </p:nvSpPr>
+        <p:spPr>
+          <a:xfrm>
+            <a:off x="6359918" y="4506364"/>
+            <a:ext cx="4790677" cy="2046835"/>
+          </a:xfrm>
+          <a:prstGeom prst="roundRect">
+            <a:avLst/>
+          </a:prstGeom>
+          <a:noFill/>
+          <a:ln>
+            <a:solidFill>
+              <a:schemeClr val="bg2">
+                <a:lumMod val="50000"/>
+              </a:schemeClr>
+            </a:solidFill>
+          </a:ln>
+        </p:spPr>
+        <p:style>
+          <a:lnRef idx="2">
+            <a:schemeClr val="accent1">
+              <a:shade val="15000"/>
+            </a:schemeClr>
+          </a:lnRef>
+          <a:fillRef idx="1">
+            <a:schemeClr val="accent1"/>
+          </a:fillRef>
+          <a:effectRef idx="0">
+            <a:schemeClr val="accent1"/>
+          </a:effectRef>
+          <a:fontRef idx="minor">
+            <a:schemeClr val="lt1"/>
+          </a:fontRef>
+        </p:style>
+        <p:txBody>
+          <a:bodyPr rtlCol="0" anchor="ctr"/>
+          <a:lstStyle/>
+          <a:p>
+            <a:pPr algn="ctr"/>
+            <a:endParaRPr lang="LID4096"/>
+          </a:p>
+        </p:txBody>
+      </p:sp>
+      <p:sp>
+        <p:nvSpPr>
+          <p:cNvPr id="14" name="Rectangle: Rounded Corners 13">
+            <a:extLst>
+              <a:ext uri="{FF2B5EF4-FFF2-40B4-BE49-F238E27FC236}">
+                <a16:creationId xmlns:a16="http://schemas.microsoft.com/office/drawing/2014/main" id="{C9E85107-94D1-05C9-6C9A-0E850790520B}"/>
+              </a:ext>
+            </a:extLst>
+          </p:cNvPr>
+          <p:cNvSpPr/>
+          <p:nvPr/>
+        </p:nvSpPr>
+        <p:spPr>
+          <a:xfrm>
+            <a:off x="613912" y="4506364"/>
+            <a:ext cx="4790677" cy="2046835"/>
+          </a:xfrm>
+          <a:prstGeom prst="roundRect">
+            <a:avLst/>
+          </a:prstGeom>
+          <a:noFill/>
+          <a:ln>
+            <a:solidFill>
+              <a:schemeClr val="bg2">
+                <a:lumMod val="50000"/>
+              </a:schemeClr>
+            </a:solidFill>
+          </a:ln>
+        </p:spPr>
+        <p:style>
+          <a:lnRef idx="2">
+            <a:schemeClr val="accent1">
+              <a:shade val="15000"/>
+            </a:schemeClr>
+          </a:lnRef>
+          <a:fillRef idx="1">
+            <a:schemeClr val="accent1"/>
+          </a:fillRef>
+          <a:effectRef idx="0">
+            <a:schemeClr val="accent1"/>
+          </a:effectRef>
+          <a:fontRef idx="minor">
+            <a:schemeClr val="lt1"/>
+          </a:fontRef>
+        </p:style>
+        <p:txBody>
+          <a:bodyPr rtlCol="0" anchor="ctr"/>
+          <a:lstStyle/>
+          <a:p>
+            <a:pPr algn="ctr"/>
+            <a:endParaRPr lang="LID4096"/>
+          </a:p>
+        </p:txBody>
+      </p:sp>
+      <p:sp>
+        <p:nvSpPr>
+          <p:cNvPr id="15" name="Rectangle: Rounded Corners 14">
+            <a:extLst>
+              <a:ext uri="{FF2B5EF4-FFF2-40B4-BE49-F238E27FC236}">
+                <a16:creationId xmlns:a16="http://schemas.microsoft.com/office/drawing/2014/main" id="{13717B85-EE2E-262B-C0F0-4AAA39343A5B}"/>
+              </a:ext>
+            </a:extLst>
+          </p:cNvPr>
+          <p:cNvSpPr/>
+          <p:nvPr/>
+        </p:nvSpPr>
+        <p:spPr>
+          <a:xfrm>
+            <a:off x="613912" y="1659466"/>
+            <a:ext cx="4790677" cy="2046835"/>
+          </a:xfrm>
+          <a:prstGeom prst="roundRect">
+            <a:avLst/>
+          </a:prstGeom>
+          <a:noFill/>
+          <a:ln>
+            <a:solidFill>
+              <a:schemeClr val="bg2">
+                <a:lumMod val="50000"/>
+              </a:schemeClr>
+            </a:solidFill>
+          </a:ln>
+        </p:spPr>
+        <p:style>
+          <a:lnRef idx="2">
+            <a:schemeClr val="accent1">
+              <a:shade val="15000"/>
+            </a:schemeClr>
+          </a:lnRef>
+          <a:fillRef idx="1">
+            <a:schemeClr val="accent1"/>
+          </a:fillRef>
+          <a:effectRef idx="0">
+            <a:schemeClr val="accent1"/>
+          </a:effectRef>
+          <a:fontRef idx="minor">
+            <a:schemeClr val="lt1"/>
+          </a:fontRef>
+        </p:style>
+        <p:txBody>
+          <a:bodyPr rtlCol="0" anchor="ctr"/>
+          <a:lstStyle/>
+          <a:p>
+            <a:pPr algn="ctr"/>
+            <a:endParaRPr lang="LID4096"/>
+          </a:p>
+        </p:txBody>
+      </p:sp>
+    </p:spTree>
+    <p:extLst>
+      <p:ext uri="{BB962C8B-B14F-4D97-AF65-F5344CB8AC3E}">
+        <p14:creationId xmlns:p14="http://schemas.microsoft.com/office/powerpoint/2010/main" val="1970244850"/>
       </p:ext>
     </p:extLst>
   </p:cSld>
